--- a/demo/deck/deck.pptx
+++ b/demo/deck/deck.pptx
@@ -1191,7 +1191,7 @@
           </a:p>
           <a:p>
             <a:r>
-              <a:t>Fuentes: reports/business_value/runs_per_win.csv; reports/business_value/gm_example.csv · escala de Stuff+ medida con v1.</a:t>
+              <a:t>Fuentes: reports/business_value/runs_per_win.csv; reports/business_value/gm_example.csv · puntos de Stuff+ v2 fuera de pliegue.</a:t>
             </a:r>
           </a:p>
         </p:txBody>
@@ -8610,7 +8610,7 @@
               </a:defRPr>
             </a:pPr>
             <a:r>
-              <a:t>5.5 carreras</a:t>
+              <a:t>6.5 carreras</a:t>
             </a:r>
           </a:p>
         </p:txBody>
@@ -8646,7 +8646,7 @@
               </a:defRPr>
             </a:pPr>
             <a:r>
-              <a:t>0.38 victorias por temporada</a:t>
+              <a:t>0.46 victorias por temporada</a:t>
             </a:r>
           </a:p>
         </p:txBody>
@@ -8682,7 +8682,7 @@
               </a:defRPr>
             </a:pPr>
             <a:r>
-              <a:t>Mezcla 4.3 · aperturas 1.2</a:t>
+              <a:t>Mezcla 5.2 · aperturas 1.4</a:t>
             </a:r>
           </a:p>
         </p:txBody>
@@ -8754,7 +8754,7 @@
               </a:defRPr>
             </a:pPr>
             <a:r>
-              <a:t>3.8 carreras</a:t>
+              <a:t>4.5 carreras</a:t>
             </a:r>
           </a:p>
         </p:txBody>
@@ -8790,7 +8790,7 @@
               </a:defRPr>
             </a:pPr>
             <a:r>
-              <a:t>0.26 victorias por temporada</a:t>
+              <a:t>0.32 victorias por temporada</a:t>
             </a:r>
           </a:p>
         </p:txBody>
@@ -8826,7 +8826,7 @@
               </a:defRPr>
             </a:pPr>
             <a:r>
-              <a:t>Mezcla 2.0 · aperturas 1.8</a:t>
+              <a:t>Mezcla 2.3 · aperturas 2.2</a:t>
             </a:r>
           </a:p>
         </p:txBody>
@@ -9422,7 +9422,7 @@
               </a:defRPr>
             </a:pPr>
             <a:r>
-              <a:t>reports/business_value/runs_per_win.csv; reports/business_value/gm_example.csv · escala de Stuff+ medida con v1.</a:t>
+              <a:t>reports/business_value/runs_per_win.csv; reports/business_value/gm_example.csv · puntos de Stuff+ v2 fuera de pliegue.</a:t>
             </a:r>
           </a:p>
         </p:txBody>
@@ -9710,7 +9710,7 @@
               </a:defRPr>
             </a:pPr>
             <a:r>
-              <a:t>1.26</a:t>
+              <a:t>1.51</a:t>
             </a:r>
           </a:p>
         </p:txBody>
@@ -9818,7 +9818,7 @@
               </a:defRPr>
             </a:pPr>
             <a:r>
-              <a:t>+10 puntos en 2,500 lanzamientos = 18.1 carreras (escenario).</a:t>
+              <a:t>+10 puntos en 2,500 lanzamientos = 21.7 carreras (escenario).</a:t>
             </a:r>
           </a:p>
         </p:txBody>

--- a/demo/deck/deck.pptx
+++ b/demo/deck/deck.pptx
@@ -1116,7 +1116,7 @@
           </a:p>
           <a:p>
             <a:r>
-              <a:t>Fuentes: Capturas del simulador 3D y del explicador de física (web/, build de HACK-045 y HACK-072).</a:t>
+              <a:t>Fuentes: Capturas del simulador 3D y del explicador de física (Playwright, web/e2e/screenshots, HACK-051).</a:t>
             </a:r>
           </a:p>
         </p:txBody>
@@ -9082,7 +9082,7 @@
               </a:defRPr>
             </a:pPr>
             <a:r>
-              <a:t>Capturas del simulador 3D y del explicador de física (web/, build de HACK-045 y HACK-072).</a:t>
+              <a:t>Capturas del simulador 3D y del explicador de física (Playwright, web/e2e/screenshots, HACK-051).</a:t>
             </a:r>
           </a:p>
         </p:txBody>

--- a/demo/deck/deck.pptx
+++ b/demo/deck/deck.pptx
@@ -4212,7 +4212,7 @@
             <a:avLst/>
           </a:prstGeom>
           <a:solidFill>
-            <a:srgbClr val="202124"/>
+            <a:srgbClr val="121316"/>
           </a:solidFill>
           <a:ln>
             <a:noFill/>
@@ -4234,8 +4234,8 @@
         </p:nvSpPr>
         <p:spPr>
           <a:xfrm>
-            <a:off x="508000" y="292100"/>
-            <a:ext cx="533400" cy="50800"/>
+            <a:off x="0" y="0"/>
+            <a:ext cx="76200" cy="5143500"/>
           </a:xfrm>
           <a:prstGeom prst="rect">
             <a:avLst/>
@@ -4257,30 +4257,59 @@
       </p:sp>
       <p:sp>
         <p:nvSpPr>
-          <p:cNvPr id="4" name="TextBox 3"/>
-          <p:cNvSpPr txBox="1"/>
-          <p:nvPr/>
-        </p:nvSpPr>
-        <p:spPr>
-          <a:xfrm>
-            <a:off x="1206500" y="203200"/>
-            <a:ext cx="7239000" cy="220979"/>
-          </a:xfrm>
-          <a:prstGeom prst="rect">
-            <a:avLst/>
-          </a:prstGeom>
-          <a:noFill/>
-        </p:spPr>
-        <p:txBody>
-          <a:bodyPr wrap="none" lIns="0" rIns="0" tIns="0" bIns="0" anchor="t">
-            <a:spAutoFit/>
-          </a:bodyPr>
-          <a:lstStyle/>
-          <a:p>
-            <a:pPr>
-              <a:defRPr sz="1000" b="0">
-                <a:solidFill>
-                  <a:srgbClr val="ECEDEF"/>
+          <p:cNvPr id="4" name="Rectangle 3"/>
+          <p:cNvSpPr/>
+          <p:nvPr/>
+        </p:nvSpPr>
+        <p:spPr>
+          <a:xfrm>
+            <a:off x="508000" y="304800"/>
+            <a:ext cx="101600" cy="101600"/>
+          </a:xfrm>
+          <a:prstGeom prst="rect">
+            <a:avLst/>
+          </a:prstGeom>
+          <a:solidFill>
+            <a:srgbClr val="D71920"/>
+          </a:solidFill>
+          <a:ln>
+            <a:noFill/>
+          </a:ln>
+        </p:spPr>
+        <p:txBody>
+          <a:bodyPr rtlCol="0" anchor="ctr"/>
+          <a:lstStyle/>
+          <a:p>
+            <a:pPr algn="ctr"/>
+          </a:p>
+        </p:txBody>
+      </p:sp>
+      <p:sp>
+        <p:nvSpPr>
+          <p:cNvPr id="5" name="TextBox 4"/>
+          <p:cNvSpPr txBox="1"/>
+          <p:nvPr/>
+        </p:nvSpPr>
+        <p:spPr>
+          <a:xfrm>
+            <a:off x="711200" y="241300"/>
+            <a:ext cx="6096000" cy="205232"/>
+          </a:xfrm>
+          <a:prstGeom prst="rect">
+            <a:avLst/>
+          </a:prstGeom>
+          <a:noFill/>
+        </p:spPr>
+        <p:txBody>
+          <a:bodyPr wrap="none" lIns="0" rIns="0" tIns="0" bIns="0" anchor="t">
+            <a:spAutoFit/>
+          </a:bodyPr>
+          <a:lstStyle/>
+          <a:p>
+            <a:pPr>
+              <a:defRPr sz="900" b="1">
+                <a:solidFill>
+                  <a:srgbClr val="9EA1A7"/>
                 </a:solidFill>
                 <a:latin typeface="Arial"/>
               </a:defRPr>
@@ -4293,30 +4322,66 @@
       </p:sp>
       <p:sp>
         <p:nvSpPr>
-          <p:cNvPr id="5" name="TextBox 4"/>
-          <p:cNvSpPr txBox="1"/>
-          <p:nvPr/>
-        </p:nvSpPr>
-        <p:spPr>
-          <a:xfrm>
-            <a:off x="508000" y="647700"/>
-            <a:ext cx="8128000" cy="457200"/>
-          </a:xfrm>
-          <a:prstGeom prst="rect">
-            <a:avLst/>
-          </a:prstGeom>
-          <a:noFill/>
-        </p:spPr>
-        <p:txBody>
-          <a:bodyPr wrap="none" lIns="0" rIns="0" tIns="0" bIns="0" anchor="t">
-            <a:spAutoFit/>
-          </a:bodyPr>
-          <a:lstStyle/>
-          <a:p>
-            <a:pPr>
-              <a:defRPr sz="2600" b="1">
-                <a:solidFill>
-                  <a:srgbClr val="FFFFFF"/>
+          <p:cNvPr id="6" name="TextBox 5"/>
+          <p:cNvSpPr txBox="1"/>
+          <p:nvPr/>
+        </p:nvSpPr>
+        <p:spPr>
+          <a:xfrm>
+            <a:off x="8331200" y="241300"/>
+            <a:ext cx="381000" cy="236728"/>
+          </a:xfrm>
+          <a:prstGeom prst="rect">
+            <a:avLst/>
+          </a:prstGeom>
+          <a:noFill/>
+        </p:spPr>
+        <p:txBody>
+          <a:bodyPr wrap="none" lIns="0" rIns="0" tIns="0" bIns="0" anchor="t">
+            <a:spAutoFit/>
+          </a:bodyPr>
+          <a:lstStyle/>
+          <a:p>
+            <a:pPr>
+              <a:defRPr sz="1100" b="1">
+                <a:solidFill>
+                  <a:srgbClr val="D71920"/>
+                </a:solidFill>
+                <a:latin typeface="Arial"/>
+              </a:defRPr>
+            </a:pPr>
+            <a:r>
+              <a:t>01</a:t>
+            </a:r>
+          </a:p>
+        </p:txBody>
+      </p:sp>
+      <p:sp>
+        <p:nvSpPr>
+          <p:cNvPr id="7" name="TextBox 6"/>
+          <p:cNvSpPr txBox="1"/>
+          <p:nvPr/>
+        </p:nvSpPr>
+        <p:spPr>
+          <a:xfrm>
+            <a:off x="508000" y="584200"/>
+            <a:ext cx="8128000" cy="444500"/>
+          </a:xfrm>
+          <a:prstGeom prst="rect">
+            <a:avLst/>
+          </a:prstGeom>
+          <a:noFill/>
+        </p:spPr>
+        <p:txBody>
+          <a:bodyPr wrap="none" lIns="0" rIns="0" tIns="0" bIns="0" anchor="t">
+            <a:spAutoFit/>
+          </a:bodyPr>
+          <a:lstStyle/>
+          <a:p>
+            <a:pPr>
+              <a:defRPr sz="2500" b="1">
+                <a:solidFill>
+                  <a:srgbClr val="F4F4F5"/>
                 </a:solidFill>
                 <a:latin typeface="Arial"/>
               </a:defRPr>
@@ -4329,30 +4394,30 @@
       </p:sp>
       <p:sp>
         <p:nvSpPr>
-          <p:cNvPr id="6" name="TextBox 5"/>
-          <p:cNvSpPr txBox="1"/>
-          <p:nvPr/>
-        </p:nvSpPr>
-        <p:spPr>
-          <a:xfrm>
-            <a:off x="508000" y="1041400"/>
-            <a:ext cx="8128000" cy="457200"/>
-          </a:xfrm>
-          <a:prstGeom prst="rect">
-            <a:avLst/>
-          </a:prstGeom>
-          <a:noFill/>
-        </p:spPr>
-        <p:txBody>
-          <a:bodyPr wrap="none" lIns="0" rIns="0" tIns="0" bIns="0" anchor="t">
-            <a:spAutoFit/>
-          </a:bodyPr>
-          <a:lstStyle/>
-          <a:p>
-            <a:pPr>
-              <a:defRPr sz="2600" b="1">
-                <a:solidFill>
-                  <a:srgbClr val="FFFFFF"/>
+          <p:cNvPr id="8" name="TextBox 7"/>
+          <p:cNvSpPr txBox="1"/>
+          <p:nvPr/>
+        </p:nvSpPr>
+        <p:spPr>
+          <a:xfrm>
+            <a:off x="508000" y="965200"/>
+            <a:ext cx="8128000" cy="444500"/>
+          </a:xfrm>
+          <a:prstGeom prst="rect">
+            <a:avLst/>
+          </a:prstGeom>
+          <a:noFill/>
+        </p:spPr>
+        <p:txBody>
+          <a:bodyPr wrap="none" lIns="0" rIns="0" tIns="0" bIns="0" anchor="t">
+            <a:spAutoFit/>
+          </a:bodyPr>
+          <a:lstStyle/>
+          <a:p>
+            <a:pPr>
+              <a:defRPr sz="2500" b="1">
+                <a:solidFill>
+                  <a:srgbClr val="F4F4F5"/>
                 </a:solidFill>
                 <a:latin typeface="Arial"/>
               </a:defRPr>
@@ -4365,30 +4430,59 @@
       </p:sp>
       <p:sp>
         <p:nvSpPr>
-          <p:cNvPr id="7" name="TextBox 6"/>
-          <p:cNvSpPr txBox="1"/>
-          <p:nvPr/>
-        </p:nvSpPr>
-        <p:spPr>
-          <a:xfrm>
-            <a:off x="508000" y="4495800"/>
-            <a:ext cx="7620000" cy="196850"/>
-          </a:xfrm>
-          <a:prstGeom prst="rect">
-            <a:avLst/>
-          </a:prstGeom>
-          <a:noFill/>
-        </p:spPr>
-        <p:txBody>
-          <a:bodyPr wrap="none" lIns="0" rIns="0" tIns="0" bIns="0" anchor="t">
-            <a:spAutoFit/>
-          </a:bodyPr>
-          <a:lstStyle/>
-          <a:p>
-            <a:pPr>
-              <a:defRPr sz="800" b="0">
-                <a:solidFill>
-                  <a:srgbClr val="ECEDEF"/>
+          <p:cNvPr id="9" name="Rectangle 8"/>
+          <p:cNvSpPr/>
+          <p:nvPr/>
+        </p:nvSpPr>
+        <p:spPr>
+          <a:xfrm>
+            <a:off x="508000" y="4572000"/>
+            <a:ext cx="8128000" cy="10160"/>
+          </a:xfrm>
+          <a:prstGeom prst="rect">
+            <a:avLst/>
+          </a:prstGeom>
+          <a:solidFill>
+            <a:srgbClr val="1F2125"/>
+          </a:solidFill>
+          <a:ln>
+            <a:noFill/>
+          </a:ln>
+        </p:spPr>
+        <p:txBody>
+          <a:bodyPr rtlCol="0" anchor="ctr"/>
+          <a:lstStyle/>
+          <a:p>
+            <a:pPr algn="ctr"/>
+          </a:p>
+        </p:txBody>
+      </p:sp>
+      <p:sp>
+        <p:nvSpPr>
+          <p:cNvPr id="10" name="TextBox 9"/>
+          <p:cNvSpPr txBox="1"/>
+          <p:nvPr/>
+        </p:nvSpPr>
+        <p:spPr>
+          <a:xfrm>
+            <a:off x="508000" y="4660900"/>
+            <a:ext cx="7747000" cy="190500"/>
+          </a:xfrm>
+          <a:prstGeom prst="rect">
+            <a:avLst/>
+          </a:prstGeom>
+          <a:noFill/>
+        </p:spPr>
+        <p:txBody>
+          <a:bodyPr wrap="none" lIns="0" rIns="0" tIns="0" bIns="0" anchor="t">
+            <a:spAutoFit/>
+          </a:bodyPr>
+          <a:lstStyle/>
+          <a:p>
+            <a:pPr>
+              <a:defRPr sz="750" b="0">
+                <a:solidFill>
+                  <a:srgbClr val="9EA1A7"/>
                 </a:solidFill>
                 <a:latin typeface="Arial"/>
               </a:defRPr>
@@ -4401,144 +4495,36 @@
       </p:sp>
       <p:sp>
         <p:nvSpPr>
-          <p:cNvPr id="8" name="TextBox 7"/>
-          <p:cNvSpPr txBox="1"/>
-          <p:nvPr/>
-        </p:nvSpPr>
-        <p:spPr>
-          <a:xfrm>
-            <a:off x="8255000" y="4813300"/>
-            <a:ext cx="381000" cy="220979"/>
-          </a:xfrm>
-          <a:prstGeom prst="rect">
-            <a:avLst/>
-          </a:prstGeom>
-          <a:noFill/>
-        </p:spPr>
-        <p:txBody>
-          <a:bodyPr wrap="none" lIns="0" rIns="0" tIns="0" bIns="0" anchor="t">
-            <a:spAutoFit/>
-          </a:bodyPr>
-          <a:lstStyle/>
-          <a:p>
-            <a:pPr>
-              <a:defRPr sz="1000" b="0">
-                <a:solidFill>
-                  <a:srgbClr val="ECEDEF"/>
-                </a:solidFill>
-                <a:latin typeface="Arial"/>
-              </a:defRPr>
-            </a:pPr>
-            <a:r>
-              <a:t>01</a:t>
-            </a:r>
-          </a:p>
-        </p:txBody>
-      </p:sp>
-      <p:sp>
-        <p:nvSpPr>
-          <p:cNvPr id="9" name="TextBox 8"/>
-          <p:cNvSpPr txBox="1"/>
-          <p:nvPr/>
-        </p:nvSpPr>
-        <p:spPr>
-          <a:xfrm>
-            <a:off x="508000" y="1879600"/>
-            <a:ext cx="8128000" cy="393700"/>
-          </a:xfrm>
-          <a:prstGeom prst="rect">
-            <a:avLst/>
-          </a:prstGeom>
-          <a:noFill/>
-        </p:spPr>
-        <p:txBody>
-          <a:bodyPr wrap="none" lIns="0" rIns="0" tIns="0" bIns="0" anchor="t">
-            <a:spAutoFit/>
-          </a:bodyPr>
-          <a:lstStyle/>
-          <a:p>
-            <a:pPr>
-              <a:defRPr sz="1800" b="0">
-                <a:solidFill>
-                  <a:srgbClr val="FFFFFF"/>
-                </a:solidFill>
-                <a:latin typeface="Arial"/>
-              </a:defRPr>
-            </a:pPr>
-            <a:r>
-              <a:t>ΔStuff+ de la liga en el aire del Harp Helú: −13.0.</a:t>
-            </a:r>
-          </a:p>
-        </p:txBody>
-      </p:sp>
-      <p:sp>
-        <p:nvSpPr>
-          <p:cNvPr id="10" name="TextBox 9"/>
-          <p:cNvSpPr txBox="1"/>
-          <p:nvPr/>
-        </p:nvSpPr>
-        <p:spPr>
-          <a:xfrm>
-            <a:off x="508000" y="2209800"/>
-            <a:ext cx="8128000" cy="393700"/>
-          </a:xfrm>
-          <a:prstGeom prst="rect">
-            <a:avLst/>
-          </a:prstGeom>
-          <a:noFill/>
-        </p:spPr>
-        <p:txBody>
-          <a:bodyPr wrap="none" lIns="0" rIns="0" tIns="0" bIns="0" anchor="t">
-            <a:spAutoFit/>
-          </a:bodyPr>
-          <a:lstStyle/>
-          <a:p>
-            <a:pPr>
-              <a:defRPr sz="1800" b="0">
-                <a:solidFill>
-                  <a:srgbClr val="FFFFFF"/>
-                </a:solidFill>
-                <a:latin typeface="Arial"/>
-              </a:defRPr>
-            </a:pPr>
-            <a:r>
-              <a:t>El modelo mide el aire de cada juego y lo extrapola a un aire que no</a:t>
-            </a:r>
-          </a:p>
-        </p:txBody>
-      </p:sp>
-      <p:sp>
-        <p:nvSpPr>
           <p:cNvPr id="11" name="TextBox 10"/>
           <p:cNvSpPr txBox="1"/>
           <p:nvPr/>
         </p:nvSpPr>
         <p:spPr>
           <a:xfrm>
-            <a:off x="508000" y="2540000"/>
-            <a:ext cx="8128000" cy="393700"/>
-          </a:xfrm>
-          <a:prstGeom prst="rect">
-            <a:avLst/>
-          </a:prstGeom>
-          <a:noFill/>
-        </p:spPr>
-        <p:txBody>
-          <a:bodyPr wrap="none" lIns="0" rIns="0" tIns="0" bIns="0" anchor="t">
-            <a:spAutoFit/>
-          </a:bodyPr>
-          <a:lstStyle/>
-          <a:p>
-            <a:pPr>
-              <a:defRPr sz="1800" b="0">
-                <a:solidFill>
-                  <a:srgbClr val="FFFFFF"/>
-                </a:solidFill>
-                <a:latin typeface="Arial"/>
-              </a:defRPr>
-            </a:pPr>
-            <a:r>
-              <a:t>vio.</a:t>
+            <a:off x="508000" y="1600200"/>
+            <a:ext cx="3810000" cy="1386332"/>
+          </a:xfrm>
+          <a:prstGeom prst="rect">
+            <a:avLst/>
+          </a:prstGeom>
+          <a:noFill/>
+        </p:spPr>
+        <p:txBody>
+          <a:bodyPr wrap="none" lIns="0" rIns="0" tIns="0" bIns="0" anchor="t">
+            <a:spAutoFit/>
+          </a:bodyPr>
+          <a:lstStyle/>
+          <a:p>
+            <a:pPr>
+              <a:defRPr sz="8400" b="1">
+                <a:solidFill>
+                  <a:srgbClr val="D71920"/>
+                </a:solidFill>
+                <a:latin typeface="Arial"/>
+              </a:defRPr>
+            </a:pPr>
+            <a:r>
+              <a:t>−13.0</a:t>
             </a:r>
           </a:p>
         </p:txBody>
@@ -4551,24 +4537,228 @@
         </p:nvSpPr>
         <p:spPr>
           <a:xfrm>
-            <a:off x="508000" y="3314700"/>
-            <a:ext cx="8128000" cy="315468"/>
-          </a:xfrm>
-          <a:prstGeom prst="rect">
-            <a:avLst/>
-          </a:prstGeom>
-          <a:noFill/>
-        </p:spPr>
-        <p:txBody>
-          <a:bodyPr wrap="none" lIns="0" rIns="0" tIns="0" bIns="0" anchor="t">
-            <a:spAutoFit/>
-          </a:bodyPr>
-          <a:lstStyle/>
-          <a:p>
-            <a:pPr>
-              <a:defRPr sz="1600" b="0">
-                <a:solidFill>
-                  <a:srgbClr val="ECEDEF"/>
+            <a:off x="4381500" y="1752600"/>
+            <a:ext cx="4254500" cy="317500"/>
+          </a:xfrm>
+          <a:prstGeom prst="rect">
+            <a:avLst/>
+          </a:prstGeom>
+          <a:noFill/>
+        </p:spPr>
+        <p:txBody>
+          <a:bodyPr wrap="none" lIns="0" rIns="0" tIns="0" bIns="0" anchor="t">
+            <a:spAutoFit/>
+          </a:bodyPr>
+          <a:lstStyle/>
+          <a:p>
+            <a:pPr>
+              <a:defRPr sz="1450" b="1">
+                <a:solidFill>
+                  <a:srgbClr val="F4F4F5"/>
+                </a:solidFill>
+                <a:latin typeface="Arial"/>
+              </a:defRPr>
+            </a:pPr>
+            <a:r>
+              <a:t>ΔStuff+ de la liga en el aire del Harp</a:t>
+            </a:r>
+          </a:p>
+        </p:txBody>
+      </p:sp>
+      <p:sp>
+        <p:nvSpPr>
+          <p:cNvPr id="13" name="TextBox 12"/>
+          <p:cNvSpPr txBox="1"/>
+          <p:nvPr/>
+        </p:nvSpPr>
+        <p:spPr>
+          <a:xfrm>
+            <a:off x="4381500" y="2006600"/>
+            <a:ext cx="4254500" cy="317500"/>
+          </a:xfrm>
+          <a:prstGeom prst="rect">
+            <a:avLst/>
+          </a:prstGeom>
+          <a:noFill/>
+        </p:spPr>
+        <p:txBody>
+          <a:bodyPr wrap="none" lIns="0" rIns="0" tIns="0" bIns="0" anchor="t">
+            <a:spAutoFit/>
+          </a:bodyPr>
+          <a:lstStyle/>
+          <a:p>
+            <a:pPr>
+              <a:defRPr sz="1450" b="1">
+                <a:solidFill>
+                  <a:srgbClr val="F4F4F5"/>
+                </a:solidFill>
+                <a:latin typeface="Arial"/>
+              </a:defRPr>
+            </a:pPr>
+            <a:r>
+              <a:t>Helú.</a:t>
+            </a:r>
+          </a:p>
+        </p:txBody>
+      </p:sp>
+      <p:sp>
+        <p:nvSpPr>
+          <p:cNvPr id="14" name="TextBox 13"/>
+          <p:cNvSpPr txBox="1"/>
+          <p:nvPr/>
+        </p:nvSpPr>
+        <p:spPr>
+          <a:xfrm>
+            <a:off x="4381500" y="2387600"/>
+            <a:ext cx="4254500" cy="304800"/>
+          </a:xfrm>
+          <a:prstGeom prst="rect">
+            <a:avLst/>
+          </a:prstGeom>
+          <a:noFill/>
+        </p:spPr>
+        <p:txBody>
+          <a:bodyPr wrap="none" lIns="0" rIns="0" tIns="0" bIns="0" anchor="t">
+            <a:spAutoFit/>
+          </a:bodyPr>
+          <a:lstStyle/>
+          <a:p>
+            <a:pPr>
+              <a:defRPr sz="1400" b="0">
+                <a:solidFill>
+                  <a:srgbClr val="9EA1A7"/>
+                </a:solidFill>
+                <a:latin typeface="Arial"/>
+              </a:defRPr>
+            </a:pPr>
+            <a:r>
+              <a:t>El modelo mide el aire de cada juego y lo</a:t>
+            </a:r>
+          </a:p>
+        </p:txBody>
+      </p:sp>
+      <p:sp>
+        <p:nvSpPr>
+          <p:cNvPr id="15" name="TextBox 14"/>
+          <p:cNvSpPr txBox="1"/>
+          <p:nvPr/>
+        </p:nvSpPr>
+        <p:spPr>
+          <a:xfrm>
+            <a:off x="4381500" y="2628900"/>
+            <a:ext cx="4254500" cy="304800"/>
+          </a:xfrm>
+          <a:prstGeom prst="rect">
+            <a:avLst/>
+          </a:prstGeom>
+          <a:noFill/>
+        </p:spPr>
+        <p:txBody>
+          <a:bodyPr wrap="none" lIns="0" rIns="0" tIns="0" bIns="0" anchor="t">
+            <a:spAutoFit/>
+          </a:bodyPr>
+          <a:lstStyle/>
+          <a:p>
+            <a:pPr>
+              <a:defRPr sz="1400" b="0">
+                <a:solidFill>
+                  <a:srgbClr val="9EA1A7"/>
+                </a:solidFill>
+                <a:latin typeface="Arial"/>
+              </a:defRPr>
+            </a:pPr>
+            <a:r>
+              <a:t>extrapola a un aire que no vio.</a:t>
+            </a:r>
+          </a:p>
+        </p:txBody>
+      </p:sp>
+      <p:sp>
+        <p:nvSpPr>
+          <p:cNvPr id="16" name="Rounded Rectangle 15"/>
+          <p:cNvSpPr/>
+          <p:nvPr/>
+        </p:nvSpPr>
+        <p:spPr>
+          <a:xfrm>
+            <a:off x="508000" y="3327400"/>
+            <a:ext cx="8128000" cy="736600"/>
+          </a:xfrm>
+          <a:prstGeom prst="roundRect">
+            <a:avLst>
+              <a:gd name="adj" fmla="val 10344"/>
+            </a:avLst>
+          </a:prstGeom>
+          <a:solidFill>
+            <a:srgbClr val="1F2125"/>
+          </a:solidFill>
+          <a:ln>
+            <a:noFill/>
+          </a:ln>
+        </p:spPr>
+        <p:txBody>
+          <a:bodyPr rtlCol="0" anchor="ctr"/>
+          <a:lstStyle/>
+          <a:p>
+            <a:pPr algn="ctr"/>
+          </a:p>
+        </p:txBody>
+      </p:sp>
+      <p:sp>
+        <p:nvSpPr>
+          <p:cNvPr id="17" name="Rectangle 16"/>
+          <p:cNvSpPr/>
+          <p:nvPr/>
+        </p:nvSpPr>
+        <p:spPr>
+          <a:xfrm>
+            <a:off x="508000" y="3327400"/>
+            <a:ext cx="50800" cy="736600"/>
+          </a:xfrm>
+          <a:prstGeom prst="rect">
+            <a:avLst/>
+          </a:prstGeom>
+          <a:solidFill>
+            <a:srgbClr val="D71920"/>
+          </a:solidFill>
+          <a:ln>
+            <a:noFill/>
+          </a:ln>
+        </p:spPr>
+        <p:txBody>
+          <a:bodyPr rtlCol="0" anchor="ctr"/>
+          <a:lstStyle/>
+          <a:p>
+            <a:pPr algn="ctr"/>
+          </a:p>
+        </p:txBody>
+      </p:sp>
+      <p:sp>
+        <p:nvSpPr>
+          <p:cNvPr id="18" name="TextBox 17"/>
+          <p:cNvSpPr txBox="1"/>
+          <p:nvPr/>
+        </p:nvSpPr>
+        <p:spPr>
+          <a:xfrm>
+            <a:off x="736600" y="3454400"/>
+            <a:ext cx="7747000" cy="292100"/>
+          </a:xfrm>
+          <a:prstGeom prst="rect">
+            <a:avLst/>
+          </a:prstGeom>
+          <a:noFill/>
+        </p:spPr>
+        <p:txBody>
+          <a:bodyPr wrap="none" lIns="0" rIns="0" tIns="0" bIns="0" anchor="t">
+            <a:spAutoFit/>
+          </a:bodyPr>
+          <a:lstStyle/>
+          <a:p>
+            <a:pPr>
+              <a:defRPr sz="1300" b="0">
+                <a:solidFill>
+                  <a:srgbClr val="F4F4F5"/>
                 </a:solidFill>
                 <a:latin typeface="Arial"/>
               </a:defRPr>
@@ -4581,30 +4771,30 @@
       </p:sp>
       <p:sp>
         <p:nvSpPr>
-          <p:cNvPr id="13" name="TextBox 12"/>
-          <p:cNvSpPr txBox="1"/>
-          <p:nvPr/>
-        </p:nvSpPr>
-        <p:spPr>
-          <a:xfrm>
-            <a:off x="508000" y="3566667"/>
-            <a:ext cx="8128000" cy="315468"/>
-          </a:xfrm>
-          <a:prstGeom prst="rect">
-            <a:avLst/>
-          </a:prstGeom>
-          <a:noFill/>
-        </p:spPr>
-        <p:txBody>
-          <a:bodyPr wrap="none" lIns="0" rIns="0" tIns="0" bIns="0" anchor="t">
-            <a:spAutoFit/>
-          </a:bodyPr>
-          <a:lstStyle/>
-          <a:p>
-            <a:pPr>
-              <a:defRPr sz="1600" b="0">
-                <a:solidFill>
-                  <a:srgbClr val="ECEDEF"/>
+          <p:cNvPr id="19" name="TextBox 18"/>
+          <p:cNvSpPr txBox="1"/>
+          <p:nvPr/>
+        </p:nvSpPr>
+        <p:spPr>
+          <a:xfrm>
+            <a:off x="736600" y="3683000"/>
+            <a:ext cx="7747000" cy="292100"/>
+          </a:xfrm>
+          <a:prstGeom prst="rect">
+            <a:avLst/>
+          </a:prstGeom>
+          <a:noFill/>
+        </p:spPr>
+        <p:txBody>
+          <a:bodyPr wrap="none" lIns="0" rIns="0" tIns="0" bIns="0" anchor="t">
+            <a:spAutoFit/>
+          </a:bodyPr>
+          <a:lstStyle/>
+          <a:p>
+            <a:pPr>
+              <a:defRPr sz="1300" b="0">
+                <a:solidFill>
+                  <a:srgbClr val="F4F4F5"/>
                 </a:solidFill>
                 <a:latin typeface="Arial"/>
               </a:defRPr>
@@ -4648,7 +4838,7 @@
             <a:avLst/>
           </a:prstGeom>
           <a:solidFill>
-            <a:srgbClr val="202124"/>
+            <a:srgbClr val="121316"/>
           </a:solidFill>
           <a:ln>
             <a:noFill/>
@@ -4670,8 +4860,8 @@
         </p:nvSpPr>
         <p:spPr>
           <a:xfrm>
-            <a:off x="508000" y="292100"/>
-            <a:ext cx="533400" cy="50800"/>
+            <a:off x="0" y="0"/>
+            <a:ext cx="76200" cy="5143500"/>
           </a:xfrm>
           <a:prstGeom prst="rect">
             <a:avLst/>
@@ -4693,30 +4883,59 @@
       </p:sp>
       <p:sp>
         <p:nvSpPr>
-          <p:cNvPr id="4" name="TextBox 3"/>
-          <p:cNvSpPr txBox="1"/>
-          <p:nvPr/>
-        </p:nvSpPr>
-        <p:spPr>
-          <a:xfrm>
-            <a:off x="1206500" y="203200"/>
-            <a:ext cx="7239000" cy="220979"/>
-          </a:xfrm>
-          <a:prstGeom prst="rect">
-            <a:avLst/>
-          </a:prstGeom>
-          <a:noFill/>
-        </p:spPr>
-        <p:txBody>
-          <a:bodyPr wrap="none" lIns="0" rIns="0" tIns="0" bIns="0" anchor="t">
-            <a:spAutoFit/>
-          </a:bodyPr>
-          <a:lstStyle/>
-          <a:p>
-            <a:pPr>
-              <a:defRPr sz="1000" b="0">
-                <a:solidFill>
-                  <a:srgbClr val="ECEDEF"/>
+          <p:cNvPr id="4" name="Rectangle 3"/>
+          <p:cNvSpPr/>
+          <p:nvPr/>
+        </p:nvSpPr>
+        <p:spPr>
+          <a:xfrm>
+            <a:off x="508000" y="304800"/>
+            <a:ext cx="101600" cy="101600"/>
+          </a:xfrm>
+          <a:prstGeom prst="rect">
+            <a:avLst/>
+          </a:prstGeom>
+          <a:solidFill>
+            <a:srgbClr val="D71920"/>
+          </a:solidFill>
+          <a:ln>
+            <a:noFill/>
+          </a:ln>
+        </p:spPr>
+        <p:txBody>
+          <a:bodyPr rtlCol="0" anchor="ctr"/>
+          <a:lstStyle/>
+          <a:p>
+            <a:pPr algn="ctr"/>
+          </a:p>
+        </p:txBody>
+      </p:sp>
+      <p:sp>
+        <p:nvSpPr>
+          <p:cNvPr id="5" name="TextBox 4"/>
+          <p:cNvSpPr txBox="1"/>
+          <p:nvPr/>
+        </p:nvSpPr>
+        <p:spPr>
+          <a:xfrm>
+            <a:off x="711200" y="241300"/>
+            <a:ext cx="6096000" cy="205232"/>
+          </a:xfrm>
+          <a:prstGeom prst="rect">
+            <a:avLst/>
+          </a:prstGeom>
+          <a:noFill/>
+        </p:spPr>
+        <p:txBody>
+          <a:bodyPr wrap="none" lIns="0" rIns="0" tIns="0" bIns="0" anchor="t">
+            <a:spAutoFit/>
+          </a:bodyPr>
+          <a:lstStyle/>
+          <a:p>
+            <a:pPr>
+              <a:defRPr sz="900" b="1">
+                <a:solidFill>
+                  <a:srgbClr val="9EA1A7"/>
                 </a:solidFill>
                 <a:latin typeface="Arial"/>
               </a:defRPr>
@@ -4729,30 +4948,66 @@
       </p:sp>
       <p:sp>
         <p:nvSpPr>
-          <p:cNvPr id="5" name="TextBox 4"/>
-          <p:cNvSpPr txBox="1"/>
-          <p:nvPr/>
-        </p:nvSpPr>
-        <p:spPr>
-          <a:xfrm>
-            <a:off x="508000" y="647700"/>
-            <a:ext cx="8128000" cy="457200"/>
-          </a:xfrm>
-          <a:prstGeom prst="rect">
-            <a:avLst/>
-          </a:prstGeom>
-          <a:noFill/>
-        </p:spPr>
-        <p:txBody>
-          <a:bodyPr wrap="none" lIns="0" rIns="0" tIns="0" bIns="0" anchor="t">
-            <a:spAutoFit/>
-          </a:bodyPr>
-          <a:lstStyle/>
-          <a:p>
-            <a:pPr>
-              <a:defRPr sz="2600" b="1">
-                <a:solidFill>
-                  <a:srgbClr val="FFFFFF"/>
+          <p:cNvPr id="6" name="TextBox 5"/>
+          <p:cNvSpPr txBox="1"/>
+          <p:nvPr/>
+        </p:nvSpPr>
+        <p:spPr>
+          <a:xfrm>
+            <a:off x="8331200" y="241300"/>
+            <a:ext cx="381000" cy="236728"/>
+          </a:xfrm>
+          <a:prstGeom prst="rect">
+            <a:avLst/>
+          </a:prstGeom>
+          <a:noFill/>
+        </p:spPr>
+        <p:txBody>
+          <a:bodyPr wrap="none" lIns="0" rIns="0" tIns="0" bIns="0" anchor="t">
+            <a:spAutoFit/>
+          </a:bodyPr>
+          <a:lstStyle/>
+          <a:p>
+            <a:pPr>
+              <a:defRPr sz="1100" b="1">
+                <a:solidFill>
+                  <a:srgbClr val="D71920"/>
+                </a:solidFill>
+                <a:latin typeface="Arial"/>
+              </a:defRPr>
+            </a:pPr>
+            <a:r>
+              <a:t>10</a:t>
+            </a:r>
+          </a:p>
+        </p:txBody>
+      </p:sp>
+      <p:sp>
+        <p:nvSpPr>
+          <p:cNvPr id="7" name="TextBox 6"/>
+          <p:cNvSpPr txBox="1"/>
+          <p:nvPr/>
+        </p:nvSpPr>
+        <p:spPr>
+          <a:xfrm>
+            <a:off x="508000" y="584200"/>
+            <a:ext cx="8128000" cy="444500"/>
+          </a:xfrm>
+          <a:prstGeom prst="rect">
+            <a:avLst/>
+          </a:prstGeom>
+          <a:noFill/>
+        </p:spPr>
+        <p:txBody>
+          <a:bodyPr wrap="none" lIns="0" rIns="0" tIns="0" bIns="0" anchor="t">
+            <a:spAutoFit/>
+          </a:bodyPr>
+          <a:lstStyle/>
+          <a:p>
+            <a:pPr>
+              <a:defRPr sz="2500" b="1">
+                <a:solidFill>
+                  <a:srgbClr val="F4F4F5"/>
                 </a:solidFill>
                 <a:latin typeface="Arial"/>
               </a:defRPr>
@@ -4765,30 +5020,59 @@
       </p:sp>
       <p:sp>
         <p:nvSpPr>
-          <p:cNvPr id="6" name="TextBox 5"/>
-          <p:cNvSpPr txBox="1"/>
-          <p:nvPr/>
-        </p:nvSpPr>
-        <p:spPr>
-          <a:xfrm>
-            <a:off x="508000" y="4495800"/>
-            <a:ext cx="7620000" cy="196850"/>
-          </a:xfrm>
-          <a:prstGeom prst="rect">
-            <a:avLst/>
-          </a:prstGeom>
-          <a:noFill/>
-        </p:spPr>
-        <p:txBody>
-          <a:bodyPr wrap="none" lIns="0" rIns="0" tIns="0" bIns="0" anchor="t">
-            <a:spAutoFit/>
-          </a:bodyPr>
-          <a:lstStyle/>
-          <a:p>
-            <a:pPr>
-              <a:defRPr sz="800" b="0">
-                <a:solidFill>
-                  <a:srgbClr val="ECEDEF"/>
+          <p:cNvPr id="8" name="Rectangle 7"/>
+          <p:cNvSpPr/>
+          <p:nvPr/>
+        </p:nvSpPr>
+        <p:spPr>
+          <a:xfrm>
+            <a:off x="508000" y="4572000"/>
+            <a:ext cx="8128000" cy="10160"/>
+          </a:xfrm>
+          <a:prstGeom prst="rect">
+            <a:avLst/>
+          </a:prstGeom>
+          <a:solidFill>
+            <a:srgbClr val="1F2125"/>
+          </a:solidFill>
+          <a:ln>
+            <a:noFill/>
+          </a:ln>
+        </p:spPr>
+        <p:txBody>
+          <a:bodyPr rtlCol="0" anchor="ctr"/>
+          <a:lstStyle/>
+          <a:p>
+            <a:pPr algn="ctr"/>
+          </a:p>
+        </p:txBody>
+      </p:sp>
+      <p:sp>
+        <p:nvSpPr>
+          <p:cNvPr id="9" name="TextBox 8"/>
+          <p:cNvSpPr txBox="1"/>
+          <p:nvPr/>
+        </p:nvSpPr>
+        <p:spPr>
+          <a:xfrm>
+            <a:off x="508000" y="4660900"/>
+            <a:ext cx="7747000" cy="190500"/>
+          </a:xfrm>
+          <a:prstGeom prst="rect">
+            <a:avLst/>
+          </a:prstGeom>
+          <a:noFill/>
+        </p:spPr>
+        <p:txBody>
+          <a:bodyPr wrap="none" lIns="0" rIns="0" tIns="0" bIns="0" anchor="t">
+            <a:spAutoFit/>
+          </a:bodyPr>
+          <a:lstStyle/>
+          <a:p>
+            <a:pPr>
+              <a:defRPr sz="750" b="0">
+                <a:solidFill>
+                  <a:srgbClr val="9EA1A7"/>
                 </a:solidFill>
                 <a:latin typeface="Arial"/>
               </a:defRPr>
@@ -4801,43 +5085,38 @@
       </p:sp>
       <p:sp>
         <p:nvSpPr>
-          <p:cNvPr id="7" name="TextBox 6"/>
-          <p:cNvSpPr txBox="1"/>
-          <p:nvPr/>
-        </p:nvSpPr>
-        <p:spPr>
-          <a:xfrm>
-            <a:off x="8255000" y="4813300"/>
-            <a:ext cx="381000" cy="220979"/>
-          </a:xfrm>
-          <a:prstGeom prst="rect">
-            <a:avLst/>
-          </a:prstGeom>
-          <a:noFill/>
-        </p:spPr>
-        <p:txBody>
-          <a:bodyPr wrap="none" lIns="0" rIns="0" tIns="0" bIns="0" anchor="t">
-            <a:spAutoFit/>
-          </a:bodyPr>
-          <a:lstStyle/>
-          <a:p>
-            <a:pPr>
-              <a:defRPr sz="1000" b="0">
-                <a:solidFill>
-                  <a:srgbClr val="ECEDEF"/>
-                </a:solidFill>
-                <a:latin typeface="Arial"/>
-              </a:defRPr>
-            </a:pPr>
-            <a:r>
-              <a:t>10</a:t>
-            </a:r>
+          <p:cNvPr id="10" name="Rounded Rectangle 9"/>
+          <p:cNvSpPr/>
+          <p:nvPr/>
+        </p:nvSpPr>
+        <p:spPr>
+          <a:xfrm>
+            <a:off x="4800600" y="1193800"/>
+            <a:ext cx="3860800" cy="2247900"/>
+          </a:xfrm>
+          <a:prstGeom prst="roundRect">
+            <a:avLst>
+              <a:gd name="adj" fmla="val 2259"/>
+            </a:avLst>
+          </a:prstGeom>
+          <a:solidFill>
+            <a:srgbClr val="1F2125"/>
+          </a:solidFill>
+          <a:ln>
+            <a:noFill/>
+          </a:ln>
+        </p:spPr>
+        <p:txBody>
+          <a:bodyPr rtlCol="0" anchor="ctr"/>
+          <a:lstStyle/>
+          <a:p>
+            <a:pPr algn="ctr"/>
           </a:p>
         </p:txBody>
       </p:sp>
       <p:pic>
         <p:nvPicPr>
-          <p:cNvPr id="8" name="Picture 7" descr="simulador_receptor.jpg"/>
+          <p:cNvPr id="11" name="Picture 10" descr="simulador_receptor.jpg"/>
           <p:cNvPicPr>
             <a:picLocks noChangeAspect="1"/>
           </p:cNvPicPr>
@@ -4861,102 +5140,160 @@
       </p:pic>
       <p:sp>
         <p:nvSpPr>
-          <p:cNvPr id="9" name="TextBox 8"/>
-          <p:cNvSpPr txBox="1"/>
-          <p:nvPr/>
-        </p:nvSpPr>
-        <p:spPr>
-          <a:xfrm>
-            <a:off x="508000" y="1295400"/>
-            <a:ext cx="4064000" cy="406400"/>
-          </a:xfrm>
-          <a:prstGeom prst="rect">
-            <a:avLst/>
-          </a:prstGeom>
-          <a:noFill/>
-        </p:spPr>
-        <p:txBody>
-          <a:bodyPr wrap="none" lIns="0" rIns="0" tIns="0" bIns="0" anchor="t">
-            <a:spAutoFit/>
-          </a:bodyPr>
-          <a:lstStyle/>
-          <a:p>
-            <a:pPr>
-              <a:defRPr sz="1900" b="0">
-                <a:solidFill>
-                  <a:srgbClr val="FFFFFF"/>
-                </a:solidFill>
-                <a:latin typeface="Arial"/>
-              </a:defRPr>
-            </a:pPr>
-            <a:r>
-              <a:t>Simulador: la misma forma,</a:t>
-            </a:r>
-          </a:p>
-        </p:txBody>
-      </p:sp>
-      <p:sp>
-        <p:nvSpPr>
-          <p:cNvPr id="10" name="TextBox 9"/>
-          <p:cNvSpPr txBox="1"/>
-          <p:nvPr/>
-        </p:nvSpPr>
-        <p:spPr>
-          <a:xfrm>
-            <a:off x="508000" y="1638300"/>
-            <a:ext cx="4064000" cy="406400"/>
-          </a:xfrm>
-          <a:prstGeom prst="rect">
-            <a:avLst/>
-          </a:prstGeom>
-          <a:noFill/>
-        </p:spPr>
-        <p:txBody>
-          <a:bodyPr wrap="none" lIns="0" rIns="0" tIns="0" bIns="0" anchor="t">
-            <a:spAutoFit/>
-          </a:bodyPr>
-          <a:lstStyle/>
-          <a:p>
-            <a:pPr>
-              <a:defRPr sz="1900" b="0">
-                <a:solidFill>
-                  <a:srgbClr val="FFFFFF"/>
-                </a:solidFill>
-                <a:latin typeface="Arial"/>
-              </a:defRPr>
-            </a:pPr>
-            <a:r>
-              <a:t>dos aires.</a:t>
-            </a:r>
-          </a:p>
-        </p:txBody>
-      </p:sp>
-      <p:sp>
-        <p:nvSpPr>
-          <p:cNvPr id="11" name="TextBox 10"/>
-          <p:cNvSpPr txBox="1"/>
+          <p:cNvPr id="12" name="Rectangle 11"/>
+          <p:cNvSpPr/>
+          <p:nvPr/>
+        </p:nvSpPr>
+        <p:spPr>
+          <a:xfrm>
+            <a:off x="508000" y="1320800"/>
+            <a:ext cx="50800" cy="457200"/>
+          </a:xfrm>
+          <a:prstGeom prst="rect">
+            <a:avLst/>
+          </a:prstGeom>
+          <a:solidFill>
+            <a:srgbClr val="D71920"/>
+          </a:solidFill>
+          <a:ln>
+            <a:noFill/>
+          </a:ln>
+        </p:spPr>
+        <p:txBody>
+          <a:bodyPr rtlCol="0" anchor="ctr"/>
+          <a:lstStyle/>
+          <a:p>
+            <a:pPr algn="ctr"/>
+          </a:p>
+        </p:txBody>
+      </p:sp>
+      <p:sp>
+        <p:nvSpPr>
+          <p:cNvPr id="13" name="TextBox 12"/>
+          <p:cNvSpPr txBox="1"/>
+          <p:nvPr/>
+        </p:nvSpPr>
+        <p:spPr>
+          <a:xfrm>
+            <a:off x="711200" y="1371600"/>
+            <a:ext cx="4013200" cy="299720"/>
+          </a:xfrm>
+          <a:prstGeom prst="rect">
+            <a:avLst/>
+          </a:prstGeom>
+          <a:noFill/>
+        </p:spPr>
+        <p:txBody>
+          <a:bodyPr wrap="none" lIns="0" rIns="0" tIns="0" bIns="0" anchor="t">
+            <a:spAutoFit/>
+          </a:bodyPr>
+          <a:lstStyle/>
+          <a:p>
+            <a:pPr>
+              <a:defRPr sz="1500" b="1">
+                <a:solidFill>
+                  <a:srgbClr val="F4F4F5"/>
+                </a:solidFill>
+                <a:latin typeface="Arial"/>
+              </a:defRPr>
+            </a:pPr>
+            <a:r>
+              <a:t>Simulador: la misma forma, dos</a:t>
+            </a:r>
+          </a:p>
+        </p:txBody>
+      </p:sp>
+      <p:sp>
+        <p:nvSpPr>
+          <p:cNvPr id="14" name="TextBox 13"/>
+          <p:cNvSpPr txBox="1"/>
+          <p:nvPr/>
+        </p:nvSpPr>
+        <p:spPr>
+          <a:xfrm>
+            <a:off x="711200" y="1607820"/>
+            <a:ext cx="4013200" cy="299720"/>
+          </a:xfrm>
+          <a:prstGeom prst="rect">
+            <a:avLst/>
+          </a:prstGeom>
+          <a:noFill/>
+        </p:spPr>
+        <p:txBody>
+          <a:bodyPr wrap="none" lIns="0" rIns="0" tIns="0" bIns="0" anchor="t">
+            <a:spAutoFit/>
+          </a:bodyPr>
+          <a:lstStyle/>
+          <a:p>
+            <a:pPr>
+              <a:defRPr sz="1500" b="1">
+                <a:solidFill>
+                  <a:srgbClr val="F4F4F5"/>
+                </a:solidFill>
+                <a:latin typeface="Arial"/>
+              </a:defRPr>
+            </a:pPr>
+            <a:r>
+              <a:t>aires.</a:t>
+            </a:r>
+          </a:p>
+        </p:txBody>
+      </p:sp>
+      <p:sp>
+        <p:nvSpPr>
+          <p:cNvPr id="15" name="Rectangle 14"/>
+          <p:cNvSpPr/>
           <p:nvPr/>
         </p:nvSpPr>
         <p:spPr>
           <a:xfrm>
             <a:off x="508000" y="1981200"/>
-            <a:ext cx="4064000" cy="406400"/>
-          </a:xfrm>
-          <a:prstGeom prst="rect">
-            <a:avLst/>
-          </a:prstGeom>
-          <a:noFill/>
-        </p:spPr>
-        <p:txBody>
-          <a:bodyPr wrap="none" lIns="0" rIns="0" tIns="0" bIns="0" anchor="t">
-            <a:spAutoFit/>
-          </a:bodyPr>
-          <a:lstStyle/>
-          <a:p>
-            <a:pPr>
-              <a:defRPr sz="1900" b="0">
-                <a:solidFill>
-                  <a:srgbClr val="FFFFFF"/>
+            <a:ext cx="50800" cy="457200"/>
+          </a:xfrm>
+          <a:prstGeom prst="rect">
+            <a:avLst/>
+          </a:prstGeom>
+          <a:solidFill>
+            <a:srgbClr val="D71920"/>
+          </a:solidFill>
+          <a:ln>
+            <a:noFill/>
+          </a:ln>
+        </p:spPr>
+        <p:txBody>
+          <a:bodyPr rtlCol="0" anchor="ctr"/>
+          <a:lstStyle/>
+          <a:p>
+            <a:pPr algn="ctr"/>
+          </a:p>
+        </p:txBody>
+      </p:sp>
+      <p:sp>
+        <p:nvSpPr>
+          <p:cNvPr id="16" name="TextBox 15"/>
+          <p:cNvSpPr txBox="1"/>
+          <p:nvPr/>
+        </p:nvSpPr>
+        <p:spPr>
+          <a:xfrm>
+            <a:off x="711200" y="2032000"/>
+            <a:ext cx="4013200" cy="299720"/>
+          </a:xfrm>
+          <a:prstGeom prst="rect">
+            <a:avLst/>
+          </a:prstGeom>
+          <a:noFill/>
+        </p:spPr>
+        <p:txBody>
+          <a:bodyPr wrap="none" lIns="0" rIns="0" tIns="0" bIns="0" anchor="t">
+            <a:spAutoFit/>
+          </a:bodyPr>
+          <a:lstStyle/>
+          <a:p>
+            <a:pPr>
+              <a:defRPr sz="1500" b="1">
+                <a:solidFill>
+                  <a:srgbClr val="F4F4F5"/>
                 </a:solidFill>
                 <a:latin typeface="Arial"/>
               </a:defRPr>
@@ -4969,102 +5306,95 @@
       </p:sp>
       <p:sp>
         <p:nvSpPr>
-          <p:cNvPr id="12" name="TextBox 11"/>
-          <p:cNvSpPr txBox="1"/>
-          <p:nvPr/>
-        </p:nvSpPr>
-        <p:spPr>
-          <a:xfrm>
-            <a:off x="508000" y="2324100"/>
-            <a:ext cx="4064000" cy="406400"/>
-          </a:xfrm>
-          <a:prstGeom prst="rect">
-            <a:avLst/>
-          </a:prstGeom>
-          <a:noFill/>
-        </p:spPr>
-        <p:txBody>
-          <a:bodyPr wrap="none" lIns="0" rIns="0" tIns="0" bIns="0" anchor="t">
-            <a:spAutoFit/>
-          </a:bodyPr>
-          <a:lstStyle/>
-          <a:p>
-            <a:pPr>
-              <a:defRPr sz="1900" b="0">
-                <a:solidFill>
-                  <a:srgbClr val="FFFFFF"/>
-                </a:solidFill>
-                <a:latin typeface="Arial"/>
-              </a:defRPr>
-            </a:pPr>
-            <a:r>
-              <a:t>Altitud: los 20 parques</a:t>
-            </a:r>
-          </a:p>
-        </p:txBody>
-      </p:sp>
-      <p:sp>
-        <p:nvSpPr>
-          <p:cNvPr id="13" name="TextBox 12"/>
-          <p:cNvSpPr txBox="1"/>
-          <p:nvPr/>
-        </p:nvSpPr>
-        <p:spPr>
-          <a:xfrm>
-            <a:off x="508000" y="2667000"/>
-            <a:ext cx="4064000" cy="406400"/>
-          </a:xfrm>
-          <a:prstGeom prst="rect">
-            <a:avLst/>
-          </a:prstGeom>
-          <a:noFill/>
-        </p:spPr>
-        <p:txBody>
-          <a:bodyPr wrap="none" lIns="0" rIns="0" tIns="0" bIns="0" anchor="t">
-            <a:spAutoFit/>
-          </a:bodyPr>
-          <a:lstStyle/>
-          <a:p>
-            <a:pPr>
-              <a:defRPr sz="1900" b="0">
-                <a:solidFill>
-                  <a:srgbClr val="FFFFFF"/>
-                </a:solidFill>
-                <a:latin typeface="Arial"/>
-              </a:defRPr>
-            </a:pPr>
-            <a:r>
-              <a:t>por densidad.</a:t>
-            </a:r>
-          </a:p>
-        </p:txBody>
-      </p:sp>
-      <p:sp>
-        <p:nvSpPr>
-          <p:cNvPr id="14" name="TextBox 13"/>
-          <p:cNvSpPr txBox="1"/>
-          <p:nvPr/>
-        </p:nvSpPr>
-        <p:spPr>
-          <a:xfrm>
-            <a:off x="508000" y="3657600"/>
-            <a:ext cx="8128000" cy="299720"/>
-          </a:xfrm>
-          <a:prstGeom prst="rect">
-            <a:avLst/>
-          </a:prstGeom>
-          <a:noFill/>
-        </p:spPr>
-        <p:txBody>
-          <a:bodyPr wrap="none" lIns="0" rIns="0" tIns="0" bIns="0" anchor="t">
-            <a:spAutoFit/>
-          </a:bodyPr>
-          <a:lstStyle/>
-          <a:p>
-            <a:pPr>
-              <a:defRPr sz="1500" b="0">
-                <a:solidFill>
-                  <a:srgbClr val="ECEDEF"/>
+          <p:cNvPr id="17" name="Rectangle 16"/>
+          <p:cNvSpPr/>
+          <p:nvPr/>
+        </p:nvSpPr>
+        <p:spPr>
+          <a:xfrm>
+            <a:off x="508000" y="2641600"/>
+            <a:ext cx="50800" cy="457200"/>
+          </a:xfrm>
+          <a:prstGeom prst="rect">
+            <a:avLst/>
+          </a:prstGeom>
+          <a:solidFill>
+            <a:srgbClr val="D71920"/>
+          </a:solidFill>
+          <a:ln>
+            <a:noFill/>
+          </a:ln>
+        </p:spPr>
+        <p:txBody>
+          <a:bodyPr rtlCol="0" anchor="ctr"/>
+          <a:lstStyle/>
+          <a:p>
+            <a:pPr algn="ctr"/>
+          </a:p>
+        </p:txBody>
+      </p:sp>
+      <p:sp>
+        <p:nvSpPr>
+          <p:cNvPr id="18" name="TextBox 17"/>
+          <p:cNvSpPr txBox="1"/>
+          <p:nvPr/>
+        </p:nvSpPr>
+        <p:spPr>
+          <a:xfrm>
+            <a:off x="711200" y="2692400"/>
+            <a:ext cx="4013200" cy="299720"/>
+          </a:xfrm>
+          <a:prstGeom prst="rect">
+            <a:avLst/>
+          </a:prstGeom>
+          <a:noFill/>
+        </p:spPr>
+        <p:txBody>
+          <a:bodyPr wrap="none" lIns="0" rIns="0" tIns="0" bIns="0" anchor="t">
+            <a:spAutoFit/>
+          </a:bodyPr>
+          <a:lstStyle/>
+          <a:p>
+            <a:pPr>
+              <a:defRPr sz="1500" b="1">
+                <a:solidFill>
+                  <a:srgbClr val="F4F4F5"/>
+                </a:solidFill>
+                <a:latin typeface="Arial"/>
+              </a:defRPr>
+            </a:pPr>
+            <a:r>
+              <a:t>Altitud: los 20 parques por densidad.</a:t>
+            </a:r>
+          </a:p>
+        </p:txBody>
+      </p:sp>
+      <p:sp>
+        <p:nvSpPr>
+          <p:cNvPr id="19" name="TextBox 18"/>
+          <p:cNvSpPr txBox="1"/>
+          <p:nvPr/>
+        </p:nvSpPr>
+        <p:spPr>
+          <a:xfrm>
+            <a:off x="508000" y="3632200"/>
+            <a:ext cx="8128000" cy="279400"/>
+          </a:xfrm>
+          <a:prstGeom prst="rect">
+            <a:avLst/>
+          </a:prstGeom>
+          <a:noFill/>
+        </p:spPr>
+        <p:txBody>
+          <a:bodyPr wrap="none" lIns="0" rIns="0" tIns="0" bIns="0" anchor="t">
+            <a:spAutoFit/>
+          </a:bodyPr>
+          <a:lstStyle/>
+          <a:p>
+            <a:pPr>
+              <a:defRPr sz="1300" b="0">
+                <a:solidFill>
+                  <a:srgbClr val="9EA1A7"/>
                 </a:solidFill>
                 <a:latin typeface="Arial"/>
               </a:defRPr>
@@ -5077,30 +5407,30 @@
       </p:sp>
       <p:sp>
         <p:nvSpPr>
-          <p:cNvPr id="15" name="TextBox 14"/>
-          <p:cNvSpPr txBox="1"/>
-          <p:nvPr/>
-        </p:nvSpPr>
-        <p:spPr>
-          <a:xfrm>
-            <a:off x="508000" y="3893820"/>
-            <a:ext cx="8128000" cy="299720"/>
-          </a:xfrm>
-          <a:prstGeom prst="rect">
-            <a:avLst/>
-          </a:prstGeom>
-          <a:noFill/>
-        </p:spPr>
-        <p:txBody>
-          <a:bodyPr wrap="none" lIns="0" rIns="0" tIns="0" bIns="0" anchor="t">
-            <a:spAutoFit/>
-          </a:bodyPr>
-          <a:lstStyle/>
-          <a:p>
-            <a:pPr>
-              <a:defRPr sz="1500" b="0">
-                <a:solidFill>
-                  <a:srgbClr val="ECEDEF"/>
+          <p:cNvPr id="20" name="TextBox 19"/>
+          <p:cNvSpPr txBox="1"/>
+          <p:nvPr/>
+        </p:nvSpPr>
+        <p:spPr>
+          <a:xfrm>
+            <a:off x="508000" y="3848100"/>
+            <a:ext cx="8128000" cy="279400"/>
+          </a:xfrm>
+          <a:prstGeom prst="rect">
+            <a:avLst/>
+          </a:prstGeom>
+          <a:noFill/>
+        </p:spPr>
+        <p:txBody>
+          <a:bodyPr wrap="none" lIns="0" rIns="0" tIns="0" bIns="0" anchor="t">
+            <a:spAutoFit/>
+          </a:bodyPr>
+          <a:lstStyle/>
+          <a:p>
+            <a:pPr>
+              <a:defRPr sz="1300" b="0">
+                <a:solidFill>
+                  <a:srgbClr val="9EA1A7"/>
                 </a:solidFill>
                 <a:latin typeface="Arial"/>
               </a:defRPr>
@@ -5144,7 +5474,7 @@
             <a:avLst/>
           </a:prstGeom>
           <a:solidFill>
-            <a:srgbClr val="FFFFFF"/>
+            <a:srgbClr val="121316"/>
           </a:solidFill>
           <a:ln>
             <a:noFill/>
@@ -5166,8 +5496,8 @@
         </p:nvSpPr>
         <p:spPr>
           <a:xfrm>
-            <a:off x="508000" y="292100"/>
-            <a:ext cx="533400" cy="50800"/>
+            <a:off x="0" y="0"/>
+            <a:ext cx="76200" cy="5143500"/>
           </a:xfrm>
           <a:prstGeom prst="rect">
             <a:avLst/>
@@ -5189,194 +5519,14 @@
       </p:sp>
       <p:sp>
         <p:nvSpPr>
-          <p:cNvPr id="4" name="TextBox 3"/>
-          <p:cNvSpPr txBox="1"/>
-          <p:nvPr/>
-        </p:nvSpPr>
-        <p:spPr>
-          <a:xfrm>
-            <a:off x="1206500" y="203200"/>
-            <a:ext cx="7239000" cy="220979"/>
-          </a:xfrm>
-          <a:prstGeom prst="rect">
-            <a:avLst/>
-          </a:prstGeom>
-          <a:noFill/>
-        </p:spPr>
-        <p:txBody>
-          <a:bodyPr wrap="none" lIns="0" rIns="0" tIns="0" bIns="0" anchor="t">
-            <a:spAutoFit/>
-          </a:bodyPr>
-          <a:lstStyle/>
-          <a:p>
-            <a:pPr>
-              <a:defRPr sz="1000" b="0">
-                <a:solidFill>
-                  <a:srgbClr val="585B60"/>
-                </a:solidFill>
-                <a:latin typeface="Arial"/>
-              </a:defRPr>
-            </a:pPr>
-            <a:r>
-              <a:t>STUFF+ 2240 / DIABLOS ROJOS</a:t>
-            </a:r>
-          </a:p>
-        </p:txBody>
-      </p:sp>
-      <p:sp>
-        <p:nvSpPr>
-          <p:cNvPr id="5" name="TextBox 4"/>
-          <p:cNvSpPr txBox="1"/>
-          <p:nvPr/>
-        </p:nvSpPr>
-        <p:spPr>
-          <a:xfrm>
-            <a:off x="508000" y="647700"/>
-            <a:ext cx="8128000" cy="457200"/>
-          </a:xfrm>
-          <a:prstGeom prst="rect">
-            <a:avLst/>
-          </a:prstGeom>
-          <a:noFill/>
-        </p:spPr>
-        <p:txBody>
-          <a:bodyPr wrap="none" lIns="0" rIns="0" tIns="0" bIns="0" anchor="t">
-            <a:spAutoFit/>
-          </a:bodyPr>
-          <a:lstStyle/>
-          <a:p>
-            <a:pPr>
-              <a:defRPr sz="2600" b="1">
-                <a:solidFill>
-                  <a:srgbClr val="202124"/>
-                </a:solidFill>
-                <a:latin typeface="Arial"/>
-              </a:defRPr>
-            </a:pPr>
-            <a:r>
-              <a:t>El aire estimado cambia entre ambientes</a:t>
-            </a:r>
-          </a:p>
-        </p:txBody>
-      </p:sp>
-      <p:sp>
-        <p:nvSpPr>
-          <p:cNvPr id="6" name="TextBox 5"/>
-          <p:cNvSpPr txBox="1"/>
-          <p:nvPr/>
-        </p:nvSpPr>
-        <p:spPr>
-          <a:xfrm>
-            <a:off x="508000" y="4495800"/>
-            <a:ext cx="7620000" cy="196850"/>
-          </a:xfrm>
-          <a:prstGeom prst="rect">
-            <a:avLst/>
-          </a:prstGeom>
-          <a:noFill/>
-        </p:spPr>
-        <p:txBody>
-          <a:bodyPr wrap="none" lIns="0" rIns="0" tIns="0" bIns="0" anchor="t">
-            <a:spAutoFit/>
-          </a:bodyPr>
-          <a:lstStyle/>
-          <a:p>
-            <a:pPr>
-              <a:defRPr sz="800" b="0">
-                <a:solidFill>
-                  <a:srgbClr val="585B60"/>
-                </a:solidFill>
-                <a:latin typeface="Arial"/>
-              </a:defRPr>
-            </a:pPr>
-            <a:r>
-              <a:t>reports/physics/rho_by_bucket.csv · media por bucket; parques anónimos.</a:t>
-            </a:r>
-          </a:p>
-        </p:txBody>
-      </p:sp>
-      <p:sp>
-        <p:nvSpPr>
-          <p:cNvPr id="7" name="TextBox 6"/>
-          <p:cNvSpPr txBox="1"/>
-          <p:nvPr/>
-        </p:nvSpPr>
-        <p:spPr>
-          <a:xfrm>
-            <a:off x="8255000" y="4813300"/>
-            <a:ext cx="381000" cy="220979"/>
-          </a:xfrm>
-          <a:prstGeom prst="rect">
-            <a:avLst/>
-          </a:prstGeom>
-          <a:noFill/>
-        </p:spPr>
-        <p:txBody>
-          <a:bodyPr wrap="none" lIns="0" rIns="0" tIns="0" bIns="0" anchor="t">
-            <a:spAutoFit/>
-          </a:bodyPr>
-          <a:lstStyle/>
-          <a:p>
-            <a:pPr>
-              <a:defRPr sz="1000" b="0">
-                <a:solidFill>
-                  <a:srgbClr val="585B60"/>
-                </a:solidFill>
-                <a:latin typeface="Arial"/>
-              </a:defRPr>
-            </a:pPr>
-            <a:r>
-              <a:t>02</a:t>
-            </a:r>
-          </a:p>
-        </p:txBody>
-      </p:sp>
-      <p:sp>
-        <p:nvSpPr>
-          <p:cNvPr id="8" name="TextBox 7"/>
-          <p:cNvSpPr txBox="1"/>
-          <p:nvPr/>
-        </p:nvSpPr>
-        <p:spPr>
-          <a:xfrm>
-            <a:off x="508000" y="1879600"/>
-            <a:ext cx="2095500" cy="299720"/>
-          </a:xfrm>
-          <a:prstGeom prst="rect">
-            <a:avLst/>
-          </a:prstGeom>
-          <a:noFill/>
-        </p:spPr>
-        <p:txBody>
-          <a:bodyPr wrap="none" lIns="0" rIns="0" tIns="0" bIns="0" anchor="t">
-            <a:spAutoFit/>
-          </a:bodyPr>
-          <a:lstStyle/>
-          <a:p>
-            <a:pPr>
-              <a:defRPr sz="1500" b="0">
-                <a:solidFill>
-                  <a:srgbClr val="202124"/>
-                </a:solidFill>
-                <a:latin typeface="Arial"/>
-              </a:defRPr>
-            </a:pPr>
-            <a:r>
-              <a:t>Nivel del mar</a:t>
-            </a:r>
-          </a:p>
-        </p:txBody>
-      </p:sp>
-      <p:sp>
-        <p:nvSpPr>
-          <p:cNvPr id="9" name="Rectangle 8"/>
+          <p:cNvPr id="4" name="Rectangle 3"/>
           <p:cNvSpPr/>
           <p:nvPr/>
         </p:nvSpPr>
         <p:spPr>
           <a:xfrm>
-            <a:off x="2730500" y="1930400"/>
-            <a:ext cx="3871594" cy="228600"/>
+            <a:off x="508000" y="304800"/>
+            <a:ext cx="101600" cy="101600"/>
           </a:xfrm>
           <a:prstGeom prst="rect">
             <a:avLst/>
@@ -5398,30 +5548,301 @@
       </p:sp>
       <p:sp>
         <p:nvSpPr>
+          <p:cNvPr id="5" name="TextBox 4"/>
+          <p:cNvSpPr txBox="1"/>
+          <p:nvPr/>
+        </p:nvSpPr>
+        <p:spPr>
+          <a:xfrm>
+            <a:off x="711200" y="241300"/>
+            <a:ext cx="6096000" cy="205232"/>
+          </a:xfrm>
+          <a:prstGeom prst="rect">
+            <a:avLst/>
+          </a:prstGeom>
+          <a:noFill/>
+        </p:spPr>
+        <p:txBody>
+          <a:bodyPr wrap="none" lIns="0" rIns="0" tIns="0" bIns="0" anchor="t">
+            <a:spAutoFit/>
+          </a:bodyPr>
+          <a:lstStyle/>
+          <a:p>
+            <a:pPr>
+              <a:defRPr sz="900" b="1">
+                <a:solidFill>
+                  <a:srgbClr val="9EA1A7"/>
+                </a:solidFill>
+                <a:latin typeface="Arial"/>
+              </a:defRPr>
+            </a:pPr>
+            <a:r>
+              <a:t>STUFF+ 2240 / DIABLOS ROJOS</a:t>
+            </a:r>
+          </a:p>
+        </p:txBody>
+      </p:sp>
+      <p:sp>
+        <p:nvSpPr>
+          <p:cNvPr id="6" name="TextBox 5"/>
+          <p:cNvSpPr txBox="1"/>
+          <p:nvPr/>
+        </p:nvSpPr>
+        <p:spPr>
+          <a:xfrm>
+            <a:off x="8331200" y="241300"/>
+            <a:ext cx="381000" cy="236728"/>
+          </a:xfrm>
+          <a:prstGeom prst="rect">
+            <a:avLst/>
+          </a:prstGeom>
+          <a:noFill/>
+        </p:spPr>
+        <p:txBody>
+          <a:bodyPr wrap="none" lIns="0" rIns="0" tIns="0" bIns="0" anchor="t">
+            <a:spAutoFit/>
+          </a:bodyPr>
+          <a:lstStyle/>
+          <a:p>
+            <a:pPr>
+              <a:defRPr sz="1100" b="1">
+                <a:solidFill>
+                  <a:srgbClr val="D71920"/>
+                </a:solidFill>
+                <a:latin typeface="Arial"/>
+              </a:defRPr>
+            </a:pPr>
+            <a:r>
+              <a:t>02</a:t>
+            </a:r>
+          </a:p>
+        </p:txBody>
+      </p:sp>
+      <p:sp>
+        <p:nvSpPr>
+          <p:cNvPr id="7" name="TextBox 6"/>
+          <p:cNvSpPr txBox="1"/>
+          <p:nvPr/>
+        </p:nvSpPr>
+        <p:spPr>
+          <a:xfrm>
+            <a:off x="508000" y="584200"/>
+            <a:ext cx="8128000" cy="444500"/>
+          </a:xfrm>
+          <a:prstGeom prst="rect">
+            <a:avLst/>
+          </a:prstGeom>
+          <a:noFill/>
+        </p:spPr>
+        <p:txBody>
+          <a:bodyPr wrap="none" lIns="0" rIns="0" tIns="0" bIns="0" anchor="t">
+            <a:spAutoFit/>
+          </a:bodyPr>
+          <a:lstStyle/>
+          <a:p>
+            <a:pPr>
+              <a:defRPr sz="2500" b="1">
+                <a:solidFill>
+                  <a:srgbClr val="F4F4F5"/>
+                </a:solidFill>
+                <a:latin typeface="Arial"/>
+              </a:defRPr>
+            </a:pPr>
+            <a:r>
+              <a:t>El aire estimado cambia entre ambientes</a:t>
+            </a:r>
+          </a:p>
+        </p:txBody>
+      </p:sp>
+      <p:sp>
+        <p:nvSpPr>
+          <p:cNvPr id="8" name="Rectangle 7"/>
+          <p:cNvSpPr/>
+          <p:nvPr/>
+        </p:nvSpPr>
+        <p:spPr>
+          <a:xfrm>
+            <a:off x="508000" y="4572000"/>
+            <a:ext cx="8128000" cy="10160"/>
+          </a:xfrm>
+          <a:prstGeom prst="rect">
+            <a:avLst/>
+          </a:prstGeom>
+          <a:solidFill>
+            <a:srgbClr val="1F2125"/>
+          </a:solidFill>
+          <a:ln>
+            <a:noFill/>
+          </a:ln>
+        </p:spPr>
+        <p:txBody>
+          <a:bodyPr rtlCol="0" anchor="ctr"/>
+          <a:lstStyle/>
+          <a:p>
+            <a:pPr algn="ctr"/>
+          </a:p>
+        </p:txBody>
+      </p:sp>
+      <p:sp>
+        <p:nvSpPr>
+          <p:cNvPr id="9" name="TextBox 8"/>
+          <p:cNvSpPr txBox="1"/>
+          <p:nvPr/>
+        </p:nvSpPr>
+        <p:spPr>
+          <a:xfrm>
+            <a:off x="508000" y="4660900"/>
+            <a:ext cx="7747000" cy="190500"/>
+          </a:xfrm>
+          <a:prstGeom prst="rect">
+            <a:avLst/>
+          </a:prstGeom>
+          <a:noFill/>
+        </p:spPr>
+        <p:txBody>
+          <a:bodyPr wrap="none" lIns="0" rIns="0" tIns="0" bIns="0" anchor="t">
+            <a:spAutoFit/>
+          </a:bodyPr>
+          <a:lstStyle/>
+          <a:p>
+            <a:pPr>
+              <a:defRPr sz="750" b="0">
+                <a:solidFill>
+                  <a:srgbClr val="9EA1A7"/>
+                </a:solidFill>
+                <a:latin typeface="Arial"/>
+              </a:defRPr>
+            </a:pPr>
+            <a:r>
+              <a:t>reports/physics/rho_by_bucket.csv · media por bucket; parques anónimos.</a:t>
+            </a:r>
+          </a:p>
+        </p:txBody>
+      </p:sp>
+      <p:sp>
+        <p:nvSpPr>
           <p:cNvPr id="10" name="TextBox 9"/>
           <p:cNvSpPr txBox="1"/>
           <p:nvPr/>
         </p:nvSpPr>
         <p:spPr>
           <a:xfrm>
-            <a:off x="7137400" y="1866900"/>
-            <a:ext cx="1498600" cy="331216"/>
-          </a:xfrm>
-          <a:prstGeom prst="rect">
-            <a:avLst/>
-          </a:prstGeom>
-          <a:noFill/>
-        </p:spPr>
-        <p:txBody>
-          <a:bodyPr wrap="none" lIns="0" rIns="0" tIns="0" bIns="0" anchor="t">
-            <a:spAutoFit/>
-          </a:bodyPr>
-          <a:lstStyle/>
-          <a:p>
-            <a:pPr>
-              <a:defRPr sz="1700" b="1">
-                <a:solidFill>
-                  <a:srgbClr val="202124"/>
+            <a:off x="508000" y="1752600"/>
+            <a:ext cx="2095500" cy="283972"/>
+          </a:xfrm>
+          <a:prstGeom prst="rect">
+            <a:avLst/>
+          </a:prstGeom>
+          <a:noFill/>
+        </p:spPr>
+        <p:txBody>
+          <a:bodyPr wrap="none" lIns="0" rIns="0" tIns="0" bIns="0" anchor="t">
+            <a:spAutoFit/>
+          </a:bodyPr>
+          <a:lstStyle/>
+          <a:p>
+            <a:pPr>
+              <a:defRPr sz="1400" b="0">
+                <a:solidFill>
+                  <a:srgbClr val="F4F4F5"/>
+                </a:solidFill>
+                <a:latin typeface="Arial"/>
+              </a:defRPr>
+            </a:pPr>
+            <a:r>
+              <a:t>Nivel del mar</a:t>
+            </a:r>
+          </a:p>
+        </p:txBody>
+      </p:sp>
+      <p:sp>
+        <p:nvSpPr>
+          <p:cNvPr id="11" name="Rounded Rectangle 10"/>
+          <p:cNvSpPr/>
+          <p:nvPr/>
+        </p:nvSpPr>
+        <p:spPr>
+          <a:xfrm>
+            <a:off x="2730500" y="1778000"/>
+            <a:ext cx="4254500" cy="228600"/>
+          </a:xfrm>
+          <a:prstGeom prst="roundRect">
+            <a:avLst>
+              <a:gd name="adj" fmla="val 16666"/>
+            </a:avLst>
+          </a:prstGeom>
+          <a:solidFill>
+            <a:srgbClr val="1F2125"/>
+          </a:solidFill>
+          <a:ln>
+            <a:noFill/>
+          </a:ln>
+        </p:spPr>
+        <p:txBody>
+          <a:bodyPr rtlCol="0" anchor="ctr"/>
+          <a:lstStyle/>
+          <a:p>
+            <a:pPr algn="ctr"/>
+          </a:p>
+        </p:txBody>
+      </p:sp>
+      <p:sp>
+        <p:nvSpPr>
+          <p:cNvPr id="12" name="Rounded Rectangle 11"/>
+          <p:cNvSpPr/>
+          <p:nvPr/>
+        </p:nvSpPr>
+        <p:spPr>
+          <a:xfrm>
+            <a:off x="2730500" y="1778000"/>
+            <a:ext cx="3871594" cy="228600"/>
+          </a:xfrm>
+          <a:prstGeom prst="roundRect">
+            <a:avLst>
+              <a:gd name="adj" fmla="val 16666"/>
+            </a:avLst>
+          </a:prstGeom>
+          <a:solidFill>
+            <a:srgbClr val="9EA1A7"/>
+          </a:solidFill>
+          <a:ln>
+            <a:noFill/>
+          </a:ln>
+        </p:spPr>
+        <p:txBody>
+          <a:bodyPr rtlCol="0" anchor="ctr"/>
+          <a:lstStyle/>
+          <a:p>
+            <a:pPr algn="ctr"/>
+          </a:p>
+        </p:txBody>
+      </p:sp>
+      <p:sp>
+        <p:nvSpPr>
+          <p:cNvPr id="13" name="TextBox 12"/>
+          <p:cNvSpPr txBox="1"/>
+          <p:nvPr/>
+        </p:nvSpPr>
+        <p:spPr>
+          <a:xfrm>
+            <a:off x="7162800" y="1752600"/>
+            <a:ext cx="1473200" cy="315468"/>
+          </a:xfrm>
+          <a:prstGeom prst="rect">
+            <a:avLst/>
+          </a:prstGeom>
+          <a:noFill/>
+        </p:spPr>
+        <p:txBody>
+          <a:bodyPr wrap="none" lIns="0" rIns="0" tIns="0" bIns="0" anchor="t">
+            <a:spAutoFit/>
+          </a:bodyPr>
+          <a:lstStyle/>
+          <a:p>
+            <a:pPr>
+              <a:defRPr sz="1600" b="1">
+                <a:solidFill>
+                  <a:srgbClr val="F4F4F5"/>
                 </a:solidFill>
                 <a:latin typeface="Arial"/>
               </a:defRPr>
@@ -5434,30 +5855,30 @@
       </p:sp>
       <p:sp>
         <p:nvSpPr>
-          <p:cNvPr id="11" name="TextBox 10"/>
-          <p:cNvSpPr txBox="1"/>
-          <p:nvPr/>
-        </p:nvSpPr>
-        <p:spPr>
-          <a:xfrm>
-            <a:off x="508000" y="2616200"/>
-            <a:ext cx="2095500" cy="299720"/>
-          </a:xfrm>
-          <a:prstGeom prst="rect">
-            <a:avLst/>
-          </a:prstGeom>
-          <a:noFill/>
-        </p:spPr>
-        <p:txBody>
-          <a:bodyPr wrap="none" lIns="0" rIns="0" tIns="0" bIns="0" anchor="t">
-            <a:spAutoFit/>
-          </a:bodyPr>
-          <a:lstStyle/>
-          <a:p>
-            <a:pPr>
-              <a:defRPr sz="1500" b="0">
-                <a:solidFill>
-                  <a:srgbClr val="202124"/>
+          <p:cNvPr id="14" name="TextBox 13"/>
+          <p:cNvSpPr txBox="1"/>
+          <p:nvPr/>
+        </p:nvSpPr>
+        <p:spPr>
+          <a:xfrm>
+            <a:off x="508000" y="2463800"/>
+            <a:ext cx="2095500" cy="283972"/>
+          </a:xfrm>
+          <a:prstGeom prst="rect">
+            <a:avLst/>
+          </a:prstGeom>
+          <a:noFill/>
+        </p:spPr>
+        <p:txBody>
+          <a:bodyPr wrap="none" lIns="0" rIns="0" tIns="0" bIns="0" anchor="t">
+            <a:spAutoFit/>
+          </a:bodyPr>
+          <a:lstStyle/>
+          <a:p>
+            <a:pPr>
+              <a:defRPr sz="1400" b="0">
+                <a:solidFill>
+                  <a:srgbClr val="F4F4F5"/>
                 </a:solidFill>
                 <a:latin typeface="Arial"/>
               </a:defRPr>
@@ -5470,17 +5891,184 @@
       </p:sp>
       <p:sp>
         <p:nvSpPr>
-          <p:cNvPr id="12" name="Rectangle 11"/>
+          <p:cNvPr id="15" name="Rounded Rectangle 14"/>
           <p:cNvSpPr/>
           <p:nvPr/>
         </p:nvSpPr>
         <p:spPr>
           <a:xfrm>
-            <a:off x="2730500" y="2667000"/>
+            <a:off x="2730500" y="2489200"/>
+            <a:ext cx="4254500" cy="228600"/>
+          </a:xfrm>
+          <a:prstGeom prst="roundRect">
+            <a:avLst>
+              <a:gd name="adj" fmla="val 16666"/>
+            </a:avLst>
+          </a:prstGeom>
+          <a:solidFill>
+            <a:srgbClr val="1F2125"/>
+          </a:solidFill>
+          <a:ln>
+            <a:noFill/>
+          </a:ln>
+        </p:spPr>
+        <p:txBody>
+          <a:bodyPr rtlCol="0" anchor="ctr"/>
+          <a:lstStyle/>
+          <a:p>
+            <a:pPr algn="ctr"/>
+          </a:p>
+        </p:txBody>
+      </p:sp>
+      <p:sp>
+        <p:nvSpPr>
+          <p:cNvPr id="16" name="Rounded Rectangle 15"/>
+          <p:cNvSpPr/>
+          <p:nvPr/>
+        </p:nvSpPr>
+        <p:spPr>
+          <a:xfrm>
+            <a:off x="2730500" y="2489200"/>
             <a:ext cx="3450012" cy="228600"/>
           </a:xfrm>
-          <a:prstGeom prst="rect">
-            <a:avLst/>
+          <a:prstGeom prst="roundRect">
+            <a:avLst>
+              <a:gd name="adj" fmla="val 16666"/>
+            </a:avLst>
+          </a:prstGeom>
+          <a:solidFill>
+            <a:srgbClr val="9EA1A7"/>
+          </a:solidFill>
+          <a:ln>
+            <a:noFill/>
+          </a:ln>
+        </p:spPr>
+        <p:txBody>
+          <a:bodyPr rtlCol="0" anchor="ctr"/>
+          <a:lstStyle/>
+          <a:p>
+            <a:pPr algn="ctr"/>
+          </a:p>
+        </p:txBody>
+      </p:sp>
+      <p:sp>
+        <p:nvSpPr>
+          <p:cNvPr id="17" name="TextBox 16"/>
+          <p:cNvSpPr txBox="1"/>
+          <p:nvPr/>
+        </p:nvSpPr>
+        <p:spPr>
+          <a:xfrm>
+            <a:off x="7162800" y="2463800"/>
+            <a:ext cx="1473200" cy="315468"/>
+          </a:xfrm>
+          <a:prstGeom prst="rect">
+            <a:avLst/>
+          </a:prstGeom>
+          <a:noFill/>
+        </p:spPr>
+        <p:txBody>
+          <a:bodyPr wrap="none" lIns="0" rIns="0" tIns="0" bIns="0" anchor="t">
+            <a:spAutoFit/>
+          </a:bodyPr>
+          <a:lstStyle/>
+          <a:p>
+            <a:pPr>
+              <a:defRPr sz="1600" b="1">
+                <a:solidFill>
+                  <a:srgbClr val="F4F4F5"/>
+                </a:solidFill>
+                <a:latin typeface="Arial"/>
+              </a:defRPr>
+            </a:pPr>
+            <a:r>
+              <a:t>0.892</a:t>
+            </a:r>
+          </a:p>
+        </p:txBody>
+      </p:sp>
+      <p:sp>
+        <p:nvSpPr>
+          <p:cNvPr id="18" name="TextBox 17"/>
+          <p:cNvSpPr txBox="1"/>
+          <p:nvPr/>
+        </p:nvSpPr>
+        <p:spPr>
+          <a:xfrm>
+            <a:off x="508000" y="3175000"/>
+            <a:ext cx="2095500" cy="283972"/>
+          </a:xfrm>
+          <a:prstGeom prst="rect">
+            <a:avLst/>
+          </a:prstGeom>
+          <a:noFill/>
+        </p:spPr>
+        <p:txBody>
+          <a:bodyPr wrap="none" lIns="0" rIns="0" tIns="0" bIns="0" anchor="t">
+            <a:spAutoFit/>
+          </a:bodyPr>
+          <a:lstStyle/>
+          <a:p>
+            <a:pPr>
+              <a:defRPr sz="1400" b="0">
+                <a:solidFill>
+                  <a:srgbClr val="F4F4F5"/>
+                </a:solidFill>
+                <a:latin typeface="Arial"/>
+              </a:defRPr>
+            </a:pPr>
+            <a:r>
+              <a:t>Altitud extrema</a:t>
+            </a:r>
+          </a:p>
+        </p:txBody>
+      </p:sp>
+      <p:sp>
+        <p:nvSpPr>
+          <p:cNvPr id="19" name="Rounded Rectangle 18"/>
+          <p:cNvSpPr/>
+          <p:nvPr/>
+        </p:nvSpPr>
+        <p:spPr>
+          <a:xfrm>
+            <a:off x="2730500" y="3200400"/>
+            <a:ext cx="4254500" cy="228600"/>
+          </a:xfrm>
+          <a:prstGeom prst="roundRect">
+            <a:avLst>
+              <a:gd name="adj" fmla="val 16666"/>
+            </a:avLst>
+          </a:prstGeom>
+          <a:solidFill>
+            <a:srgbClr val="1F2125"/>
+          </a:solidFill>
+          <a:ln>
+            <a:noFill/>
+          </a:ln>
+        </p:spPr>
+        <p:txBody>
+          <a:bodyPr rtlCol="0" anchor="ctr"/>
+          <a:lstStyle/>
+          <a:p>
+            <a:pPr algn="ctr"/>
+          </a:p>
+        </p:txBody>
+      </p:sp>
+      <p:sp>
+        <p:nvSpPr>
+          <p:cNvPr id="20" name="Rounded Rectangle 19"/>
+          <p:cNvSpPr/>
+          <p:nvPr/>
+        </p:nvSpPr>
+        <p:spPr>
+          <a:xfrm>
+            <a:off x="2730500" y="3200400"/>
+            <a:ext cx="3252758" cy="228600"/>
+          </a:xfrm>
+          <a:prstGeom prst="roundRect">
+            <a:avLst>
+              <a:gd name="adj" fmla="val 16666"/>
+            </a:avLst>
           </a:prstGeom>
           <a:solidFill>
             <a:srgbClr val="D71920"/>
@@ -5499,131 +6087,30 @@
       </p:sp>
       <p:sp>
         <p:nvSpPr>
-          <p:cNvPr id="13" name="TextBox 12"/>
-          <p:cNvSpPr txBox="1"/>
-          <p:nvPr/>
-        </p:nvSpPr>
-        <p:spPr>
-          <a:xfrm>
-            <a:off x="7137400" y="2603500"/>
-            <a:ext cx="1498600" cy="331216"/>
-          </a:xfrm>
-          <a:prstGeom prst="rect">
-            <a:avLst/>
-          </a:prstGeom>
-          <a:noFill/>
-        </p:spPr>
-        <p:txBody>
-          <a:bodyPr wrap="none" lIns="0" rIns="0" tIns="0" bIns="0" anchor="t">
-            <a:spAutoFit/>
-          </a:bodyPr>
-          <a:lstStyle/>
-          <a:p>
-            <a:pPr>
-              <a:defRPr sz="1700" b="1">
-                <a:solidFill>
-                  <a:srgbClr val="202124"/>
-                </a:solidFill>
-                <a:latin typeface="Arial"/>
-              </a:defRPr>
-            </a:pPr>
-            <a:r>
-              <a:t>0.892</a:t>
-            </a:r>
-          </a:p>
-        </p:txBody>
-      </p:sp>
-      <p:sp>
-        <p:nvSpPr>
-          <p:cNvPr id="14" name="TextBox 13"/>
-          <p:cNvSpPr txBox="1"/>
-          <p:nvPr/>
-        </p:nvSpPr>
-        <p:spPr>
-          <a:xfrm>
-            <a:off x="508000" y="3352800"/>
-            <a:ext cx="2095500" cy="299720"/>
-          </a:xfrm>
-          <a:prstGeom prst="rect">
-            <a:avLst/>
-          </a:prstGeom>
-          <a:noFill/>
-        </p:spPr>
-        <p:txBody>
-          <a:bodyPr wrap="none" lIns="0" rIns="0" tIns="0" bIns="0" anchor="t">
-            <a:spAutoFit/>
-          </a:bodyPr>
-          <a:lstStyle/>
-          <a:p>
-            <a:pPr>
-              <a:defRPr sz="1500" b="0">
-                <a:solidFill>
-                  <a:srgbClr val="202124"/>
-                </a:solidFill>
-                <a:latin typeface="Arial"/>
-              </a:defRPr>
-            </a:pPr>
-            <a:r>
-              <a:t>Altitud extrema</a:t>
-            </a:r>
-          </a:p>
-        </p:txBody>
-      </p:sp>
-      <p:sp>
-        <p:nvSpPr>
-          <p:cNvPr id="15" name="Rectangle 14"/>
-          <p:cNvSpPr/>
-          <p:nvPr/>
-        </p:nvSpPr>
-        <p:spPr>
-          <a:xfrm>
-            <a:off x="2730500" y="3403600"/>
-            <a:ext cx="3252758" cy="228600"/>
-          </a:xfrm>
-          <a:prstGeom prst="rect">
-            <a:avLst/>
-          </a:prstGeom>
-          <a:solidFill>
-            <a:srgbClr val="D71920"/>
-          </a:solidFill>
-          <a:ln>
-            <a:noFill/>
-          </a:ln>
-        </p:spPr>
-        <p:txBody>
-          <a:bodyPr rtlCol="0" anchor="ctr"/>
-          <a:lstStyle/>
-          <a:p>
-            <a:pPr algn="ctr"/>
-          </a:p>
-        </p:txBody>
-      </p:sp>
-      <p:sp>
-        <p:nvSpPr>
-          <p:cNvPr id="16" name="TextBox 15"/>
-          <p:cNvSpPr txBox="1"/>
-          <p:nvPr/>
-        </p:nvSpPr>
-        <p:spPr>
-          <a:xfrm>
-            <a:off x="7137400" y="3340100"/>
-            <a:ext cx="1498600" cy="331216"/>
-          </a:xfrm>
-          <a:prstGeom prst="rect">
-            <a:avLst/>
-          </a:prstGeom>
-          <a:noFill/>
-        </p:spPr>
-        <p:txBody>
-          <a:bodyPr wrap="none" lIns="0" rIns="0" tIns="0" bIns="0" anchor="t">
-            <a:spAutoFit/>
-          </a:bodyPr>
-          <a:lstStyle/>
-          <a:p>
-            <a:pPr>
-              <a:defRPr sz="1700" b="1">
-                <a:solidFill>
-                  <a:srgbClr val="202124"/>
+          <p:cNvPr id="21" name="TextBox 20"/>
+          <p:cNvSpPr txBox="1"/>
+          <p:nvPr/>
+        </p:nvSpPr>
+        <p:spPr>
+          <a:xfrm>
+            <a:off x="7162800" y="3175000"/>
+            <a:ext cx="1473200" cy="315468"/>
+          </a:xfrm>
+          <a:prstGeom prst="rect">
+            <a:avLst/>
+          </a:prstGeom>
+          <a:noFill/>
+        </p:spPr>
+        <p:txBody>
+          <a:bodyPr wrap="none" lIns="0" rIns="0" tIns="0" bIns="0" anchor="t">
+            <a:spAutoFit/>
+          </a:bodyPr>
+          <a:lstStyle/>
+          <a:p>
+            <a:pPr>
+              <a:defRPr sz="1600" b="1">
+                <a:solidFill>
+                  <a:srgbClr val="F4F4F5"/>
                 </a:solidFill>
                 <a:latin typeface="Arial"/>
               </a:defRPr>
@@ -5636,30 +6123,30 @@
       </p:sp>
       <p:sp>
         <p:nvSpPr>
-          <p:cNvPr id="17" name="TextBox 16"/>
-          <p:cNvSpPr txBox="1"/>
-          <p:nvPr/>
-        </p:nvSpPr>
-        <p:spPr>
-          <a:xfrm>
-            <a:off x="508000" y="4025900"/>
-            <a:ext cx="8128000" cy="283972"/>
-          </a:xfrm>
-          <a:prstGeom prst="rect">
-            <a:avLst/>
-          </a:prstGeom>
-          <a:noFill/>
-        </p:spPr>
-        <p:txBody>
-          <a:bodyPr wrap="none" lIns="0" rIns="0" tIns="0" bIns="0" anchor="t">
-            <a:spAutoFit/>
-          </a:bodyPr>
-          <a:lstStyle/>
-          <a:p>
-            <a:pPr>
-              <a:defRPr sz="1400" b="0">
-                <a:solidFill>
-                  <a:srgbClr val="585B60"/>
+          <p:cNvPr id="22" name="TextBox 21"/>
+          <p:cNvSpPr txBox="1"/>
+          <p:nvPr/>
+        </p:nvSpPr>
+        <p:spPr>
+          <a:xfrm>
+            <a:off x="508000" y="3860800"/>
+            <a:ext cx="8128000" cy="252476"/>
+          </a:xfrm>
+          <a:prstGeom prst="rect">
+            <a:avLst/>
+          </a:prstGeom>
+          <a:noFill/>
+        </p:spPr>
+        <p:txBody>
+          <a:bodyPr wrap="none" lIns="0" rIns="0" tIns="0" bIns="0" anchor="t">
+            <a:spAutoFit/>
+          </a:bodyPr>
+          <a:lstStyle/>
+          <a:p>
+            <a:pPr>
+              <a:defRPr sz="1200" b="0">
+                <a:solidFill>
+                  <a:srgbClr val="9EA1A7"/>
                 </a:solidFill>
                 <a:latin typeface="Arial"/>
               </a:defRPr>
@@ -5703,7 +6190,7 @@
             <a:avLst/>
           </a:prstGeom>
           <a:solidFill>
-            <a:srgbClr val="FFFFFF"/>
+            <a:srgbClr val="121316"/>
           </a:solidFill>
           <a:ln>
             <a:noFill/>
@@ -5725,8 +6212,8 @@
         </p:nvSpPr>
         <p:spPr>
           <a:xfrm>
-            <a:off x="508000" y="292100"/>
-            <a:ext cx="533400" cy="50800"/>
+            <a:off x="0" y="0"/>
+            <a:ext cx="76200" cy="5143500"/>
           </a:xfrm>
           <a:prstGeom prst="rect">
             <a:avLst/>
@@ -5748,30 +6235,59 @@
       </p:sp>
       <p:sp>
         <p:nvSpPr>
-          <p:cNvPr id="4" name="TextBox 3"/>
-          <p:cNvSpPr txBox="1"/>
-          <p:nvPr/>
-        </p:nvSpPr>
-        <p:spPr>
-          <a:xfrm>
-            <a:off x="1206500" y="203200"/>
-            <a:ext cx="7239000" cy="220979"/>
-          </a:xfrm>
-          <a:prstGeom prst="rect">
-            <a:avLst/>
-          </a:prstGeom>
-          <a:noFill/>
-        </p:spPr>
-        <p:txBody>
-          <a:bodyPr wrap="none" lIns="0" rIns="0" tIns="0" bIns="0" anchor="t">
-            <a:spAutoFit/>
-          </a:bodyPr>
-          <a:lstStyle/>
-          <a:p>
-            <a:pPr>
-              <a:defRPr sz="1000" b="0">
-                <a:solidFill>
-                  <a:srgbClr val="585B60"/>
+          <p:cNvPr id="4" name="Rectangle 3"/>
+          <p:cNvSpPr/>
+          <p:nvPr/>
+        </p:nvSpPr>
+        <p:spPr>
+          <a:xfrm>
+            <a:off x="508000" y="304800"/>
+            <a:ext cx="101600" cy="101600"/>
+          </a:xfrm>
+          <a:prstGeom prst="rect">
+            <a:avLst/>
+          </a:prstGeom>
+          <a:solidFill>
+            <a:srgbClr val="D71920"/>
+          </a:solidFill>
+          <a:ln>
+            <a:noFill/>
+          </a:ln>
+        </p:spPr>
+        <p:txBody>
+          <a:bodyPr rtlCol="0" anchor="ctr"/>
+          <a:lstStyle/>
+          <a:p>
+            <a:pPr algn="ctr"/>
+          </a:p>
+        </p:txBody>
+      </p:sp>
+      <p:sp>
+        <p:nvSpPr>
+          <p:cNvPr id="5" name="TextBox 4"/>
+          <p:cNvSpPr txBox="1"/>
+          <p:nvPr/>
+        </p:nvSpPr>
+        <p:spPr>
+          <a:xfrm>
+            <a:off x="711200" y="241300"/>
+            <a:ext cx="6096000" cy="205232"/>
+          </a:xfrm>
+          <a:prstGeom prst="rect">
+            <a:avLst/>
+          </a:prstGeom>
+          <a:noFill/>
+        </p:spPr>
+        <p:txBody>
+          <a:bodyPr wrap="none" lIns="0" rIns="0" tIns="0" bIns="0" anchor="t">
+            <a:spAutoFit/>
+          </a:bodyPr>
+          <a:lstStyle/>
+          <a:p>
+            <a:pPr>
+              <a:defRPr sz="900" b="1">
+                <a:solidFill>
+                  <a:srgbClr val="9EA1A7"/>
                 </a:solidFill>
                 <a:latin typeface="Arial"/>
               </a:defRPr>
@@ -5784,30 +6300,66 @@
       </p:sp>
       <p:sp>
         <p:nvSpPr>
-          <p:cNvPr id="5" name="TextBox 4"/>
-          <p:cNvSpPr txBox="1"/>
-          <p:nvPr/>
-        </p:nvSpPr>
-        <p:spPr>
-          <a:xfrm>
-            <a:off x="508000" y="647700"/>
-            <a:ext cx="8128000" cy="457200"/>
-          </a:xfrm>
-          <a:prstGeom prst="rect">
-            <a:avLst/>
-          </a:prstGeom>
-          <a:noFill/>
-        </p:spPr>
-        <p:txBody>
-          <a:bodyPr wrap="none" lIns="0" rIns="0" tIns="0" bIns="0" anchor="t">
-            <a:spAutoFit/>
-          </a:bodyPr>
-          <a:lstStyle/>
-          <a:p>
-            <a:pPr>
-              <a:defRPr sz="2600" b="1">
-                <a:solidFill>
-                  <a:srgbClr val="202124"/>
+          <p:cNvPr id="6" name="TextBox 5"/>
+          <p:cNvSpPr txBox="1"/>
+          <p:nvPr/>
+        </p:nvSpPr>
+        <p:spPr>
+          <a:xfrm>
+            <a:off x="8331200" y="241300"/>
+            <a:ext cx="381000" cy="236728"/>
+          </a:xfrm>
+          <a:prstGeom prst="rect">
+            <a:avLst/>
+          </a:prstGeom>
+          <a:noFill/>
+        </p:spPr>
+        <p:txBody>
+          <a:bodyPr wrap="none" lIns="0" rIns="0" tIns="0" bIns="0" anchor="t">
+            <a:spAutoFit/>
+          </a:bodyPr>
+          <a:lstStyle/>
+          <a:p>
+            <a:pPr>
+              <a:defRPr sz="1100" b="1">
+                <a:solidFill>
+                  <a:srgbClr val="D71920"/>
+                </a:solidFill>
+                <a:latin typeface="Arial"/>
+              </a:defRPr>
+            </a:pPr>
+            <a:r>
+              <a:t>03</a:t>
+            </a:r>
+          </a:p>
+        </p:txBody>
+      </p:sp>
+      <p:sp>
+        <p:nvSpPr>
+          <p:cNvPr id="7" name="TextBox 6"/>
+          <p:cNvSpPr txBox="1"/>
+          <p:nvPr/>
+        </p:nvSpPr>
+        <p:spPr>
+          <a:xfrm>
+            <a:off x="508000" y="584200"/>
+            <a:ext cx="8128000" cy="444500"/>
+          </a:xfrm>
+          <a:prstGeom prst="rect">
+            <a:avLst/>
+          </a:prstGeom>
+          <a:noFill/>
+        </p:spPr>
+        <p:txBody>
+          <a:bodyPr wrap="none" lIns="0" rIns="0" tIns="0" bIns="0" anchor="t">
+            <a:spAutoFit/>
+          </a:bodyPr>
+          <a:lstStyle/>
+          <a:p>
+            <a:pPr>
+              <a:defRPr sz="2500" b="1">
+                <a:solidFill>
+                  <a:srgbClr val="F4F4F5"/>
                 </a:solidFill>
                 <a:latin typeface="Arial"/>
               </a:defRPr>
@@ -5820,30 +6372,30 @@
       </p:sp>
       <p:sp>
         <p:nvSpPr>
-          <p:cNvPr id="6" name="TextBox 5"/>
-          <p:cNvSpPr txBox="1"/>
-          <p:nvPr/>
-        </p:nvSpPr>
-        <p:spPr>
-          <a:xfrm>
-            <a:off x="508000" y="1041400"/>
-            <a:ext cx="8128000" cy="457200"/>
-          </a:xfrm>
-          <a:prstGeom prst="rect">
-            <a:avLst/>
-          </a:prstGeom>
-          <a:noFill/>
-        </p:spPr>
-        <p:txBody>
-          <a:bodyPr wrap="none" lIns="0" rIns="0" tIns="0" bIns="0" anchor="t">
-            <a:spAutoFit/>
-          </a:bodyPr>
-          <a:lstStyle/>
-          <a:p>
-            <a:pPr>
-              <a:defRPr sz="2600" b="1">
-                <a:solidFill>
-                  <a:srgbClr val="202124"/>
+          <p:cNvPr id="8" name="TextBox 7"/>
+          <p:cNvSpPr txBox="1"/>
+          <p:nvPr/>
+        </p:nvSpPr>
+        <p:spPr>
+          <a:xfrm>
+            <a:off x="508000" y="965200"/>
+            <a:ext cx="8128000" cy="444500"/>
+          </a:xfrm>
+          <a:prstGeom prst="rect">
+            <a:avLst/>
+          </a:prstGeom>
+          <a:noFill/>
+        </p:spPr>
+        <p:txBody>
+          <a:bodyPr wrap="none" lIns="0" rIns="0" tIns="0" bIns="0" anchor="t">
+            <a:spAutoFit/>
+          </a:bodyPr>
+          <a:lstStyle/>
+          <a:p>
+            <a:pPr>
+              <a:defRPr sz="2500" b="1">
+                <a:solidFill>
+                  <a:srgbClr val="F4F4F5"/>
                 </a:solidFill>
                 <a:latin typeface="Arial"/>
               </a:defRPr>
@@ -5856,30 +6408,59 @@
       </p:sp>
       <p:sp>
         <p:nvSpPr>
-          <p:cNvPr id="7" name="TextBox 6"/>
-          <p:cNvSpPr txBox="1"/>
-          <p:nvPr/>
-        </p:nvSpPr>
-        <p:spPr>
-          <a:xfrm>
-            <a:off x="508000" y="4495800"/>
-            <a:ext cx="7620000" cy="196850"/>
-          </a:xfrm>
-          <a:prstGeom prst="rect">
-            <a:avLst/>
-          </a:prstGeom>
-          <a:noFill/>
-        </p:spPr>
-        <p:txBody>
-          <a:bodyPr wrap="none" lIns="0" rIns="0" tIns="0" bIns="0" anchor="t">
-            <a:spAutoFit/>
-          </a:bodyPr>
-          <a:lstStyle/>
-          <a:p>
-            <a:pPr>
-              <a:defRPr sz="800" b="0">
-                <a:solidFill>
-                  <a:srgbClr val="585B60"/>
+          <p:cNvPr id="9" name="Rectangle 8"/>
+          <p:cNvSpPr/>
+          <p:nvPr/>
+        </p:nvSpPr>
+        <p:spPr>
+          <a:xfrm>
+            <a:off x="508000" y="4572000"/>
+            <a:ext cx="8128000" cy="10160"/>
+          </a:xfrm>
+          <a:prstGeom prst="rect">
+            <a:avLst/>
+          </a:prstGeom>
+          <a:solidFill>
+            <a:srgbClr val="1F2125"/>
+          </a:solidFill>
+          <a:ln>
+            <a:noFill/>
+          </a:ln>
+        </p:spPr>
+        <p:txBody>
+          <a:bodyPr rtlCol="0" anchor="ctr"/>
+          <a:lstStyle/>
+          <a:p>
+            <a:pPr algn="ctr"/>
+          </a:p>
+        </p:txBody>
+      </p:sp>
+      <p:sp>
+        <p:nvSpPr>
+          <p:cNvPr id="10" name="TextBox 9"/>
+          <p:cNvSpPr txBox="1"/>
+          <p:nvPr/>
+        </p:nvSpPr>
+        <p:spPr>
+          <a:xfrm>
+            <a:off x="508000" y="4660900"/>
+            <a:ext cx="7747000" cy="190500"/>
+          </a:xfrm>
+          <a:prstGeom prst="rect">
+            <a:avLst/>
+          </a:prstGeom>
+          <a:noFill/>
+        </p:spPr>
+        <p:txBody>
+          <a:bodyPr wrap="none" lIns="0" rIns="0" tIns="0" bIns="0" anchor="t">
+            <a:spAutoFit/>
+          </a:bodyPr>
+          <a:lstStyle/>
+          <a:p>
+            <a:pPr>
+              <a:defRPr sz="750" b="0">
+                <a:solidFill>
+                  <a:srgbClr val="9EA1A7"/>
                 </a:solidFill>
                 <a:latin typeface="Arial"/>
               </a:defRPr>
@@ -5892,64 +6473,59 @@
       </p:sp>
       <p:sp>
         <p:nvSpPr>
-          <p:cNvPr id="8" name="TextBox 7"/>
-          <p:cNvSpPr txBox="1"/>
-          <p:nvPr/>
-        </p:nvSpPr>
-        <p:spPr>
-          <a:xfrm>
-            <a:off x="8255000" y="4813300"/>
-            <a:ext cx="381000" cy="220979"/>
-          </a:xfrm>
-          <a:prstGeom prst="rect">
-            <a:avLst/>
-          </a:prstGeom>
-          <a:noFill/>
-        </p:spPr>
-        <p:txBody>
-          <a:bodyPr wrap="none" lIns="0" rIns="0" tIns="0" bIns="0" anchor="t">
-            <a:spAutoFit/>
-          </a:bodyPr>
-          <a:lstStyle/>
-          <a:p>
-            <a:pPr>
-              <a:defRPr sz="1000" b="0">
-                <a:solidFill>
-                  <a:srgbClr val="585B60"/>
-                </a:solidFill>
-                <a:latin typeface="Arial"/>
-              </a:defRPr>
-            </a:pPr>
-            <a:r>
-              <a:t>03</a:t>
-            </a:r>
-          </a:p>
-        </p:txBody>
-      </p:sp>
-      <p:sp>
-        <p:nvSpPr>
-          <p:cNvPr id="9" name="TextBox 8"/>
-          <p:cNvSpPr txBox="1"/>
-          <p:nvPr/>
-        </p:nvSpPr>
-        <p:spPr>
-          <a:xfrm>
-            <a:off x="508000" y="1816100"/>
-            <a:ext cx="2540000" cy="756412"/>
-          </a:xfrm>
-          <a:prstGeom prst="rect">
-            <a:avLst/>
-          </a:prstGeom>
-          <a:noFill/>
-        </p:spPr>
-        <p:txBody>
-          <a:bodyPr wrap="none" lIns="0" rIns="0" tIns="0" bIns="0" anchor="t">
-            <a:spAutoFit/>
-          </a:bodyPr>
-          <a:lstStyle/>
-          <a:p>
-            <a:pPr>
-              <a:defRPr sz="4400" b="1">
+          <p:cNvPr id="11" name="Rounded Rectangle 10"/>
+          <p:cNvSpPr/>
+          <p:nvPr/>
+        </p:nvSpPr>
+        <p:spPr>
+          <a:xfrm>
+            <a:off x="508000" y="1549400"/>
+            <a:ext cx="2489200" cy="2108200"/>
+          </a:xfrm>
+          <a:prstGeom prst="roundRect">
+            <a:avLst>
+              <a:gd name="adj" fmla="val 3614"/>
+            </a:avLst>
+          </a:prstGeom>
+          <a:solidFill>
+            <a:srgbClr val="1F2125"/>
+          </a:solidFill>
+          <a:ln>
+            <a:noFill/>
+          </a:ln>
+        </p:spPr>
+        <p:txBody>
+          <a:bodyPr rtlCol="0" anchor="ctr"/>
+          <a:lstStyle/>
+          <a:p>
+            <a:pPr algn="ctr"/>
+          </a:p>
+        </p:txBody>
+      </p:sp>
+      <p:sp>
+        <p:nvSpPr>
+          <p:cNvPr id="12" name="TextBox 11"/>
+          <p:cNvSpPr txBox="1"/>
+          <p:nvPr/>
+        </p:nvSpPr>
+        <p:spPr>
+          <a:xfrm>
+            <a:off x="711200" y="1727200"/>
+            <a:ext cx="2082800" cy="693420"/>
+          </a:xfrm>
+          <a:prstGeom prst="rect">
+            <a:avLst/>
+          </a:prstGeom>
+          <a:noFill/>
+        </p:spPr>
+        <p:txBody>
+          <a:bodyPr wrap="none" lIns="0" rIns="0" tIns="0" bIns="0" anchor="t">
+            <a:spAutoFit/>
+          </a:bodyPr>
+          <a:lstStyle/>
+          <a:p>
+            <a:pPr>
+              <a:defRPr sz="4000" b="1">
                 <a:solidFill>
                   <a:srgbClr val="D71920"/>
                 </a:solidFill>
@@ -5964,30 +6540,30 @@
       </p:sp>
       <p:sp>
         <p:nvSpPr>
-          <p:cNvPr id="10" name="TextBox 9"/>
-          <p:cNvSpPr txBox="1"/>
-          <p:nvPr/>
-        </p:nvSpPr>
-        <p:spPr>
-          <a:xfrm>
-            <a:off x="508000" y="2552700"/>
-            <a:ext cx="2667000" cy="299720"/>
-          </a:xfrm>
-          <a:prstGeom prst="rect">
-            <a:avLst/>
-          </a:prstGeom>
-          <a:noFill/>
-        </p:spPr>
-        <p:txBody>
-          <a:bodyPr wrap="none" lIns="0" rIns="0" tIns="0" bIns="0" anchor="t">
-            <a:spAutoFit/>
-          </a:bodyPr>
-          <a:lstStyle/>
-          <a:p>
-            <a:pPr>
-              <a:defRPr sz="1500" b="0">
-                <a:solidFill>
-                  <a:srgbClr val="202124"/>
+          <p:cNvPr id="13" name="TextBox 12"/>
+          <p:cNvSpPr txBox="1"/>
+          <p:nvPr/>
+        </p:nvSpPr>
+        <p:spPr>
+          <a:xfrm>
+            <a:off x="711200" y="2413000"/>
+            <a:ext cx="2082800" cy="278130"/>
+          </a:xfrm>
+          <a:prstGeom prst="rect">
+            <a:avLst/>
+          </a:prstGeom>
+          <a:noFill/>
+        </p:spPr>
+        <p:txBody>
+          <a:bodyPr wrap="none" lIns="0" rIns="0" tIns="0" bIns="0" anchor="t">
+            <a:spAutoFit/>
+          </a:bodyPr>
+          <a:lstStyle/>
+          <a:p>
+            <a:pPr>
+              <a:defRPr sz="1300" b="0">
+                <a:solidFill>
+                  <a:srgbClr val="F4F4F5"/>
                 </a:solidFill>
                 <a:latin typeface="Arial"/>
               </a:defRPr>
@@ -6000,30 +6576,30 @@
       </p:sp>
       <p:sp>
         <p:nvSpPr>
-          <p:cNvPr id="11" name="TextBox 10"/>
-          <p:cNvSpPr txBox="1"/>
-          <p:nvPr/>
-        </p:nvSpPr>
-        <p:spPr>
-          <a:xfrm>
-            <a:off x="508000" y="2788920"/>
-            <a:ext cx="2667000" cy="299720"/>
-          </a:xfrm>
-          <a:prstGeom prst="rect">
-            <a:avLst/>
-          </a:prstGeom>
-          <a:noFill/>
-        </p:spPr>
-        <p:txBody>
-          <a:bodyPr wrap="none" lIns="0" rIns="0" tIns="0" bIns="0" anchor="t">
-            <a:spAutoFit/>
-          </a:bodyPr>
-          <a:lstStyle/>
-          <a:p>
-            <a:pPr>
-              <a:defRPr sz="1500" b="0">
-                <a:solidFill>
-                  <a:srgbClr val="202124"/>
+          <p:cNvPr id="14" name="TextBox 13"/>
+          <p:cNvSpPr txBox="1"/>
+          <p:nvPr/>
+        </p:nvSpPr>
+        <p:spPr>
+          <a:xfrm>
+            <a:off x="711200" y="2627630"/>
+            <a:ext cx="2082800" cy="278130"/>
+          </a:xfrm>
+          <a:prstGeom prst="rect">
+            <a:avLst/>
+          </a:prstGeom>
+          <a:noFill/>
+        </p:spPr>
+        <p:txBody>
+          <a:bodyPr wrap="none" lIns="0" rIns="0" tIns="0" bIns="0" anchor="t">
+            <a:spAutoFit/>
+          </a:bodyPr>
+          <a:lstStyle/>
+          <a:p>
+            <a:pPr>
+              <a:defRPr sz="1300" b="0">
+                <a:solidFill>
+                  <a:srgbClr val="F4F4F5"/>
                 </a:solidFill>
                 <a:latin typeface="Arial"/>
               </a:defRPr>
@@ -6036,30 +6612,30 @@
       </p:sp>
       <p:sp>
         <p:nvSpPr>
-          <p:cNvPr id="12" name="TextBox 11"/>
-          <p:cNvSpPr txBox="1"/>
-          <p:nvPr/>
-        </p:nvSpPr>
-        <p:spPr>
-          <a:xfrm>
-            <a:off x="508000" y="3025140"/>
-            <a:ext cx="2667000" cy="299720"/>
-          </a:xfrm>
-          <a:prstGeom prst="rect">
-            <a:avLst/>
-          </a:prstGeom>
-          <a:noFill/>
-        </p:spPr>
-        <p:txBody>
-          <a:bodyPr wrap="none" lIns="0" rIns="0" tIns="0" bIns="0" anchor="t">
-            <a:spAutoFit/>
-          </a:bodyPr>
-          <a:lstStyle/>
-          <a:p>
-            <a:pPr>
-              <a:defRPr sz="1500" b="0">
-                <a:solidFill>
-                  <a:srgbClr val="202124"/>
+          <p:cNvPr id="15" name="TextBox 14"/>
+          <p:cNvSpPr txBox="1"/>
+          <p:nvPr/>
+        </p:nvSpPr>
+        <p:spPr>
+          <a:xfrm>
+            <a:off x="711200" y="2842260"/>
+            <a:ext cx="2082800" cy="278130"/>
+          </a:xfrm>
+          <a:prstGeom prst="rect">
+            <a:avLst/>
+          </a:prstGeom>
+          <a:noFill/>
+        </p:spPr>
+        <p:txBody>
+          <a:bodyPr wrap="none" lIns="0" rIns="0" tIns="0" bIns="0" anchor="t">
+            <a:spAutoFit/>
+          </a:bodyPr>
+          <a:lstStyle/>
+          <a:p>
+            <a:pPr>
+              <a:defRPr sz="1300" b="0">
+                <a:solidFill>
+                  <a:srgbClr val="F4F4F5"/>
                 </a:solidFill>
                 <a:latin typeface="Arial"/>
               </a:defRPr>
@@ -6072,28 +6648,59 @@
       </p:sp>
       <p:sp>
         <p:nvSpPr>
-          <p:cNvPr id="13" name="TextBox 12"/>
-          <p:cNvSpPr txBox="1"/>
-          <p:nvPr/>
-        </p:nvSpPr>
-        <p:spPr>
-          <a:xfrm>
-            <a:off x="3327400" y="1816100"/>
-            <a:ext cx="2540000" cy="756412"/>
-          </a:xfrm>
-          <a:prstGeom prst="rect">
-            <a:avLst/>
-          </a:prstGeom>
-          <a:noFill/>
-        </p:spPr>
-        <p:txBody>
-          <a:bodyPr wrap="none" lIns="0" rIns="0" tIns="0" bIns="0" anchor="t">
-            <a:spAutoFit/>
-          </a:bodyPr>
-          <a:lstStyle/>
-          <a:p>
-            <a:pPr>
-              <a:defRPr sz="4400" b="1">
+          <p:cNvPr id="16" name="Rounded Rectangle 15"/>
+          <p:cNvSpPr/>
+          <p:nvPr/>
+        </p:nvSpPr>
+        <p:spPr>
+          <a:xfrm>
+            <a:off x="3327400" y="1549400"/>
+            <a:ext cx="2489200" cy="2108200"/>
+          </a:xfrm>
+          <a:prstGeom prst="roundRect">
+            <a:avLst>
+              <a:gd name="adj" fmla="val 3614"/>
+            </a:avLst>
+          </a:prstGeom>
+          <a:solidFill>
+            <a:srgbClr val="1F2125"/>
+          </a:solidFill>
+          <a:ln>
+            <a:noFill/>
+          </a:ln>
+        </p:spPr>
+        <p:txBody>
+          <a:bodyPr rtlCol="0" anchor="ctr"/>
+          <a:lstStyle/>
+          <a:p>
+            <a:pPr algn="ctr"/>
+          </a:p>
+        </p:txBody>
+      </p:sp>
+      <p:sp>
+        <p:nvSpPr>
+          <p:cNvPr id="17" name="TextBox 16"/>
+          <p:cNvSpPr txBox="1"/>
+          <p:nvPr/>
+        </p:nvSpPr>
+        <p:spPr>
+          <a:xfrm>
+            <a:off x="3530600" y="1727200"/>
+            <a:ext cx="2082800" cy="693420"/>
+          </a:xfrm>
+          <a:prstGeom prst="rect">
+            <a:avLst/>
+          </a:prstGeom>
+          <a:noFill/>
+        </p:spPr>
+        <p:txBody>
+          <a:bodyPr wrap="none" lIns="0" rIns="0" tIns="0" bIns="0" anchor="t">
+            <a:spAutoFit/>
+          </a:bodyPr>
+          <a:lstStyle/>
+          <a:p>
+            <a:pPr>
+              <a:defRPr sz="4000" b="1">
                 <a:solidFill>
                   <a:srgbClr val="D71920"/>
                 </a:solidFill>
@@ -6108,30 +6715,30 @@
       </p:sp>
       <p:sp>
         <p:nvSpPr>
-          <p:cNvPr id="14" name="TextBox 13"/>
-          <p:cNvSpPr txBox="1"/>
-          <p:nvPr/>
-        </p:nvSpPr>
-        <p:spPr>
-          <a:xfrm>
-            <a:off x="3327400" y="2552700"/>
-            <a:ext cx="2540000" cy="299720"/>
-          </a:xfrm>
-          <a:prstGeom prst="rect">
-            <a:avLst/>
-          </a:prstGeom>
-          <a:noFill/>
-        </p:spPr>
-        <p:txBody>
-          <a:bodyPr wrap="none" lIns="0" rIns="0" tIns="0" bIns="0" anchor="t">
-            <a:spAutoFit/>
-          </a:bodyPr>
-          <a:lstStyle/>
-          <a:p>
-            <a:pPr>
-              <a:defRPr sz="1500" b="0">
-                <a:solidFill>
-                  <a:srgbClr val="202124"/>
+          <p:cNvPr id="18" name="TextBox 17"/>
+          <p:cNvSpPr txBox="1"/>
+          <p:nvPr/>
+        </p:nvSpPr>
+        <p:spPr>
+          <a:xfrm>
+            <a:off x="3530600" y="2413000"/>
+            <a:ext cx="2082800" cy="278130"/>
+          </a:xfrm>
+          <a:prstGeom prst="rect">
+            <a:avLst/>
+          </a:prstGeom>
+          <a:noFill/>
+        </p:spPr>
+        <p:txBody>
+          <a:bodyPr wrap="none" lIns="0" rIns="0" tIns="0" bIns="0" anchor="t">
+            <a:spAutoFit/>
+          </a:bodyPr>
+          <a:lstStyle/>
+          <a:p>
+            <a:pPr>
+              <a:defRPr sz="1300" b="0">
+                <a:solidFill>
+                  <a:srgbClr val="F4F4F5"/>
                 </a:solidFill>
                 <a:latin typeface="Arial"/>
               </a:defRPr>
@@ -6144,30 +6751,30 @@
       </p:sp>
       <p:sp>
         <p:nvSpPr>
-          <p:cNvPr id="15" name="TextBox 14"/>
-          <p:cNvSpPr txBox="1"/>
-          <p:nvPr/>
-        </p:nvSpPr>
-        <p:spPr>
-          <a:xfrm>
-            <a:off x="3327400" y="2788920"/>
-            <a:ext cx="2540000" cy="299720"/>
-          </a:xfrm>
-          <a:prstGeom prst="rect">
-            <a:avLst/>
-          </a:prstGeom>
-          <a:noFill/>
-        </p:spPr>
-        <p:txBody>
-          <a:bodyPr wrap="none" lIns="0" rIns="0" tIns="0" bIns="0" anchor="t">
-            <a:spAutoFit/>
-          </a:bodyPr>
-          <a:lstStyle/>
-          <a:p>
-            <a:pPr>
-              <a:defRPr sz="1500" b="0">
-                <a:solidFill>
-                  <a:srgbClr val="202124"/>
+          <p:cNvPr id="19" name="TextBox 18"/>
+          <p:cNvSpPr txBox="1"/>
+          <p:nvPr/>
+        </p:nvSpPr>
+        <p:spPr>
+          <a:xfrm>
+            <a:off x="3530600" y="2627630"/>
+            <a:ext cx="2082800" cy="278130"/>
+          </a:xfrm>
+          <a:prstGeom prst="rect">
+            <a:avLst/>
+          </a:prstGeom>
+          <a:noFill/>
+        </p:spPr>
+        <p:txBody>
+          <a:bodyPr wrap="none" lIns="0" rIns="0" tIns="0" bIns="0" anchor="t">
+            <a:spAutoFit/>
+          </a:bodyPr>
+          <a:lstStyle/>
+          <a:p>
+            <a:pPr>
+              <a:defRPr sz="1300" b="0">
+                <a:solidFill>
+                  <a:srgbClr val="F4F4F5"/>
                 </a:solidFill>
                 <a:latin typeface="Arial"/>
               </a:defRPr>
@@ -6180,28 +6787,59 @@
       </p:sp>
       <p:sp>
         <p:nvSpPr>
-          <p:cNvPr id="16" name="TextBox 15"/>
-          <p:cNvSpPr txBox="1"/>
-          <p:nvPr/>
-        </p:nvSpPr>
-        <p:spPr>
-          <a:xfrm>
-            <a:off x="6146800" y="1816100"/>
-            <a:ext cx="2489200" cy="756412"/>
-          </a:xfrm>
-          <a:prstGeom prst="rect">
-            <a:avLst/>
-          </a:prstGeom>
-          <a:noFill/>
-        </p:spPr>
-        <p:txBody>
-          <a:bodyPr wrap="none" lIns="0" rIns="0" tIns="0" bIns="0" anchor="t">
-            <a:spAutoFit/>
-          </a:bodyPr>
-          <a:lstStyle/>
-          <a:p>
-            <a:pPr>
-              <a:defRPr sz="4400" b="1">
+          <p:cNvPr id="20" name="Rounded Rectangle 19"/>
+          <p:cNvSpPr/>
+          <p:nvPr/>
+        </p:nvSpPr>
+        <p:spPr>
+          <a:xfrm>
+            <a:off x="6146800" y="1549400"/>
+            <a:ext cx="2489200" cy="2108200"/>
+          </a:xfrm>
+          <a:prstGeom prst="roundRect">
+            <a:avLst>
+              <a:gd name="adj" fmla="val 3614"/>
+            </a:avLst>
+          </a:prstGeom>
+          <a:solidFill>
+            <a:srgbClr val="1F2125"/>
+          </a:solidFill>
+          <a:ln>
+            <a:noFill/>
+          </a:ln>
+        </p:spPr>
+        <p:txBody>
+          <a:bodyPr rtlCol="0" anchor="ctr"/>
+          <a:lstStyle/>
+          <a:p>
+            <a:pPr algn="ctr"/>
+          </a:p>
+        </p:txBody>
+      </p:sp>
+      <p:sp>
+        <p:nvSpPr>
+          <p:cNvPr id="21" name="TextBox 20"/>
+          <p:cNvSpPr txBox="1"/>
+          <p:nvPr/>
+        </p:nvSpPr>
+        <p:spPr>
+          <a:xfrm>
+            <a:off x="6350000" y="1727200"/>
+            <a:ext cx="2082800" cy="693420"/>
+          </a:xfrm>
+          <a:prstGeom prst="rect">
+            <a:avLst/>
+          </a:prstGeom>
+          <a:noFill/>
+        </p:spPr>
+        <p:txBody>
+          <a:bodyPr wrap="none" lIns="0" rIns="0" tIns="0" bIns="0" anchor="t">
+            <a:spAutoFit/>
+          </a:bodyPr>
+          <a:lstStyle/>
+          <a:p>
+            <a:pPr>
+              <a:defRPr sz="4000" b="1">
                 <a:solidFill>
                   <a:srgbClr val="D71920"/>
                 </a:solidFill>
@@ -6216,30 +6854,30 @@
       </p:sp>
       <p:sp>
         <p:nvSpPr>
-          <p:cNvPr id="17" name="TextBox 16"/>
-          <p:cNvSpPr txBox="1"/>
-          <p:nvPr/>
-        </p:nvSpPr>
-        <p:spPr>
-          <a:xfrm>
-            <a:off x="6146800" y="2552700"/>
-            <a:ext cx="2489200" cy="299720"/>
-          </a:xfrm>
-          <a:prstGeom prst="rect">
-            <a:avLst/>
-          </a:prstGeom>
-          <a:noFill/>
-        </p:spPr>
-        <p:txBody>
-          <a:bodyPr wrap="none" lIns="0" rIns="0" tIns="0" bIns="0" anchor="t">
-            <a:spAutoFit/>
-          </a:bodyPr>
-          <a:lstStyle/>
-          <a:p>
-            <a:pPr>
-              <a:defRPr sz="1500" b="0">
-                <a:solidFill>
-                  <a:srgbClr val="202124"/>
+          <p:cNvPr id="22" name="TextBox 21"/>
+          <p:cNvSpPr txBox="1"/>
+          <p:nvPr/>
+        </p:nvSpPr>
+        <p:spPr>
+          <a:xfrm>
+            <a:off x="6350000" y="2413000"/>
+            <a:ext cx="2082800" cy="278130"/>
+          </a:xfrm>
+          <a:prstGeom prst="rect">
+            <a:avLst/>
+          </a:prstGeom>
+          <a:noFill/>
+        </p:spPr>
+        <p:txBody>
+          <a:bodyPr wrap="none" lIns="0" rIns="0" tIns="0" bIns="0" anchor="t">
+            <a:spAutoFit/>
+          </a:bodyPr>
+          <a:lstStyle/>
+          <a:p>
+            <a:pPr>
+              <a:defRPr sz="1300" b="0">
+                <a:solidFill>
+                  <a:srgbClr val="F4F4F5"/>
                 </a:solidFill>
                 <a:latin typeface="Arial"/>
               </a:defRPr>
@@ -6252,30 +6890,30 @@
       </p:sp>
       <p:sp>
         <p:nvSpPr>
-          <p:cNvPr id="18" name="TextBox 17"/>
-          <p:cNvSpPr txBox="1"/>
-          <p:nvPr/>
-        </p:nvSpPr>
-        <p:spPr>
-          <a:xfrm>
-            <a:off x="6146800" y="2788920"/>
-            <a:ext cx="2489200" cy="299720"/>
-          </a:xfrm>
-          <a:prstGeom prst="rect">
-            <a:avLst/>
-          </a:prstGeom>
-          <a:noFill/>
-        </p:spPr>
-        <p:txBody>
-          <a:bodyPr wrap="none" lIns="0" rIns="0" tIns="0" bIns="0" anchor="t">
-            <a:spAutoFit/>
-          </a:bodyPr>
-          <a:lstStyle/>
-          <a:p>
-            <a:pPr>
-              <a:defRPr sz="1500" b="0">
-                <a:solidFill>
-                  <a:srgbClr val="202124"/>
+          <p:cNvPr id="23" name="TextBox 22"/>
+          <p:cNvSpPr txBox="1"/>
+          <p:nvPr/>
+        </p:nvSpPr>
+        <p:spPr>
+          <a:xfrm>
+            <a:off x="6350000" y="2627630"/>
+            <a:ext cx="2082800" cy="278130"/>
+          </a:xfrm>
+          <a:prstGeom prst="rect">
+            <a:avLst/>
+          </a:prstGeom>
+          <a:noFill/>
+        </p:spPr>
+        <p:txBody>
+          <a:bodyPr wrap="none" lIns="0" rIns="0" tIns="0" bIns="0" anchor="t">
+            <a:spAutoFit/>
+          </a:bodyPr>
+          <a:lstStyle/>
+          <a:p>
+            <a:pPr>
+              <a:defRPr sz="1300" b="0">
+                <a:solidFill>
+                  <a:srgbClr val="F4F4F5"/>
                 </a:solidFill>
                 <a:latin typeface="Arial"/>
               </a:defRPr>
@@ -6288,30 +6926,30 @@
       </p:sp>
       <p:sp>
         <p:nvSpPr>
-          <p:cNvPr id="19" name="TextBox 18"/>
-          <p:cNvSpPr txBox="1"/>
-          <p:nvPr/>
-        </p:nvSpPr>
-        <p:spPr>
-          <a:xfrm>
-            <a:off x="508000" y="3937000"/>
-            <a:ext cx="8128000" cy="268224"/>
-          </a:xfrm>
-          <a:prstGeom prst="rect">
-            <a:avLst/>
-          </a:prstGeom>
-          <a:noFill/>
-        </p:spPr>
-        <p:txBody>
-          <a:bodyPr wrap="none" lIns="0" rIns="0" tIns="0" bIns="0" anchor="t">
-            <a:spAutoFit/>
-          </a:bodyPr>
-          <a:lstStyle/>
-          <a:p>
-            <a:pPr>
-              <a:defRPr sz="1300" b="0">
-                <a:solidFill>
-                  <a:srgbClr val="585B60"/>
+          <p:cNvPr id="24" name="TextBox 23"/>
+          <p:cNvSpPr txBox="1"/>
+          <p:nvPr/>
+        </p:nvSpPr>
+        <p:spPr>
+          <a:xfrm>
+            <a:off x="508000" y="3860800"/>
+            <a:ext cx="8128000" cy="252476"/>
+          </a:xfrm>
+          <a:prstGeom prst="rect">
+            <a:avLst/>
+          </a:prstGeom>
+          <a:noFill/>
+        </p:spPr>
+        <p:txBody>
+          <a:bodyPr wrap="none" lIns="0" rIns="0" tIns="0" bIns="0" anchor="t">
+            <a:spAutoFit/>
+          </a:bodyPr>
+          <a:lstStyle/>
+          <a:p>
+            <a:pPr>
+              <a:defRPr sz="1200" b="0">
+                <a:solidFill>
+                  <a:srgbClr val="9EA1A7"/>
                 </a:solidFill>
                 <a:latin typeface="Arial"/>
               </a:defRPr>
@@ -6355,7 +6993,7 @@
             <a:avLst/>
           </a:prstGeom>
           <a:solidFill>
-            <a:srgbClr val="FFFFFF"/>
+            <a:srgbClr val="121316"/>
           </a:solidFill>
           <a:ln>
             <a:noFill/>
@@ -6377,8 +7015,8 @@
         </p:nvSpPr>
         <p:spPr>
           <a:xfrm>
-            <a:off x="508000" y="292100"/>
-            <a:ext cx="533400" cy="50800"/>
+            <a:off x="0" y="0"/>
+            <a:ext cx="76200" cy="5143500"/>
           </a:xfrm>
           <a:prstGeom prst="rect">
             <a:avLst/>
@@ -6400,194 +7038,14 @@
       </p:sp>
       <p:sp>
         <p:nvSpPr>
-          <p:cNvPr id="4" name="TextBox 3"/>
-          <p:cNvSpPr txBox="1"/>
-          <p:nvPr/>
-        </p:nvSpPr>
-        <p:spPr>
-          <a:xfrm>
-            <a:off x="1206500" y="203200"/>
-            <a:ext cx="7239000" cy="220979"/>
-          </a:xfrm>
-          <a:prstGeom prst="rect">
-            <a:avLst/>
-          </a:prstGeom>
-          <a:noFill/>
-        </p:spPr>
-        <p:txBody>
-          <a:bodyPr wrap="none" lIns="0" rIns="0" tIns="0" bIns="0" anchor="t">
-            <a:spAutoFit/>
-          </a:bodyPr>
-          <a:lstStyle/>
-          <a:p>
-            <a:pPr>
-              <a:defRPr sz="1000" b="0">
-                <a:solidFill>
-                  <a:srgbClr val="585B60"/>
-                </a:solidFill>
-                <a:latin typeface="Arial"/>
-              </a:defRPr>
-            </a:pPr>
-            <a:r>
-              <a:t>STUFF+ 2240 / DIABLOS ROJOS</a:t>
-            </a:r>
-          </a:p>
-        </p:txBody>
-      </p:sp>
-      <p:sp>
-        <p:nvSpPr>
-          <p:cNvPr id="5" name="TextBox 4"/>
-          <p:cNvSpPr txBox="1"/>
-          <p:nvPr/>
-        </p:nvSpPr>
-        <p:spPr>
-          <a:xfrm>
-            <a:off x="508000" y="647700"/>
-            <a:ext cx="8128000" cy="457200"/>
-          </a:xfrm>
-          <a:prstGeom prst="rect">
-            <a:avLst/>
-          </a:prstGeom>
-          <a:noFill/>
-        </p:spPr>
-        <p:txBody>
-          <a:bodyPr wrap="none" lIns="0" rIns="0" tIns="0" bIns="0" anchor="t">
-            <a:spAutoFit/>
-          </a:bodyPr>
-          <a:lstStyle/>
-          <a:p>
-            <a:pPr>
-              <a:defRPr sz="2600" b="1">
-                <a:solidFill>
-                  <a:srgbClr val="202124"/>
-                </a:solidFill>
-                <a:latin typeface="Arial"/>
-              </a:defRPr>
-            </a:pPr>
-            <a:r>
-              <a:t>Le ganamos al modelo nulo de la rúbrica</a:t>
-            </a:r>
-          </a:p>
-        </p:txBody>
-      </p:sp>
-      <p:sp>
-        <p:nvSpPr>
-          <p:cNvPr id="6" name="TextBox 5"/>
-          <p:cNvSpPr txBox="1"/>
-          <p:nvPr/>
-        </p:nvSpPr>
-        <p:spPr>
-          <a:xfrm>
-            <a:off x="508000" y="4495800"/>
-            <a:ext cx="7620000" cy="196850"/>
-          </a:xfrm>
-          <a:prstGeom prst="rect">
-            <a:avLst/>
-          </a:prstGeom>
-          <a:noFill/>
-        </p:spPr>
-        <p:txBody>
-          <a:bodyPr wrap="none" lIns="0" rIns="0" tIns="0" bIns="0" anchor="t">
-            <a:spAutoFit/>
-          </a:bodyPr>
-          <a:lstStyle/>
-          <a:p>
-            <a:pPr>
-              <a:defRPr sz="800" b="0">
-                <a:solidFill>
-                  <a:srgbClr val="585B60"/>
-                </a:solidFill>
-                <a:latin typeface="Arial"/>
-              </a:defRPr>
-            </a:pPr>
-            <a:r>
-              <a:t>reports/validation/headline.csv; reports/stuff_v2/skill.csv; reports/stuff_v2/pitcher_level.csv.</a:t>
-            </a:r>
-          </a:p>
-        </p:txBody>
-      </p:sp>
-      <p:sp>
-        <p:nvSpPr>
-          <p:cNvPr id="7" name="TextBox 6"/>
-          <p:cNvSpPr txBox="1"/>
-          <p:nvPr/>
-        </p:nvSpPr>
-        <p:spPr>
-          <a:xfrm>
-            <a:off x="8255000" y="4813300"/>
-            <a:ext cx="381000" cy="220979"/>
-          </a:xfrm>
-          <a:prstGeom prst="rect">
-            <a:avLst/>
-          </a:prstGeom>
-          <a:noFill/>
-        </p:spPr>
-        <p:txBody>
-          <a:bodyPr wrap="none" lIns="0" rIns="0" tIns="0" bIns="0" anchor="t">
-            <a:spAutoFit/>
-          </a:bodyPr>
-          <a:lstStyle/>
-          <a:p>
-            <a:pPr>
-              <a:defRPr sz="1000" b="0">
-                <a:solidFill>
-                  <a:srgbClr val="585B60"/>
-                </a:solidFill>
-                <a:latin typeface="Arial"/>
-              </a:defRPr>
-            </a:pPr>
-            <a:r>
-              <a:t>04</a:t>
-            </a:r>
-          </a:p>
-        </p:txBody>
-      </p:sp>
-      <p:sp>
-        <p:nvSpPr>
-          <p:cNvPr id="8" name="TextBox 7"/>
-          <p:cNvSpPr txBox="1"/>
-          <p:nvPr/>
-        </p:nvSpPr>
-        <p:spPr>
-          <a:xfrm>
-            <a:off x="508000" y="1803400"/>
-            <a:ext cx="2095500" cy="299720"/>
-          </a:xfrm>
-          <a:prstGeom prst="rect">
-            <a:avLst/>
-          </a:prstGeom>
-          <a:noFill/>
-        </p:spPr>
-        <p:txBody>
-          <a:bodyPr wrap="none" lIns="0" rIns="0" tIns="0" bIns="0" anchor="t">
-            <a:spAutoFit/>
-          </a:bodyPr>
-          <a:lstStyle/>
-          <a:p>
-            <a:pPr>
-              <a:defRPr sz="1500" b="0">
-                <a:solidFill>
-                  <a:srgbClr val="202124"/>
-                </a:solidFill>
-                <a:latin typeface="Arial"/>
-              </a:defRPr>
-            </a:pPr>
-            <a:r>
-              <a:t>Pitching+</a:t>
-            </a:r>
-          </a:p>
-        </p:txBody>
-      </p:sp>
-      <p:sp>
-        <p:nvSpPr>
-          <p:cNvPr id="9" name="Rectangle 8"/>
+          <p:cNvPr id="4" name="Rectangle 3"/>
           <p:cNvSpPr/>
           <p:nvPr/>
         </p:nvSpPr>
         <p:spPr>
           <a:xfrm>
-            <a:off x="2730500" y="1854200"/>
-            <a:ext cx="3301491" cy="228600"/>
+            <a:off x="508000" y="304800"/>
+            <a:ext cx="101600" cy="101600"/>
           </a:xfrm>
           <a:prstGeom prst="rect">
             <a:avLst/>
@@ -6609,89 +7067,259 @@
       </p:sp>
       <p:sp>
         <p:nvSpPr>
+          <p:cNvPr id="5" name="TextBox 4"/>
+          <p:cNvSpPr txBox="1"/>
+          <p:nvPr/>
+        </p:nvSpPr>
+        <p:spPr>
+          <a:xfrm>
+            <a:off x="711200" y="241300"/>
+            <a:ext cx="6096000" cy="205232"/>
+          </a:xfrm>
+          <a:prstGeom prst="rect">
+            <a:avLst/>
+          </a:prstGeom>
+          <a:noFill/>
+        </p:spPr>
+        <p:txBody>
+          <a:bodyPr wrap="none" lIns="0" rIns="0" tIns="0" bIns="0" anchor="t">
+            <a:spAutoFit/>
+          </a:bodyPr>
+          <a:lstStyle/>
+          <a:p>
+            <a:pPr>
+              <a:defRPr sz="900" b="1">
+                <a:solidFill>
+                  <a:srgbClr val="9EA1A7"/>
+                </a:solidFill>
+                <a:latin typeface="Arial"/>
+              </a:defRPr>
+            </a:pPr>
+            <a:r>
+              <a:t>STUFF+ 2240 / DIABLOS ROJOS</a:t>
+            </a:r>
+          </a:p>
+        </p:txBody>
+      </p:sp>
+      <p:sp>
+        <p:nvSpPr>
+          <p:cNvPr id="6" name="TextBox 5"/>
+          <p:cNvSpPr txBox="1"/>
+          <p:nvPr/>
+        </p:nvSpPr>
+        <p:spPr>
+          <a:xfrm>
+            <a:off x="8331200" y="241300"/>
+            <a:ext cx="381000" cy="236728"/>
+          </a:xfrm>
+          <a:prstGeom prst="rect">
+            <a:avLst/>
+          </a:prstGeom>
+          <a:noFill/>
+        </p:spPr>
+        <p:txBody>
+          <a:bodyPr wrap="none" lIns="0" rIns="0" tIns="0" bIns="0" anchor="t">
+            <a:spAutoFit/>
+          </a:bodyPr>
+          <a:lstStyle/>
+          <a:p>
+            <a:pPr>
+              <a:defRPr sz="1100" b="1">
+                <a:solidFill>
+                  <a:srgbClr val="D71920"/>
+                </a:solidFill>
+                <a:latin typeface="Arial"/>
+              </a:defRPr>
+            </a:pPr>
+            <a:r>
+              <a:t>04</a:t>
+            </a:r>
+          </a:p>
+        </p:txBody>
+      </p:sp>
+      <p:sp>
+        <p:nvSpPr>
+          <p:cNvPr id="7" name="TextBox 6"/>
+          <p:cNvSpPr txBox="1"/>
+          <p:nvPr/>
+        </p:nvSpPr>
+        <p:spPr>
+          <a:xfrm>
+            <a:off x="508000" y="584200"/>
+            <a:ext cx="8128000" cy="444500"/>
+          </a:xfrm>
+          <a:prstGeom prst="rect">
+            <a:avLst/>
+          </a:prstGeom>
+          <a:noFill/>
+        </p:spPr>
+        <p:txBody>
+          <a:bodyPr wrap="none" lIns="0" rIns="0" tIns="0" bIns="0" anchor="t">
+            <a:spAutoFit/>
+          </a:bodyPr>
+          <a:lstStyle/>
+          <a:p>
+            <a:pPr>
+              <a:defRPr sz="2500" b="1">
+                <a:solidFill>
+                  <a:srgbClr val="F4F4F5"/>
+                </a:solidFill>
+                <a:latin typeface="Arial"/>
+              </a:defRPr>
+            </a:pPr>
+            <a:r>
+              <a:t>Le ganamos al modelo nulo de la rúbrica</a:t>
+            </a:r>
+          </a:p>
+        </p:txBody>
+      </p:sp>
+      <p:sp>
+        <p:nvSpPr>
+          <p:cNvPr id="8" name="Rectangle 7"/>
+          <p:cNvSpPr/>
+          <p:nvPr/>
+        </p:nvSpPr>
+        <p:spPr>
+          <a:xfrm>
+            <a:off x="508000" y="4572000"/>
+            <a:ext cx="8128000" cy="10160"/>
+          </a:xfrm>
+          <a:prstGeom prst="rect">
+            <a:avLst/>
+          </a:prstGeom>
+          <a:solidFill>
+            <a:srgbClr val="1F2125"/>
+          </a:solidFill>
+          <a:ln>
+            <a:noFill/>
+          </a:ln>
+        </p:spPr>
+        <p:txBody>
+          <a:bodyPr rtlCol="0" anchor="ctr"/>
+          <a:lstStyle/>
+          <a:p>
+            <a:pPr algn="ctr"/>
+          </a:p>
+        </p:txBody>
+      </p:sp>
+      <p:sp>
+        <p:nvSpPr>
+          <p:cNvPr id="9" name="TextBox 8"/>
+          <p:cNvSpPr txBox="1"/>
+          <p:nvPr/>
+        </p:nvSpPr>
+        <p:spPr>
+          <a:xfrm>
+            <a:off x="508000" y="4660900"/>
+            <a:ext cx="7747000" cy="190500"/>
+          </a:xfrm>
+          <a:prstGeom prst="rect">
+            <a:avLst/>
+          </a:prstGeom>
+          <a:noFill/>
+        </p:spPr>
+        <p:txBody>
+          <a:bodyPr wrap="none" lIns="0" rIns="0" tIns="0" bIns="0" anchor="t">
+            <a:spAutoFit/>
+          </a:bodyPr>
+          <a:lstStyle/>
+          <a:p>
+            <a:pPr>
+              <a:defRPr sz="750" b="0">
+                <a:solidFill>
+                  <a:srgbClr val="9EA1A7"/>
+                </a:solidFill>
+                <a:latin typeface="Arial"/>
+              </a:defRPr>
+            </a:pPr>
+            <a:r>
+              <a:t>reports/validation/headline.csv; reports/stuff_v2/skill.csv; reports/stuff_v2/pitcher_level.csv.</a:t>
+            </a:r>
+          </a:p>
+        </p:txBody>
+      </p:sp>
+      <p:sp>
+        <p:nvSpPr>
           <p:cNvPr id="10" name="TextBox 9"/>
           <p:cNvSpPr txBox="1"/>
           <p:nvPr/>
         </p:nvSpPr>
         <p:spPr>
           <a:xfrm>
-            <a:off x="7137400" y="1790700"/>
-            <a:ext cx="1498600" cy="331216"/>
-          </a:xfrm>
-          <a:prstGeom prst="rect">
-            <a:avLst/>
-          </a:prstGeom>
-          <a:noFill/>
-        </p:spPr>
-        <p:txBody>
-          <a:bodyPr wrap="none" lIns="0" rIns="0" tIns="0" bIns="0" anchor="t">
-            <a:spAutoFit/>
-          </a:bodyPr>
-          <a:lstStyle/>
-          <a:p>
-            <a:pPr>
-              <a:defRPr sz="1700" b="1">
-                <a:solidFill>
-                  <a:srgbClr val="202124"/>
-                </a:solidFill>
-                <a:latin typeface="Arial"/>
-              </a:defRPr>
-            </a:pPr>
-            <a:r>
-              <a:t>3.88 %</a:t>
-            </a:r>
-          </a:p>
-        </p:txBody>
-      </p:sp>
-      <p:sp>
-        <p:nvSpPr>
-          <p:cNvPr id="11" name="TextBox 10"/>
-          <p:cNvSpPr txBox="1"/>
-          <p:nvPr/>
-        </p:nvSpPr>
-        <p:spPr>
-          <a:xfrm>
-            <a:off x="508000" y="2400300"/>
-            <a:ext cx="2095500" cy="299720"/>
-          </a:xfrm>
-          <a:prstGeom prst="rect">
-            <a:avLst/>
-          </a:prstGeom>
-          <a:noFill/>
-        </p:spPr>
-        <p:txBody>
-          <a:bodyPr wrap="none" lIns="0" rIns="0" tIns="0" bIns="0" anchor="t">
-            <a:spAutoFit/>
-          </a:bodyPr>
-          <a:lstStyle/>
-          <a:p>
-            <a:pPr>
-              <a:defRPr sz="1500" b="0">
-                <a:solidFill>
-                  <a:srgbClr val="202124"/>
-                </a:solidFill>
-                <a:latin typeface="Arial"/>
-              </a:defRPr>
-            </a:pPr>
-            <a:r>
-              <a:t>Stuff+ v2</a:t>
-            </a:r>
-          </a:p>
-        </p:txBody>
-      </p:sp>
-      <p:sp>
-        <p:nvSpPr>
-          <p:cNvPr id="12" name="Rectangle 11"/>
+            <a:off x="508000" y="1498600"/>
+            <a:ext cx="2095500" cy="283972"/>
+          </a:xfrm>
+          <a:prstGeom prst="rect">
+            <a:avLst/>
+          </a:prstGeom>
+          <a:noFill/>
+        </p:spPr>
+        <p:txBody>
+          <a:bodyPr wrap="none" lIns="0" rIns="0" tIns="0" bIns="0" anchor="t">
+            <a:spAutoFit/>
+          </a:bodyPr>
+          <a:lstStyle/>
+          <a:p>
+            <a:pPr>
+              <a:defRPr sz="1400" b="0">
+                <a:solidFill>
+                  <a:srgbClr val="F4F4F5"/>
+                </a:solidFill>
+                <a:latin typeface="Arial"/>
+              </a:defRPr>
+            </a:pPr>
+            <a:r>
+              <a:t>Pitching+</a:t>
+            </a:r>
+          </a:p>
+        </p:txBody>
+      </p:sp>
+      <p:sp>
+        <p:nvSpPr>
+          <p:cNvPr id="11" name="Rounded Rectangle 10"/>
           <p:cNvSpPr/>
           <p:nvPr/>
         </p:nvSpPr>
         <p:spPr>
           <a:xfrm>
-            <a:off x="2730500" y="2451100"/>
-            <a:ext cx="153161" cy="228600"/>
-          </a:xfrm>
-          <a:prstGeom prst="rect">
-            <a:avLst/>
+            <a:off x="2730500" y="1524000"/>
+            <a:ext cx="4254500" cy="228600"/>
+          </a:xfrm>
+          <a:prstGeom prst="roundRect">
+            <a:avLst>
+              <a:gd name="adj" fmla="val 16666"/>
+            </a:avLst>
+          </a:prstGeom>
+          <a:solidFill>
+            <a:srgbClr val="1F2125"/>
+          </a:solidFill>
+          <a:ln>
+            <a:noFill/>
+          </a:ln>
+        </p:spPr>
+        <p:txBody>
+          <a:bodyPr rtlCol="0" anchor="ctr"/>
+          <a:lstStyle/>
+          <a:p>
+            <a:pPr algn="ctr"/>
+          </a:p>
+        </p:txBody>
+      </p:sp>
+      <p:sp>
+        <p:nvSpPr>
+          <p:cNvPr id="12" name="Rounded Rectangle 11"/>
+          <p:cNvSpPr/>
+          <p:nvPr/>
+        </p:nvSpPr>
+        <p:spPr>
+          <a:xfrm>
+            <a:off x="2730500" y="1524000"/>
+            <a:ext cx="3301491" cy="228600"/>
+          </a:xfrm>
+          <a:prstGeom prst="roundRect">
+            <a:avLst>
+              <a:gd name="adj" fmla="val 16666"/>
+            </a:avLst>
           </a:prstGeom>
           <a:solidFill>
             <a:srgbClr val="D71920"/>
@@ -6716,24 +7344,158 @@
         </p:nvSpPr>
         <p:spPr>
           <a:xfrm>
-            <a:off x="7137400" y="2387600"/>
-            <a:ext cx="1498600" cy="331216"/>
-          </a:xfrm>
-          <a:prstGeom prst="rect">
-            <a:avLst/>
-          </a:prstGeom>
-          <a:noFill/>
-        </p:spPr>
-        <p:txBody>
-          <a:bodyPr wrap="none" lIns="0" rIns="0" tIns="0" bIns="0" anchor="t">
-            <a:spAutoFit/>
-          </a:bodyPr>
-          <a:lstStyle/>
-          <a:p>
-            <a:pPr>
-              <a:defRPr sz="1700" b="1">
-                <a:solidFill>
-                  <a:srgbClr val="202124"/>
+            <a:off x="7162800" y="1498600"/>
+            <a:ext cx="1473200" cy="315468"/>
+          </a:xfrm>
+          <a:prstGeom prst="rect">
+            <a:avLst/>
+          </a:prstGeom>
+          <a:noFill/>
+        </p:spPr>
+        <p:txBody>
+          <a:bodyPr wrap="none" lIns="0" rIns="0" tIns="0" bIns="0" anchor="t">
+            <a:spAutoFit/>
+          </a:bodyPr>
+          <a:lstStyle/>
+          <a:p>
+            <a:pPr>
+              <a:defRPr sz="1600" b="1">
+                <a:solidFill>
+                  <a:srgbClr val="F4F4F5"/>
+                </a:solidFill>
+                <a:latin typeface="Arial"/>
+              </a:defRPr>
+            </a:pPr>
+            <a:r>
+              <a:t>3.88 %</a:t>
+            </a:r>
+          </a:p>
+        </p:txBody>
+      </p:sp>
+      <p:sp>
+        <p:nvSpPr>
+          <p:cNvPr id="14" name="TextBox 13"/>
+          <p:cNvSpPr txBox="1"/>
+          <p:nvPr/>
+        </p:nvSpPr>
+        <p:spPr>
+          <a:xfrm>
+            <a:off x="508000" y="1905000"/>
+            <a:ext cx="2095500" cy="283972"/>
+          </a:xfrm>
+          <a:prstGeom prst="rect">
+            <a:avLst/>
+          </a:prstGeom>
+          <a:noFill/>
+        </p:spPr>
+        <p:txBody>
+          <a:bodyPr wrap="none" lIns="0" rIns="0" tIns="0" bIns="0" anchor="t">
+            <a:spAutoFit/>
+          </a:bodyPr>
+          <a:lstStyle/>
+          <a:p>
+            <a:pPr>
+              <a:defRPr sz="1400" b="0">
+                <a:solidFill>
+                  <a:srgbClr val="F4F4F5"/>
+                </a:solidFill>
+                <a:latin typeface="Arial"/>
+              </a:defRPr>
+            </a:pPr>
+            <a:r>
+              <a:t>Stuff+ v2</a:t>
+            </a:r>
+          </a:p>
+        </p:txBody>
+      </p:sp>
+      <p:sp>
+        <p:nvSpPr>
+          <p:cNvPr id="15" name="Rounded Rectangle 14"/>
+          <p:cNvSpPr/>
+          <p:nvPr/>
+        </p:nvSpPr>
+        <p:spPr>
+          <a:xfrm>
+            <a:off x="2730500" y="1930400"/>
+            <a:ext cx="4254500" cy="228600"/>
+          </a:xfrm>
+          <a:prstGeom prst="roundRect">
+            <a:avLst>
+              <a:gd name="adj" fmla="val 16666"/>
+            </a:avLst>
+          </a:prstGeom>
+          <a:solidFill>
+            <a:srgbClr val="1F2125"/>
+          </a:solidFill>
+          <a:ln>
+            <a:noFill/>
+          </a:ln>
+        </p:spPr>
+        <p:txBody>
+          <a:bodyPr rtlCol="0" anchor="ctr"/>
+          <a:lstStyle/>
+          <a:p>
+            <a:pPr algn="ctr"/>
+          </a:p>
+        </p:txBody>
+      </p:sp>
+      <p:sp>
+        <p:nvSpPr>
+          <p:cNvPr id="16" name="Rounded Rectangle 15"/>
+          <p:cNvSpPr/>
+          <p:nvPr/>
+        </p:nvSpPr>
+        <p:spPr>
+          <a:xfrm>
+            <a:off x="2730500" y="1930400"/>
+            <a:ext cx="153161" cy="228600"/>
+          </a:xfrm>
+          <a:prstGeom prst="roundRect">
+            <a:avLst>
+              <a:gd name="adj" fmla="val 24875"/>
+            </a:avLst>
+          </a:prstGeom>
+          <a:solidFill>
+            <a:srgbClr val="D71920"/>
+          </a:solidFill>
+          <a:ln>
+            <a:noFill/>
+          </a:ln>
+        </p:spPr>
+        <p:txBody>
+          <a:bodyPr rtlCol="0" anchor="ctr"/>
+          <a:lstStyle/>
+          <a:p>
+            <a:pPr algn="ctr"/>
+          </a:p>
+        </p:txBody>
+      </p:sp>
+      <p:sp>
+        <p:nvSpPr>
+          <p:cNvPr id="17" name="TextBox 16"/>
+          <p:cNvSpPr txBox="1"/>
+          <p:nvPr/>
+        </p:nvSpPr>
+        <p:spPr>
+          <a:xfrm>
+            <a:off x="7162800" y="1905000"/>
+            <a:ext cx="1473200" cy="315468"/>
+          </a:xfrm>
+          <a:prstGeom prst="rect">
+            <a:avLst/>
+          </a:prstGeom>
+          <a:noFill/>
+        </p:spPr>
+        <p:txBody>
+          <a:bodyPr wrap="none" lIns="0" rIns="0" tIns="0" bIns="0" anchor="t">
+            <a:spAutoFit/>
+          </a:bodyPr>
+          <a:lstStyle/>
+          <a:p>
+            <a:pPr>
+              <a:defRPr sz="1600" b="1">
+                <a:solidFill>
+                  <a:srgbClr val="F4F4F5"/>
                 </a:solidFill>
                 <a:latin typeface="Arial"/>
               </a:defRPr>
@@ -6746,30 +7508,30 @@
       </p:sp>
       <p:sp>
         <p:nvSpPr>
-          <p:cNvPr id="14" name="TextBox 13"/>
-          <p:cNvSpPr txBox="1"/>
-          <p:nvPr/>
-        </p:nvSpPr>
-        <p:spPr>
-          <a:xfrm>
-            <a:off x="508000" y="2844800"/>
-            <a:ext cx="8128000" cy="268224"/>
-          </a:xfrm>
-          <a:prstGeom prst="rect">
-            <a:avLst/>
-          </a:prstGeom>
-          <a:noFill/>
-        </p:spPr>
-        <p:txBody>
-          <a:bodyPr wrap="none" lIns="0" rIns="0" tIns="0" bIns="0" anchor="t">
-            <a:spAutoFit/>
-          </a:bodyPr>
-          <a:lstStyle/>
-          <a:p>
-            <a:pPr>
-              <a:defRPr sz="1300" b="0">
-                <a:solidFill>
-                  <a:srgbClr val="585B60"/>
+          <p:cNvPr id="18" name="TextBox 17"/>
+          <p:cNvSpPr txBox="1"/>
+          <p:nvPr/>
+        </p:nvSpPr>
+        <p:spPr>
+          <a:xfrm>
+            <a:off x="508000" y="2311400"/>
+            <a:ext cx="8128000" cy="236728"/>
+          </a:xfrm>
+          <a:prstGeom prst="rect">
+            <a:avLst/>
+          </a:prstGeom>
+          <a:noFill/>
+        </p:spPr>
+        <p:txBody>
+          <a:bodyPr wrap="none" lIns="0" rIns="0" tIns="0" bIns="0" anchor="t">
+            <a:spAutoFit/>
+          </a:bodyPr>
+          <a:lstStyle/>
+          <a:p>
+            <a:pPr>
+              <a:defRPr sz="1100" b="0">
+                <a:solidFill>
+                  <a:srgbClr val="9EA1A7"/>
                 </a:solidFill>
                 <a:latin typeface="Arial"/>
               </a:defRPr>
@@ -6782,28 +7544,59 @@
       </p:sp>
       <p:sp>
         <p:nvSpPr>
-          <p:cNvPr id="15" name="TextBox 14"/>
-          <p:cNvSpPr txBox="1"/>
-          <p:nvPr/>
-        </p:nvSpPr>
-        <p:spPr>
-          <a:xfrm>
-            <a:off x="508000" y="3124200"/>
-            <a:ext cx="3810000" cy="567436"/>
-          </a:xfrm>
-          <a:prstGeom prst="rect">
-            <a:avLst/>
-          </a:prstGeom>
-          <a:noFill/>
-        </p:spPr>
-        <p:txBody>
-          <a:bodyPr wrap="none" lIns="0" rIns="0" tIns="0" bIns="0" anchor="t">
-            <a:spAutoFit/>
-          </a:bodyPr>
-          <a:lstStyle/>
-          <a:p>
-            <a:pPr>
-              <a:defRPr sz="3200" b="1">
+          <p:cNvPr id="19" name="Rounded Rectangle 18"/>
+          <p:cNvSpPr/>
+          <p:nvPr/>
+        </p:nvSpPr>
+        <p:spPr>
+          <a:xfrm>
+            <a:off x="508000" y="2667000"/>
+            <a:ext cx="4013200" cy="1524000"/>
+          </a:xfrm>
+          <a:prstGeom prst="roundRect">
+            <a:avLst>
+              <a:gd name="adj" fmla="val 5000"/>
+            </a:avLst>
+          </a:prstGeom>
+          <a:solidFill>
+            <a:srgbClr val="1F2125"/>
+          </a:solidFill>
+          <a:ln>
+            <a:noFill/>
+          </a:ln>
+        </p:spPr>
+        <p:txBody>
+          <a:bodyPr rtlCol="0" anchor="ctr"/>
+          <a:lstStyle/>
+          <a:p>
+            <a:pPr algn="ctr"/>
+          </a:p>
+        </p:txBody>
+      </p:sp>
+      <p:sp>
+        <p:nvSpPr>
+          <p:cNvPr id="20" name="TextBox 19"/>
+          <p:cNvSpPr txBox="1"/>
+          <p:nvPr/>
+        </p:nvSpPr>
+        <p:spPr>
+          <a:xfrm>
+            <a:off x="711200" y="2844800"/>
+            <a:ext cx="3606800" cy="598932"/>
+          </a:xfrm>
+          <a:prstGeom prst="rect">
+            <a:avLst/>
+          </a:prstGeom>
+          <a:noFill/>
+        </p:spPr>
+        <p:txBody>
+          <a:bodyPr wrap="none" lIns="0" rIns="0" tIns="0" bIns="0" anchor="t">
+            <a:spAutoFit/>
+          </a:bodyPr>
+          <a:lstStyle/>
+          <a:p>
+            <a:pPr>
+              <a:defRPr sz="3400" b="1">
                 <a:solidFill>
                   <a:srgbClr val="D71920"/>
                 </a:solidFill>
@@ -6818,14 +7611,14 @@
       </p:sp>
       <p:sp>
         <p:nvSpPr>
-          <p:cNvPr id="16" name="TextBox 15"/>
-          <p:cNvSpPr txBox="1"/>
-          <p:nvPr/>
-        </p:nvSpPr>
-        <p:spPr>
-          <a:xfrm>
-            <a:off x="508000" y="3632200"/>
-            <a:ext cx="4064000" cy="252476"/>
+          <p:cNvPr id="21" name="TextBox 20"/>
+          <p:cNvSpPr txBox="1"/>
+          <p:nvPr/>
+        </p:nvSpPr>
+        <p:spPr>
+          <a:xfrm>
+            <a:off x="711200" y="3442970"/>
+            <a:ext cx="3606800" cy="261620"/>
           </a:xfrm>
           <a:prstGeom prst="rect">
             <a:avLst/>
@@ -6841,7 +7634,7 @@
             <a:pPr>
               <a:defRPr sz="1200" b="0">
                 <a:solidFill>
-                  <a:srgbClr val="202124"/>
+                  <a:srgbClr val="F4F4F5"/>
                 </a:solidFill>
                 <a:latin typeface="Arial"/>
               </a:defRPr>
@@ -6854,14 +7647,14 @@
       </p:sp>
       <p:sp>
         <p:nvSpPr>
-          <p:cNvPr id="17" name="TextBox 16"/>
-          <p:cNvSpPr txBox="1"/>
-          <p:nvPr/>
-        </p:nvSpPr>
-        <p:spPr>
-          <a:xfrm>
-            <a:off x="508000" y="3821176"/>
-            <a:ext cx="4064000" cy="252476"/>
+          <p:cNvPr id="22" name="TextBox 21"/>
+          <p:cNvSpPr txBox="1"/>
+          <p:nvPr/>
+        </p:nvSpPr>
+        <p:spPr>
+          <a:xfrm>
+            <a:off x="711200" y="3641090"/>
+            <a:ext cx="3606800" cy="261620"/>
           </a:xfrm>
           <a:prstGeom prst="rect">
             <a:avLst/>
@@ -6877,7 +7670,7 @@
             <a:pPr>
               <a:defRPr sz="1200" b="0">
                 <a:solidFill>
-                  <a:srgbClr val="202124"/>
+                  <a:srgbClr val="F4F4F5"/>
                 </a:solidFill>
                 <a:latin typeface="Arial"/>
               </a:defRPr>
@@ -6890,30 +7683,61 @@
       </p:sp>
       <p:sp>
         <p:nvSpPr>
-          <p:cNvPr id="18" name="TextBox 17"/>
-          <p:cNvSpPr txBox="1"/>
-          <p:nvPr/>
-        </p:nvSpPr>
-        <p:spPr>
-          <a:xfrm>
-            <a:off x="4826000" y="3124200"/>
-            <a:ext cx="3810000" cy="567436"/>
-          </a:xfrm>
-          <a:prstGeom prst="rect">
-            <a:avLst/>
-          </a:prstGeom>
-          <a:noFill/>
-        </p:spPr>
-        <p:txBody>
-          <a:bodyPr wrap="none" lIns="0" rIns="0" tIns="0" bIns="0" anchor="t">
-            <a:spAutoFit/>
-          </a:bodyPr>
-          <a:lstStyle/>
-          <a:p>
-            <a:pPr>
-              <a:defRPr sz="3200" b="1">
-                <a:solidFill>
-                  <a:srgbClr val="585B60"/>
+          <p:cNvPr id="23" name="Rounded Rectangle 22"/>
+          <p:cNvSpPr/>
+          <p:nvPr/>
+        </p:nvSpPr>
+        <p:spPr>
+          <a:xfrm>
+            <a:off x="4622800" y="2667000"/>
+            <a:ext cx="4013200" cy="1524000"/>
+          </a:xfrm>
+          <a:prstGeom prst="roundRect">
+            <a:avLst>
+              <a:gd name="adj" fmla="val 5000"/>
+            </a:avLst>
+          </a:prstGeom>
+          <a:solidFill>
+            <a:srgbClr val="1F2125"/>
+          </a:solidFill>
+          <a:ln>
+            <a:noFill/>
+          </a:ln>
+        </p:spPr>
+        <p:txBody>
+          <a:bodyPr rtlCol="0" anchor="ctr"/>
+          <a:lstStyle/>
+          <a:p>
+            <a:pPr algn="ctr"/>
+          </a:p>
+        </p:txBody>
+      </p:sp>
+      <p:sp>
+        <p:nvSpPr>
+          <p:cNvPr id="24" name="TextBox 23"/>
+          <p:cNvSpPr txBox="1"/>
+          <p:nvPr/>
+        </p:nvSpPr>
+        <p:spPr>
+          <a:xfrm>
+            <a:off x="4826000" y="2844800"/>
+            <a:ext cx="3606800" cy="598932"/>
+          </a:xfrm>
+          <a:prstGeom prst="rect">
+            <a:avLst/>
+          </a:prstGeom>
+          <a:noFill/>
+        </p:spPr>
+        <p:txBody>
+          <a:bodyPr wrap="none" lIns="0" rIns="0" tIns="0" bIns="0" anchor="t">
+            <a:spAutoFit/>
+          </a:bodyPr>
+          <a:lstStyle/>
+          <a:p>
+            <a:pPr>
+              <a:defRPr sz="3400" b="1">
+                <a:solidFill>
+                  <a:srgbClr val="9EA1A7"/>
                 </a:solidFill>
                 <a:latin typeface="Arial"/>
               </a:defRPr>
@@ -6926,14 +7750,14 @@
       </p:sp>
       <p:sp>
         <p:nvSpPr>
-          <p:cNvPr id="19" name="TextBox 18"/>
-          <p:cNvSpPr txBox="1"/>
-          <p:nvPr/>
-        </p:nvSpPr>
-        <p:spPr>
-          <a:xfrm>
-            <a:off x="4826000" y="3632200"/>
-            <a:ext cx="3810000" cy="252476"/>
+          <p:cNvPr id="25" name="TextBox 24"/>
+          <p:cNvSpPr txBox="1"/>
+          <p:nvPr/>
+        </p:nvSpPr>
+        <p:spPr>
+          <a:xfrm>
+            <a:off x="4826000" y="3442970"/>
+            <a:ext cx="3606800" cy="261620"/>
           </a:xfrm>
           <a:prstGeom prst="rect">
             <a:avLst/>
@@ -6949,7 +7773,7 @@
             <a:pPr>
               <a:defRPr sz="1200" b="0">
                 <a:solidFill>
-                  <a:srgbClr val="202124"/>
+                  <a:srgbClr val="F4F4F5"/>
                 </a:solidFill>
                 <a:latin typeface="Arial"/>
               </a:defRPr>
@@ -6962,14 +7786,14 @@
       </p:sp>
       <p:sp>
         <p:nvSpPr>
-          <p:cNvPr id="20" name="TextBox 19"/>
-          <p:cNvSpPr txBox="1"/>
-          <p:nvPr/>
-        </p:nvSpPr>
-        <p:spPr>
-          <a:xfrm>
-            <a:off x="4826000" y="3821176"/>
-            <a:ext cx="3810000" cy="252476"/>
+          <p:cNvPr id="26" name="TextBox 25"/>
+          <p:cNvSpPr txBox="1"/>
+          <p:nvPr/>
+        </p:nvSpPr>
+        <p:spPr>
+          <a:xfrm>
+            <a:off x="4826000" y="3641090"/>
+            <a:ext cx="3606800" cy="261620"/>
           </a:xfrm>
           <a:prstGeom prst="rect">
             <a:avLst/>
@@ -6985,7 +7809,7 @@
             <a:pPr>
               <a:defRPr sz="1200" b="0">
                 <a:solidFill>
-                  <a:srgbClr val="202124"/>
+                  <a:srgbClr val="F4F4F5"/>
                 </a:solidFill>
                 <a:latin typeface="Arial"/>
               </a:defRPr>
@@ -7029,7 +7853,7 @@
             <a:avLst/>
           </a:prstGeom>
           <a:solidFill>
-            <a:srgbClr val="FFFFFF"/>
+            <a:srgbClr val="121316"/>
           </a:solidFill>
           <a:ln>
             <a:noFill/>
@@ -7051,8 +7875,8 @@
         </p:nvSpPr>
         <p:spPr>
           <a:xfrm>
-            <a:off x="508000" y="292100"/>
-            <a:ext cx="533400" cy="50800"/>
+            <a:off x="0" y="0"/>
+            <a:ext cx="76200" cy="5143500"/>
           </a:xfrm>
           <a:prstGeom prst="rect">
             <a:avLst/>
@@ -7074,295 +7898,14 @@
       </p:sp>
       <p:sp>
         <p:nvSpPr>
-          <p:cNvPr id="4" name="TextBox 3"/>
-          <p:cNvSpPr txBox="1"/>
-          <p:nvPr/>
-        </p:nvSpPr>
-        <p:spPr>
-          <a:xfrm>
-            <a:off x="1206500" y="203200"/>
-            <a:ext cx="7239000" cy="220979"/>
-          </a:xfrm>
-          <a:prstGeom prst="rect">
-            <a:avLst/>
-          </a:prstGeom>
-          <a:noFill/>
-        </p:spPr>
-        <p:txBody>
-          <a:bodyPr wrap="none" lIns="0" rIns="0" tIns="0" bIns="0" anchor="t">
-            <a:spAutoFit/>
-          </a:bodyPr>
-          <a:lstStyle/>
-          <a:p>
-            <a:pPr>
-              <a:defRPr sz="1000" b="0">
-                <a:solidFill>
-                  <a:srgbClr val="585B60"/>
-                </a:solidFill>
-                <a:latin typeface="Arial"/>
-              </a:defRPr>
-            </a:pPr>
-            <a:r>
-              <a:t>STUFF+ 2240 / DIABLOS ROJOS</a:t>
-            </a:r>
-          </a:p>
-        </p:txBody>
-      </p:sp>
-      <p:sp>
-        <p:nvSpPr>
-          <p:cNvPr id="5" name="TextBox 4"/>
-          <p:cNvSpPr txBox="1"/>
-          <p:nvPr/>
-        </p:nvSpPr>
-        <p:spPr>
-          <a:xfrm>
-            <a:off x="508000" y="647700"/>
-            <a:ext cx="8128000" cy="457200"/>
-          </a:xfrm>
-          <a:prstGeom prst="rect">
-            <a:avLst/>
-          </a:prstGeom>
-          <a:noFill/>
-        </p:spPr>
-        <p:txBody>
-          <a:bodyPr wrap="none" lIns="0" rIns="0" tIns="0" bIns="0" anchor="t">
-            <a:spAutoFit/>
-          </a:bodyPr>
-          <a:lstStyle/>
-          <a:p>
-            <a:pPr>
-              <a:defRPr sz="2600" b="1">
-                <a:solidFill>
-                  <a:srgbClr val="202124"/>
-                </a:solidFill>
-                <a:latin typeface="Arial"/>
-              </a:defRPr>
-            </a:pPr>
-            <a:r>
-              <a:t>La física corrige el sesgo de altitud</a:t>
-            </a:r>
-          </a:p>
-        </p:txBody>
-      </p:sp>
-      <p:sp>
-        <p:nvSpPr>
-          <p:cNvPr id="6" name="TextBox 5"/>
-          <p:cNvSpPr txBox="1"/>
-          <p:nvPr/>
-        </p:nvSpPr>
-        <p:spPr>
-          <a:xfrm>
-            <a:off x="508000" y="4495800"/>
-            <a:ext cx="7620000" cy="196850"/>
-          </a:xfrm>
-          <a:prstGeom prst="rect">
-            <a:avLst/>
-          </a:prstGeom>
-          <a:noFill/>
-        </p:spPr>
-        <p:txBody>
-          <a:bodyPr wrap="none" lIns="0" rIns="0" tIns="0" bIns="0" anchor="t">
-            <a:spAutoFit/>
-          </a:bodyPr>
-          <a:lstStyle/>
-          <a:p>
-            <a:pPr>
-              <a:defRPr sz="800" b="0">
-                <a:solidFill>
-                  <a:srgbClr val="585B60"/>
-                </a:solidFill>
-                <a:latin typeface="Arial"/>
-              </a:defRPr>
-            </a:pPr>
-            <a:r>
-              <a:t>reports/stuff_v2/altitude_bias.csv · entrenado sin altitud extrema, evaluado en ella.</a:t>
-            </a:r>
-          </a:p>
-        </p:txBody>
-      </p:sp>
-      <p:sp>
-        <p:nvSpPr>
-          <p:cNvPr id="7" name="TextBox 6"/>
-          <p:cNvSpPr txBox="1"/>
-          <p:nvPr/>
-        </p:nvSpPr>
-        <p:spPr>
-          <a:xfrm>
-            <a:off x="8255000" y="4813300"/>
-            <a:ext cx="381000" cy="220979"/>
-          </a:xfrm>
-          <a:prstGeom prst="rect">
-            <a:avLst/>
-          </a:prstGeom>
-          <a:noFill/>
-        </p:spPr>
-        <p:txBody>
-          <a:bodyPr wrap="none" lIns="0" rIns="0" tIns="0" bIns="0" anchor="t">
-            <a:spAutoFit/>
-          </a:bodyPr>
-          <a:lstStyle/>
-          <a:p>
-            <a:pPr>
-              <a:defRPr sz="1000" b="0">
-                <a:solidFill>
-                  <a:srgbClr val="585B60"/>
-                </a:solidFill>
-                <a:latin typeface="Arial"/>
-              </a:defRPr>
-            </a:pPr>
-            <a:r>
-              <a:t>05</a:t>
-            </a:r>
-          </a:p>
-        </p:txBody>
-      </p:sp>
-      <p:sp>
-        <p:nvSpPr>
-          <p:cNvPr id="8" name="TextBox 7"/>
-          <p:cNvSpPr txBox="1"/>
-          <p:nvPr/>
-        </p:nvSpPr>
-        <p:spPr>
-          <a:xfrm>
-            <a:off x="508000" y="1803400"/>
-            <a:ext cx="2095500" cy="299720"/>
-          </a:xfrm>
-          <a:prstGeom prst="rect">
-            <a:avLst/>
-          </a:prstGeom>
-          <a:noFill/>
-        </p:spPr>
-        <p:txBody>
-          <a:bodyPr wrap="none" lIns="0" rIns="0" tIns="0" bIns="0" anchor="t">
-            <a:spAutoFit/>
-          </a:bodyPr>
-          <a:lstStyle/>
-          <a:p>
-            <a:pPr>
-              <a:defRPr sz="1500" b="0">
-                <a:solidFill>
-                  <a:srgbClr val="202124"/>
-                </a:solidFill>
-                <a:latin typeface="Arial"/>
-              </a:defRPr>
-            </a:pPr>
-            <a:r>
-              <a:t>Nulo (conteo)</a:t>
-            </a:r>
-          </a:p>
-        </p:txBody>
-      </p:sp>
-      <p:sp>
-        <p:nvSpPr>
-          <p:cNvPr id="9" name="Rectangle 8"/>
+          <p:cNvPr id="4" name="Rectangle 3"/>
           <p:cNvSpPr/>
           <p:nvPr/>
         </p:nvSpPr>
         <p:spPr>
           <a:xfrm>
-            <a:off x="2730500" y="1854200"/>
-            <a:ext cx="3829050" cy="228600"/>
-          </a:xfrm>
-          <a:prstGeom prst="rect">
-            <a:avLst/>
-          </a:prstGeom>
-          <a:solidFill>
-            <a:srgbClr val="585B60"/>
-          </a:solidFill>
-          <a:ln>
-            <a:noFill/>
-          </a:ln>
-        </p:spPr>
-        <p:txBody>
-          <a:bodyPr rtlCol="0" anchor="ctr"/>
-          <a:lstStyle/>
-          <a:p>
-            <a:pPr algn="ctr"/>
-          </a:p>
-        </p:txBody>
-      </p:sp>
-      <p:sp>
-        <p:nvSpPr>
-          <p:cNvPr id="10" name="TextBox 9"/>
-          <p:cNvSpPr txBox="1"/>
-          <p:nvPr/>
-        </p:nvSpPr>
-        <p:spPr>
-          <a:xfrm>
-            <a:off x="7137400" y="1790700"/>
-            <a:ext cx="1498600" cy="331216"/>
-          </a:xfrm>
-          <a:prstGeom prst="rect">
-            <a:avLst/>
-          </a:prstGeom>
-          <a:noFill/>
-        </p:spPr>
-        <p:txBody>
-          <a:bodyPr wrap="none" lIns="0" rIns="0" tIns="0" bIns="0" anchor="t">
-            <a:spAutoFit/>
-          </a:bodyPr>
-          <a:lstStyle/>
-          <a:p>
-            <a:pPr>
-              <a:defRPr sz="1700" b="1">
-                <a:solidFill>
-                  <a:srgbClr val="202124"/>
-                </a:solidFill>
-                <a:latin typeface="Arial"/>
-              </a:defRPr>
-            </a:pPr>
-            <a:r>
-              <a:t>+0.0108</a:t>
-            </a:r>
-          </a:p>
-        </p:txBody>
-      </p:sp>
-      <p:sp>
-        <p:nvSpPr>
-          <p:cNvPr id="11" name="TextBox 10"/>
-          <p:cNvSpPr txBox="1"/>
-          <p:nvPr/>
-        </p:nvSpPr>
-        <p:spPr>
-          <a:xfrm>
-            <a:off x="508000" y="2400300"/>
-            <a:ext cx="2095500" cy="299720"/>
-          </a:xfrm>
-          <a:prstGeom prst="rect">
-            <a:avLst/>
-          </a:prstGeom>
-          <a:noFill/>
-        </p:spPr>
-        <p:txBody>
-          <a:bodyPr wrap="none" lIns="0" rIns="0" tIns="0" bIns="0" anchor="t">
-            <a:spAutoFit/>
-          </a:bodyPr>
-          <a:lstStyle/>
-          <a:p>
-            <a:pPr>
-              <a:defRPr sz="1500" b="0">
-                <a:solidFill>
-                  <a:srgbClr val="202124"/>
-                </a:solidFill>
-                <a:latin typeface="Arial"/>
-              </a:defRPr>
-            </a:pPr>
-            <a:r>
-              <a:t>Stuff+ v1</a:t>
-            </a:r>
-          </a:p>
-        </p:txBody>
-      </p:sp>
-      <p:sp>
-        <p:nvSpPr>
-          <p:cNvPr id="12" name="Rectangle 11"/>
-          <p:cNvSpPr/>
-          <p:nvPr/>
-        </p:nvSpPr>
-        <p:spPr>
-          <a:xfrm>
-            <a:off x="2730500" y="2451100"/>
-            <a:ext cx="886354" cy="228600"/>
+            <a:off x="508000" y="304800"/>
+            <a:ext cx="101600" cy="101600"/>
           </a:xfrm>
           <a:prstGeom prst="rect">
             <a:avLst/>
@@ -7384,36 +7927,307 @@
       </p:sp>
       <p:sp>
         <p:nvSpPr>
+          <p:cNvPr id="5" name="TextBox 4"/>
+          <p:cNvSpPr txBox="1"/>
+          <p:nvPr/>
+        </p:nvSpPr>
+        <p:spPr>
+          <a:xfrm>
+            <a:off x="711200" y="241300"/>
+            <a:ext cx="6096000" cy="205232"/>
+          </a:xfrm>
+          <a:prstGeom prst="rect">
+            <a:avLst/>
+          </a:prstGeom>
+          <a:noFill/>
+        </p:spPr>
+        <p:txBody>
+          <a:bodyPr wrap="none" lIns="0" rIns="0" tIns="0" bIns="0" anchor="t">
+            <a:spAutoFit/>
+          </a:bodyPr>
+          <a:lstStyle/>
+          <a:p>
+            <a:pPr>
+              <a:defRPr sz="900" b="1">
+                <a:solidFill>
+                  <a:srgbClr val="9EA1A7"/>
+                </a:solidFill>
+                <a:latin typeface="Arial"/>
+              </a:defRPr>
+            </a:pPr>
+            <a:r>
+              <a:t>STUFF+ 2240 / DIABLOS ROJOS</a:t>
+            </a:r>
+          </a:p>
+        </p:txBody>
+      </p:sp>
+      <p:sp>
+        <p:nvSpPr>
+          <p:cNvPr id="6" name="TextBox 5"/>
+          <p:cNvSpPr txBox="1"/>
+          <p:nvPr/>
+        </p:nvSpPr>
+        <p:spPr>
+          <a:xfrm>
+            <a:off x="8331200" y="241300"/>
+            <a:ext cx="381000" cy="236728"/>
+          </a:xfrm>
+          <a:prstGeom prst="rect">
+            <a:avLst/>
+          </a:prstGeom>
+          <a:noFill/>
+        </p:spPr>
+        <p:txBody>
+          <a:bodyPr wrap="none" lIns="0" rIns="0" tIns="0" bIns="0" anchor="t">
+            <a:spAutoFit/>
+          </a:bodyPr>
+          <a:lstStyle/>
+          <a:p>
+            <a:pPr>
+              <a:defRPr sz="1100" b="1">
+                <a:solidFill>
+                  <a:srgbClr val="D71920"/>
+                </a:solidFill>
+                <a:latin typeface="Arial"/>
+              </a:defRPr>
+            </a:pPr>
+            <a:r>
+              <a:t>05</a:t>
+            </a:r>
+          </a:p>
+        </p:txBody>
+      </p:sp>
+      <p:sp>
+        <p:nvSpPr>
+          <p:cNvPr id="7" name="TextBox 6"/>
+          <p:cNvSpPr txBox="1"/>
+          <p:nvPr/>
+        </p:nvSpPr>
+        <p:spPr>
+          <a:xfrm>
+            <a:off x="508000" y="584200"/>
+            <a:ext cx="8128000" cy="444500"/>
+          </a:xfrm>
+          <a:prstGeom prst="rect">
+            <a:avLst/>
+          </a:prstGeom>
+          <a:noFill/>
+        </p:spPr>
+        <p:txBody>
+          <a:bodyPr wrap="none" lIns="0" rIns="0" tIns="0" bIns="0" anchor="t">
+            <a:spAutoFit/>
+          </a:bodyPr>
+          <a:lstStyle/>
+          <a:p>
+            <a:pPr>
+              <a:defRPr sz="2500" b="1">
+                <a:solidFill>
+                  <a:srgbClr val="F4F4F5"/>
+                </a:solidFill>
+                <a:latin typeface="Arial"/>
+              </a:defRPr>
+            </a:pPr>
+            <a:r>
+              <a:t>La física corrige el sesgo de altitud</a:t>
+            </a:r>
+          </a:p>
+        </p:txBody>
+      </p:sp>
+      <p:sp>
+        <p:nvSpPr>
+          <p:cNvPr id="8" name="Rectangle 7"/>
+          <p:cNvSpPr/>
+          <p:nvPr/>
+        </p:nvSpPr>
+        <p:spPr>
+          <a:xfrm>
+            <a:off x="508000" y="4572000"/>
+            <a:ext cx="8128000" cy="10160"/>
+          </a:xfrm>
+          <a:prstGeom prst="rect">
+            <a:avLst/>
+          </a:prstGeom>
+          <a:solidFill>
+            <a:srgbClr val="1F2125"/>
+          </a:solidFill>
+          <a:ln>
+            <a:noFill/>
+          </a:ln>
+        </p:spPr>
+        <p:txBody>
+          <a:bodyPr rtlCol="0" anchor="ctr"/>
+          <a:lstStyle/>
+          <a:p>
+            <a:pPr algn="ctr"/>
+          </a:p>
+        </p:txBody>
+      </p:sp>
+      <p:sp>
+        <p:nvSpPr>
+          <p:cNvPr id="9" name="TextBox 8"/>
+          <p:cNvSpPr txBox="1"/>
+          <p:nvPr/>
+        </p:nvSpPr>
+        <p:spPr>
+          <a:xfrm>
+            <a:off x="508000" y="4660900"/>
+            <a:ext cx="7747000" cy="190500"/>
+          </a:xfrm>
+          <a:prstGeom prst="rect">
+            <a:avLst/>
+          </a:prstGeom>
+          <a:noFill/>
+        </p:spPr>
+        <p:txBody>
+          <a:bodyPr wrap="none" lIns="0" rIns="0" tIns="0" bIns="0" anchor="t">
+            <a:spAutoFit/>
+          </a:bodyPr>
+          <a:lstStyle/>
+          <a:p>
+            <a:pPr>
+              <a:defRPr sz="750" b="0">
+                <a:solidFill>
+                  <a:srgbClr val="9EA1A7"/>
+                </a:solidFill>
+                <a:latin typeface="Arial"/>
+              </a:defRPr>
+            </a:pPr>
+            <a:r>
+              <a:t>reports/stuff_v2/altitude_bias.csv · entrenado sin altitud extrema, evaluado en ella.</a:t>
+            </a:r>
+          </a:p>
+        </p:txBody>
+      </p:sp>
+      <p:sp>
+        <p:nvSpPr>
+          <p:cNvPr id="10" name="TextBox 9"/>
+          <p:cNvSpPr txBox="1"/>
+          <p:nvPr/>
+        </p:nvSpPr>
+        <p:spPr>
+          <a:xfrm>
+            <a:off x="508000" y="1574800"/>
+            <a:ext cx="2095500" cy="283972"/>
+          </a:xfrm>
+          <a:prstGeom prst="rect">
+            <a:avLst/>
+          </a:prstGeom>
+          <a:noFill/>
+        </p:spPr>
+        <p:txBody>
+          <a:bodyPr wrap="none" lIns="0" rIns="0" tIns="0" bIns="0" anchor="t">
+            <a:spAutoFit/>
+          </a:bodyPr>
+          <a:lstStyle/>
+          <a:p>
+            <a:pPr>
+              <a:defRPr sz="1400" b="0">
+                <a:solidFill>
+                  <a:srgbClr val="F4F4F5"/>
+                </a:solidFill>
+                <a:latin typeface="Arial"/>
+              </a:defRPr>
+            </a:pPr>
+            <a:r>
+              <a:t>Nulo (conteo)</a:t>
+            </a:r>
+          </a:p>
+        </p:txBody>
+      </p:sp>
+      <p:sp>
+        <p:nvSpPr>
+          <p:cNvPr id="11" name="Rounded Rectangle 10"/>
+          <p:cNvSpPr/>
+          <p:nvPr/>
+        </p:nvSpPr>
+        <p:spPr>
+          <a:xfrm>
+            <a:off x="2730500" y="1600200"/>
+            <a:ext cx="4254500" cy="228600"/>
+          </a:xfrm>
+          <a:prstGeom prst="roundRect">
+            <a:avLst>
+              <a:gd name="adj" fmla="val 16666"/>
+            </a:avLst>
+          </a:prstGeom>
+          <a:solidFill>
+            <a:srgbClr val="1F2125"/>
+          </a:solidFill>
+          <a:ln>
+            <a:noFill/>
+          </a:ln>
+        </p:spPr>
+        <p:txBody>
+          <a:bodyPr rtlCol="0" anchor="ctr"/>
+          <a:lstStyle/>
+          <a:p>
+            <a:pPr algn="ctr"/>
+          </a:p>
+        </p:txBody>
+      </p:sp>
+      <p:sp>
+        <p:nvSpPr>
+          <p:cNvPr id="12" name="Rounded Rectangle 11"/>
+          <p:cNvSpPr/>
+          <p:nvPr/>
+        </p:nvSpPr>
+        <p:spPr>
+          <a:xfrm>
+            <a:off x="2730500" y="1600200"/>
+            <a:ext cx="3829050" cy="228600"/>
+          </a:xfrm>
+          <a:prstGeom prst="roundRect">
+            <a:avLst>
+              <a:gd name="adj" fmla="val 16666"/>
+            </a:avLst>
+          </a:prstGeom>
+          <a:solidFill>
+            <a:srgbClr val="9EA1A7"/>
+          </a:solidFill>
+          <a:ln>
+            <a:noFill/>
+          </a:ln>
+        </p:spPr>
+        <p:txBody>
+          <a:bodyPr rtlCol="0" anchor="ctr"/>
+          <a:lstStyle/>
+          <a:p>
+            <a:pPr algn="ctr"/>
+          </a:p>
+        </p:txBody>
+      </p:sp>
+      <p:sp>
+        <p:nvSpPr>
           <p:cNvPr id="13" name="TextBox 12"/>
           <p:cNvSpPr txBox="1"/>
           <p:nvPr/>
         </p:nvSpPr>
         <p:spPr>
           <a:xfrm>
-            <a:off x="7137400" y="2387600"/>
-            <a:ext cx="1498600" cy="331216"/>
-          </a:xfrm>
-          <a:prstGeom prst="rect">
-            <a:avLst/>
-          </a:prstGeom>
-          <a:noFill/>
-        </p:spPr>
-        <p:txBody>
-          <a:bodyPr wrap="none" lIns="0" rIns="0" tIns="0" bIns="0" anchor="t">
-            <a:spAutoFit/>
-          </a:bodyPr>
-          <a:lstStyle/>
-          <a:p>
-            <a:pPr>
-              <a:defRPr sz="1700" b="1">
-                <a:solidFill>
-                  <a:srgbClr val="202124"/>
-                </a:solidFill>
-                <a:latin typeface="Arial"/>
-              </a:defRPr>
-            </a:pPr>
-            <a:r>
-              <a:t>+0.0025</a:t>
+            <a:off x="7162800" y="1574800"/>
+            <a:ext cx="1473200" cy="315468"/>
+          </a:xfrm>
+          <a:prstGeom prst="rect">
+            <a:avLst/>
+          </a:prstGeom>
+          <a:noFill/>
+        </p:spPr>
+        <p:txBody>
+          <a:bodyPr wrap="none" lIns="0" rIns="0" tIns="0" bIns="0" anchor="t">
+            <a:spAutoFit/>
+          </a:bodyPr>
+          <a:lstStyle/>
+          <a:p>
+            <a:pPr>
+              <a:defRPr sz="1600" b="1">
+                <a:solidFill>
+                  <a:srgbClr val="F4F4F5"/>
+                </a:solidFill>
+                <a:latin typeface="Arial"/>
+              </a:defRPr>
+            </a:pPr>
+            <a:r>
+              <a:t>+0.0108</a:t>
             </a:r>
           </a:p>
         </p:txBody>
@@ -7426,47 +8240,80 @@
         </p:nvSpPr>
         <p:spPr>
           <a:xfrm>
-            <a:off x="508000" y="2997200"/>
-            <a:ext cx="2095500" cy="299720"/>
-          </a:xfrm>
-          <a:prstGeom prst="rect">
-            <a:avLst/>
-          </a:prstGeom>
-          <a:noFill/>
-        </p:spPr>
-        <p:txBody>
-          <a:bodyPr wrap="none" lIns="0" rIns="0" tIns="0" bIns="0" anchor="t">
-            <a:spAutoFit/>
-          </a:bodyPr>
-          <a:lstStyle/>
-          <a:p>
-            <a:pPr>
-              <a:defRPr sz="1500" b="0">
-                <a:solidFill>
-                  <a:srgbClr val="202124"/>
-                </a:solidFill>
-                <a:latin typeface="Arial"/>
-              </a:defRPr>
-            </a:pPr>
-            <a:r>
-              <a:t>Stuff+ v2</a:t>
-            </a:r>
-          </a:p>
-        </p:txBody>
-      </p:sp>
-      <p:sp>
-        <p:nvSpPr>
-          <p:cNvPr id="15" name="Rectangle 14"/>
+            <a:off x="508000" y="2057400"/>
+            <a:ext cx="2095500" cy="283972"/>
+          </a:xfrm>
+          <a:prstGeom prst="rect">
+            <a:avLst/>
+          </a:prstGeom>
+          <a:noFill/>
+        </p:spPr>
+        <p:txBody>
+          <a:bodyPr wrap="none" lIns="0" rIns="0" tIns="0" bIns="0" anchor="t">
+            <a:spAutoFit/>
+          </a:bodyPr>
+          <a:lstStyle/>
+          <a:p>
+            <a:pPr>
+              <a:defRPr sz="1400" b="0">
+                <a:solidFill>
+                  <a:srgbClr val="F4F4F5"/>
+                </a:solidFill>
+                <a:latin typeface="Arial"/>
+              </a:defRPr>
+            </a:pPr>
+            <a:r>
+              <a:t>Stuff+ v1</a:t>
+            </a:r>
+          </a:p>
+        </p:txBody>
+      </p:sp>
+      <p:sp>
+        <p:nvSpPr>
+          <p:cNvPr id="15" name="Rounded Rectangle 14"/>
           <p:cNvSpPr/>
           <p:nvPr/>
         </p:nvSpPr>
         <p:spPr>
           <a:xfrm>
-            <a:off x="2730500" y="3048000"/>
-            <a:ext cx="638175" cy="228600"/>
-          </a:xfrm>
-          <a:prstGeom prst="rect">
-            <a:avLst/>
+            <a:off x="2730500" y="2082800"/>
+            <a:ext cx="4254500" cy="228600"/>
+          </a:xfrm>
+          <a:prstGeom prst="roundRect">
+            <a:avLst>
+              <a:gd name="adj" fmla="val 16666"/>
+            </a:avLst>
+          </a:prstGeom>
+          <a:solidFill>
+            <a:srgbClr val="1F2125"/>
+          </a:solidFill>
+          <a:ln>
+            <a:noFill/>
+          </a:ln>
+        </p:spPr>
+        <p:txBody>
+          <a:bodyPr rtlCol="0" anchor="ctr"/>
+          <a:lstStyle/>
+          <a:p>
+            <a:pPr algn="ctr"/>
+          </a:p>
+        </p:txBody>
+      </p:sp>
+      <p:sp>
+        <p:nvSpPr>
+          <p:cNvPr id="16" name="Rounded Rectangle 15"/>
+          <p:cNvSpPr/>
+          <p:nvPr/>
+        </p:nvSpPr>
+        <p:spPr>
+          <a:xfrm>
+            <a:off x="2730500" y="2082800"/>
+            <a:ext cx="886354" cy="228600"/>
+          </a:xfrm>
+          <a:prstGeom prst="roundRect">
+            <a:avLst>
+              <a:gd name="adj" fmla="val 16666"/>
+            </a:avLst>
           </a:prstGeom>
           <a:solidFill>
             <a:srgbClr val="D71920"/>
@@ -7485,14 +8332,244 @@
       </p:sp>
       <p:sp>
         <p:nvSpPr>
-          <p:cNvPr id="16" name="TextBox 15"/>
-          <p:cNvSpPr txBox="1"/>
-          <p:nvPr/>
-        </p:nvSpPr>
-        <p:spPr>
-          <a:xfrm>
-            <a:off x="7137400" y="2984500"/>
-            <a:ext cx="1498600" cy="331216"/>
+          <p:cNvPr id="17" name="TextBox 16"/>
+          <p:cNvSpPr txBox="1"/>
+          <p:nvPr/>
+        </p:nvSpPr>
+        <p:spPr>
+          <a:xfrm>
+            <a:off x="7162800" y="2057400"/>
+            <a:ext cx="1473200" cy="315468"/>
+          </a:xfrm>
+          <a:prstGeom prst="rect">
+            <a:avLst/>
+          </a:prstGeom>
+          <a:noFill/>
+        </p:spPr>
+        <p:txBody>
+          <a:bodyPr wrap="none" lIns="0" rIns="0" tIns="0" bIns="0" anchor="t">
+            <a:spAutoFit/>
+          </a:bodyPr>
+          <a:lstStyle/>
+          <a:p>
+            <a:pPr>
+              <a:defRPr sz="1600" b="1">
+                <a:solidFill>
+                  <a:srgbClr val="F4F4F5"/>
+                </a:solidFill>
+                <a:latin typeface="Arial"/>
+              </a:defRPr>
+            </a:pPr>
+            <a:r>
+              <a:t>+0.0025</a:t>
+            </a:r>
+          </a:p>
+        </p:txBody>
+      </p:sp>
+      <p:sp>
+        <p:nvSpPr>
+          <p:cNvPr id="18" name="TextBox 17"/>
+          <p:cNvSpPr txBox="1"/>
+          <p:nvPr/>
+        </p:nvSpPr>
+        <p:spPr>
+          <a:xfrm>
+            <a:off x="508000" y="2540000"/>
+            <a:ext cx="2095500" cy="283972"/>
+          </a:xfrm>
+          <a:prstGeom prst="rect">
+            <a:avLst/>
+          </a:prstGeom>
+          <a:noFill/>
+        </p:spPr>
+        <p:txBody>
+          <a:bodyPr wrap="none" lIns="0" rIns="0" tIns="0" bIns="0" anchor="t">
+            <a:spAutoFit/>
+          </a:bodyPr>
+          <a:lstStyle/>
+          <a:p>
+            <a:pPr>
+              <a:defRPr sz="1400" b="0">
+                <a:solidFill>
+                  <a:srgbClr val="F4F4F5"/>
+                </a:solidFill>
+                <a:latin typeface="Arial"/>
+              </a:defRPr>
+            </a:pPr>
+            <a:r>
+              <a:t>Stuff+ v2</a:t>
+            </a:r>
+          </a:p>
+        </p:txBody>
+      </p:sp>
+      <p:sp>
+        <p:nvSpPr>
+          <p:cNvPr id="19" name="Rounded Rectangle 18"/>
+          <p:cNvSpPr/>
+          <p:nvPr/>
+        </p:nvSpPr>
+        <p:spPr>
+          <a:xfrm>
+            <a:off x="2730500" y="2565400"/>
+            <a:ext cx="4254500" cy="228600"/>
+          </a:xfrm>
+          <a:prstGeom prst="roundRect">
+            <a:avLst>
+              <a:gd name="adj" fmla="val 16666"/>
+            </a:avLst>
+          </a:prstGeom>
+          <a:solidFill>
+            <a:srgbClr val="1F2125"/>
+          </a:solidFill>
+          <a:ln>
+            <a:noFill/>
+          </a:ln>
+        </p:spPr>
+        <p:txBody>
+          <a:bodyPr rtlCol="0" anchor="ctr"/>
+          <a:lstStyle/>
+          <a:p>
+            <a:pPr algn="ctr"/>
+          </a:p>
+        </p:txBody>
+      </p:sp>
+      <p:sp>
+        <p:nvSpPr>
+          <p:cNvPr id="20" name="Rounded Rectangle 19"/>
+          <p:cNvSpPr/>
+          <p:nvPr/>
+        </p:nvSpPr>
+        <p:spPr>
+          <a:xfrm>
+            <a:off x="2730500" y="2565400"/>
+            <a:ext cx="638175" cy="228600"/>
+          </a:xfrm>
+          <a:prstGeom prst="roundRect">
+            <a:avLst>
+              <a:gd name="adj" fmla="val 16666"/>
+            </a:avLst>
+          </a:prstGeom>
+          <a:solidFill>
+            <a:srgbClr val="D71920"/>
+          </a:solidFill>
+          <a:ln>
+            <a:noFill/>
+          </a:ln>
+        </p:spPr>
+        <p:txBody>
+          <a:bodyPr rtlCol="0" anchor="ctr"/>
+          <a:lstStyle/>
+          <a:p>
+            <a:pPr algn="ctr"/>
+          </a:p>
+        </p:txBody>
+      </p:sp>
+      <p:sp>
+        <p:nvSpPr>
+          <p:cNvPr id="21" name="TextBox 20"/>
+          <p:cNvSpPr txBox="1"/>
+          <p:nvPr/>
+        </p:nvSpPr>
+        <p:spPr>
+          <a:xfrm>
+            <a:off x="7162800" y="2540000"/>
+            <a:ext cx="1473200" cy="315468"/>
+          </a:xfrm>
+          <a:prstGeom prst="rect">
+            <a:avLst/>
+          </a:prstGeom>
+          <a:noFill/>
+        </p:spPr>
+        <p:txBody>
+          <a:bodyPr wrap="none" lIns="0" rIns="0" tIns="0" bIns="0" anchor="t">
+            <a:spAutoFit/>
+          </a:bodyPr>
+          <a:lstStyle/>
+          <a:p>
+            <a:pPr>
+              <a:defRPr sz="1600" b="1">
+                <a:solidFill>
+                  <a:srgbClr val="F4F4F5"/>
+                </a:solidFill>
+                <a:latin typeface="Arial"/>
+              </a:defRPr>
+            </a:pPr>
+            <a:r>
+              <a:t>+0.0018</a:t>
+            </a:r>
+          </a:p>
+        </p:txBody>
+      </p:sp>
+      <p:sp>
+        <p:nvSpPr>
+          <p:cNvPr id="22" name="Rounded Rectangle 21"/>
+          <p:cNvSpPr/>
+          <p:nvPr/>
+        </p:nvSpPr>
+        <p:spPr>
+          <a:xfrm>
+            <a:off x="508000" y="3124200"/>
+            <a:ext cx="8128000" cy="558800"/>
+          </a:xfrm>
+          <a:prstGeom prst="roundRect">
+            <a:avLst>
+              <a:gd name="adj" fmla="val 13636"/>
+            </a:avLst>
+          </a:prstGeom>
+          <a:solidFill>
+            <a:srgbClr val="1F2125"/>
+          </a:solidFill>
+          <a:ln>
+            <a:noFill/>
+          </a:ln>
+        </p:spPr>
+        <p:txBody>
+          <a:bodyPr rtlCol="0" anchor="ctr"/>
+          <a:lstStyle/>
+          <a:p>
+            <a:pPr algn="ctr"/>
+          </a:p>
+        </p:txBody>
+      </p:sp>
+      <p:sp>
+        <p:nvSpPr>
+          <p:cNvPr id="23" name="Rectangle 22"/>
+          <p:cNvSpPr/>
+          <p:nvPr/>
+        </p:nvSpPr>
+        <p:spPr>
+          <a:xfrm>
+            <a:off x="508000" y="3124200"/>
+            <a:ext cx="50800" cy="558800"/>
+          </a:xfrm>
+          <a:prstGeom prst="rect">
+            <a:avLst/>
+          </a:prstGeom>
+          <a:solidFill>
+            <a:srgbClr val="D71920"/>
+          </a:solidFill>
+          <a:ln>
+            <a:noFill/>
+          </a:ln>
+        </p:spPr>
+        <p:txBody>
+          <a:bodyPr rtlCol="0" anchor="ctr"/>
+          <a:lstStyle/>
+          <a:p>
+            <a:pPr algn="ctr"/>
+          </a:p>
+        </p:txBody>
+      </p:sp>
+      <p:sp>
+        <p:nvSpPr>
+          <p:cNvPr id="24" name="TextBox 23"/>
+          <p:cNvSpPr txBox="1"/>
+          <p:nvPr/>
+        </p:nvSpPr>
+        <p:spPr>
+          <a:xfrm>
+            <a:off x="736600" y="3263900"/>
+            <a:ext cx="7747000" cy="331216"/>
           </a:xfrm>
           <a:prstGeom prst="rect">
             <a:avLst/>
@@ -7508,43 +8585,7 @@
             <a:pPr>
               <a:defRPr sz="1700" b="1">
                 <a:solidFill>
-                  <a:srgbClr val="202124"/>
-                </a:solidFill>
-                <a:latin typeface="Arial"/>
-              </a:defRPr>
-            </a:pPr>
-            <a:r>
-              <a:t>+0.0018</a:t>
-            </a:r>
-          </a:p>
-        </p:txBody>
-      </p:sp>
-      <p:sp>
-        <p:nvSpPr>
-          <p:cNvPr id="17" name="TextBox 16"/>
-          <p:cNvSpPr txBox="1"/>
-          <p:nvPr/>
-        </p:nvSpPr>
-        <p:spPr>
-          <a:xfrm>
-            <a:off x="508000" y="3657600"/>
-            <a:ext cx="8128000" cy="331216"/>
-          </a:xfrm>
-          <a:prstGeom prst="rect">
-            <a:avLst/>
-          </a:prstGeom>
-          <a:noFill/>
-        </p:spPr>
-        <p:txBody>
-          <a:bodyPr wrap="none" lIns="0" rIns="0" tIns="0" bIns="0" anchor="t">
-            <a:spAutoFit/>
-          </a:bodyPr>
-          <a:lstStyle/>
-          <a:p>
-            <a:pPr>
-              <a:defRPr sz="1700" b="1">
-                <a:solidFill>
-                  <a:srgbClr val="202124"/>
+                  <a:srgbClr val="F4F4F5"/>
                 </a:solidFill>
                 <a:latin typeface="Arial"/>
               </a:defRPr>
@@ -7557,30 +8598,30 @@
       </p:sp>
       <p:sp>
         <p:nvSpPr>
-          <p:cNvPr id="18" name="TextBox 17"/>
-          <p:cNvSpPr txBox="1"/>
-          <p:nvPr/>
-        </p:nvSpPr>
-        <p:spPr>
-          <a:xfrm>
-            <a:off x="508000" y="4025900"/>
-            <a:ext cx="8128000" cy="268224"/>
-          </a:xfrm>
-          <a:prstGeom prst="rect">
-            <a:avLst/>
-          </a:prstGeom>
-          <a:noFill/>
-        </p:spPr>
-        <p:txBody>
-          <a:bodyPr wrap="none" lIns="0" rIns="0" tIns="0" bIns="0" anchor="t">
-            <a:spAutoFit/>
-          </a:bodyPr>
-          <a:lstStyle/>
-          <a:p>
-            <a:pPr>
-              <a:defRPr sz="1300" b="0">
-                <a:solidFill>
-                  <a:srgbClr val="585B60"/>
+          <p:cNvPr id="25" name="TextBox 24"/>
+          <p:cNvSpPr txBox="1"/>
+          <p:nvPr/>
+        </p:nvSpPr>
+        <p:spPr>
+          <a:xfrm>
+            <a:off x="508000" y="3860800"/>
+            <a:ext cx="8128000" cy="252476"/>
+          </a:xfrm>
+          <a:prstGeom prst="rect">
+            <a:avLst/>
+          </a:prstGeom>
+          <a:noFill/>
+        </p:spPr>
+        <p:txBody>
+          <a:bodyPr wrap="none" lIns="0" rIns="0" tIns="0" bIns="0" anchor="t">
+            <a:spAutoFit/>
+          </a:bodyPr>
+          <a:lstStyle/>
+          <a:p>
+            <a:pPr>
+              <a:defRPr sz="1200" b="0">
+                <a:solidFill>
+                  <a:srgbClr val="9EA1A7"/>
                 </a:solidFill>
                 <a:latin typeface="Arial"/>
               </a:defRPr>
@@ -7624,7 +8665,7 @@
             <a:avLst/>
           </a:prstGeom>
           <a:solidFill>
-            <a:srgbClr val="FFFFFF"/>
+            <a:srgbClr val="121316"/>
           </a:solidFill>
           <a:ln>
             <a:noFill/>
@@ -7646,8 +8687,8 @@
         </p:nvSpPr>
         <p:spPr>
           <a:xfrm>
-            <a:off x="508000" y="292100"/>
-            <a:ext cx="533400" cy="50800"/>
+            <a:off x="0" y="0"/>
+            <a:ext cx="76200" cy="5143500"/>
           </a:xfrm>
           <a:prstGeom prst="rect">
             <a:avLst/>
@@ -7669,230 +8710,14 @@
       </p:sp>
       <p:sp>
         <p:nvSpPr>
-          <p:cNvPr id="4" name="TextBox 3"/>
-          <p:cNvSpPr txBox="1"/>
-          <p:nvPr/>
-        </p:nvSpPr>
-        <p:spPr>
-          <a:xfrm>
-            <a:off x="1206500" y="203200"/>
-            <a:ext cx="7239000" cy="220979"/>
-          </a:xfrm>
-          <a:prstGeom prst="rect">
-            <a:avLst/>
-          </a:prstGeom>
-          <a:noFill/>
-        </p:spPr>
-        <p:txBody>
-          <a:bodyPr wrap="none" lIns="0" rIns="0" tIns="0" bIns="0" anchor="t">
-            <a:spAutoFit/>
-          </a:bodyPr>
-          <a:lstStyle/>
-          <a:p>
-            <a:pPr>
-              <a:defRPr sz="1000" b="0">
-                <a:solidFill>
-                  <a:srgbClr val="585B60"/>
-                </a:solidFill>
-                <a:latin typeface="Arial"/>
-              </a:defRPr>
-            </a:pPr>
-            <a:r>
-              <a:t>STUFF+ 2240 / DIABLOS ROJOS</a:t>
-            </a:r>
-          </a:p>
-        </p:txBody>
-      </p:sp>
-      <p:sp>
-        <p:nvSpPr>
-          <p:cNvPr id="5" name="TextBox 4"/>
-          <p:cNvSpPr txBox="1"/>
-          <p:nvPr/>
-        </p:nvSpPr>
-        <p:spPr>
-          <a:xfrm>
-            <a:off x="508000" y="647700"/>
-            <a:ext cx="8128000" cy="457200"/>
-          </a:xfrm>
-          <a:prstGeom prst="rect">
-            <a:avLst/>
-          </a:prstGeom>
-          <a:noFill/>
-        </p:spPr>
-        <p:txBody>
-          <a:bodyPr wrap="none" lIns="0" rIns="0" tIns="0" bIns="0" anchor="t">
-            <a:spAutoFit/>
-          </a:bodyPr>
-          <a:lstStyle/>
-          <a:p>
-            <a:pPr>
-              <a:defRPr sz="2600" b="1">
-                <a:solidFill>
-                  <a:srgbClr val="202124"/>
-                </a:solidFill>
-                <a:latin typeface="Arial"/>
-              </a:defRPr>
-            </a:pPr>
-            <a:r>
-              <a:t>Las pérdidas dependen de la forma del</a:t>
-            </a:r>
-          </a:p>
-        </p:txBody>
-      </p:sp>
-      <p:sp>
-        <p:nvSpPr>
-          <p:cNvPr id="6" name="TextBox 5"/>
-          <p:cNvSpPr txBox="1"/>
-          <p:nvPr/>
-        </p:nvSpPr>
-        <p:spPr>
-          <a:xfrm>
-            <a:off x="508000" y="1041400"/>
-            <a:ext cx="8128000" cy="457200"/>
-          </a:xfrm>
-          <a:prstGeom prst="rect">
-            <a:avLst/>
-          </a:prstGeom>
-          <a:noFill/>
-        </p:spPr>
-        <p:txBody>
-          <a:bodyPr wrap="none" lIns="0" rIns="0" tIns="0" bIns="0" anchor="t">
-            <a:spAutoFit/>
-          </a:bodyPr>
-          <a:lstStyle/>
-          <a:p>
-            <a:pPr>
-              <a:defRPr sz="2600" b="1">
-                <a:solidFill>
-                  <a:srgbClr val="202124"/>
-                </a:solidFill>
-                <a:latin typeface="Arial"/>
-              </a:defRPr>
-            </a:pPr>
-            <a:r>
-              <a:t>pitch</a:t>
-            </a:r>
-          </a:p>
-        </p:txBody>
-      </p:sp>
-      <p:sp>
-        <p:nvSpPr>
-          <p:cNvPr id="7" name="TextBox 6"/>
-          <p:cNvSpPr txBox="1"/>
-          <p:nvPr/>
-        </p:nvSpPr>
-        <p:spPr>
-          <a:xfrm>
-            <a:off x="508000" y="4495800"/>
-            <a:ext cx="7620000" cy="196850"/>
-          </a:xfrm>
-          <a:prstGeom prst="rect">
-            <a:avLst/>
-          </a:prstGeom>
-          <a:noFill/>
-        </p:spPr>
-        <p:txBody>
-          <a:bodyPr wrap="none" lIns="0" rIns="0" tIns="0" bIns="0" anchor="t">
-            <a:spAutoFit/>
-          </a:bodyPr>
-          <a:lstStyle/>
-          <a:p>
-            <a:pPr>
-              <a:defRPr sz="800" b="0">
-                <a:solidFill>
-                  <a:srgbClr val="585B60"/>
-                </a:solidFill>
-                <a:latin typeface="Arial"/>
-              </a:defRPr>
-            </a:pPr>
-            <a:r>
-              <a:t>reports/altitude_delta/delta_by_shape.csv · delta_stuff; misma forma, CDMX menos nivel del mar.</a:t>
-            </a:r>
-          </a:p>
-        </p:txBody>
-      </p:sp>
-      <p:sp>
-        <p:nvSpPr>
-          <p:cNvPr id="8" name="TextBox 7"/>
-          <p:cNvSpPr txBox="1"/>
-          <p:nvPr/>
-        </p:nvSpPr>
-        <p:spPr>
-          <a:xfrm>
-            <a:off x="8255000" y="4813300"/>
-            <a:ext cx="381000" cy="220979"/>
-          </a:xfrm>
-          <a:prstGeom prst="rect">
-            <a:avLst/>
-          </a:prstGeom>
-          <a:noFill/>
-        </p:spPr>
-        <p:txBody>
-          <a:bodyPr wrap="none" lIns="0" rIns="0" tIns="0" bIns="0" anchor="t">
-            <a:spAutoFit/>
-          </a:bodyPr>
-          <a:lstStyle/>
-          <a:p>
-            <a:pPr>
-              <a:defRPr sz="1000" b="0">
-                <a:solidFill>
-                  <a:srgbClr val="585B60"/>
-                </a:solidFill>
-                <a:latin typeface="Arial"/>
-              </a:defRPr>
-            </a:pPr>
-            <a:r>
-              <a:t>06</a:t>
-            </a:r>
-          </a:p>
-        </p:txBody>
-      </p:sp>
-      <p:sp>
-        <p:nvSpPr>
-          <p:cNvPr id="9" name="TextBox 8"/>
-          <p:cNvSpPr txBox="1"/>
-          <p:nvPr/>
-        </p:nvSpPr>
-        <p:spPr>
-          <a:xfrm>
-            <a:off x="508000" y="1752600"/>
-            <a:ext cx="2095500" cy="299720"/>
-          </a:xfrm>
-          <a:prstGeom prst="rect">
-            <a:avLst/>
-          </a:prstGeom>
-          <a:noFill/>
-        </p:spPr>
-        <p:txBody>
-          <a:bodyPr wrap="none" lIns="0" rIns="0" tIns="0" bIns="0" anchor="t">
-            <a:spAutoFit/>
-          </a:bodyPr>
-          <a:lstStyle/>
-          <a:p>
-            <a:pPr>
-              <a:defRPr sz="1500" b="0">
-                <a:solidFill>
-                  <a:srgbClr val="202124"/>
-                </a:solidFill>
-                <a:latin typeface="Arial"/>
-              </a:defRPr>
-            </a:pPr>
-            <a:r>
-              <a:t>Curva 12-6</a:t>
-            </a:r>
-          </a:p>
-        </p:txBody>
-      </p:sp>
-      <p:sp>
-        <p:nvSpPr>
-          <p:cNvPr id="10" name="Rectangle 9"/>
+          <p:cNvPr id="4" name="Rectangle 3"/>
           <p:cNvSpPr/>
           <p:nvPr/>
         </p:nvSpPr>
         <p:spPr>
           <a:xfrm>
-            <a:off x="2730500" y="1803400"/>
-            <a:ext cx="2127250" cy="228600"/>
+            <a:off x="508000" y="304800"/>
+            <a:ext cx="101600" cy="101600"/>
           </a:xfrm>
           <a:prstGeom prst="rect">
             <a:avLst/>
@@ -7914,30 +8739,301 @@
       </p:sp>
       <p:sp>
         <p:nvSpPr>
-          <p:cNvPr id="11" name="TextBox 10"/>
-          <p:cNvSpPr txBox="1"/>
-          <p:nvPr/>
-        </p:nvSpPr>
-        <p:spPr>
-          <a:xfrm>
-            <a:off x="7137400" y="1739900"/>
-            <a:ext cx="1498600" cy="331216"/>
-          </a:xfrm>
-          <a:prstGeom prst="rect">
-            <a:avLst/>
-          </a:prstGeom>
-          <a:noFill/>
-        </p:spPr>
-        <p:txBody>
-          <a:bodyPr wrap="none" lIns="0" rIns="0" tIns="0" bIns="0" anchor="t">
-            <a:spAutoFit/>
-          </a:bodyPr>
-          <a:lstStyle/>
-          <a:p>
-            <a:pPr>
-              <a:defRPr sz="1700" b="1">
-                <a:solidFill>
-                  <a:srgbClr val="202124"/>
+          <p:cNvPr id="5" name="TextBox 4"/>
+          <p:cNvSpPr txBox="1"/>
+          <p:nvPr/>
+        </p:nvSpPr>
+        <p:spPr>
+          <a:xfrm>
+            <a:off x="711200" y="241300"/>
+            <a:ext cx="6096000" cy="205232"/>
+          </a:xfrm>
+          <a:prstGeom prst="rect">
+            <a:avLst/>
+          </a:prstGeom>
+          <a:noFill/>
+        </p:spPr>
+        <p:txBody>
+          <a:bodyPr wrap="none" lIns="0" rIns="0" tIns="0" bIns="0" anchor="t">
+            <a:spAutoFit/>
+          </a:bodyPr>
+          <a:lstStyle/>
+          <a:p>
+            <a:pPr>
+              <a:defRPr sz="900" b="1">
+                <a:solidFill>
+                  <a:srgbClr val="9EA1A7"/>
+                </a:solidFill>
+                <a:latin typeface="Arial"/>
+              </a:defRPr>
+            </a:pPr>
+            <a:r>
+              <a:t>STUFF+ 2240 / DIABLOS ROJOS</a:t>
+            </a:r>
+          </a:p>
+        </p:txBody>
+      </p:sp>
+      <p:sp>
+        <p:nvSpPr>
+          <p:cNvPr id="6" name="TextBox 5"/>
+          <p:cNvSpPr txBox="1"/>
+          <p:nvPr/>
+        </p:nvSpPr>
+        <p:spPr>
+          <a:xfrm>
+            <a:off x="8331200" y="241300"/>
+            <a:ext cx="381000" cy="236728"/>
+          </a:xfrm>
+          <a:prstGeom prst="rect">
+            <a:avLst/>
+          </a:prstGeom>
+          <a:noFill/>
+        </p:spPr>
+        <p:txBody>
+          <a:bodyPr wrap="none" lIns="0" rIns="0" tIns="0" bIns="0" anchor="t">
+            <a:spAutoFit/>
+          </a:bodyPr>
+          <a:lstStyle/>
+          <a:p>
+            <a:pPr>
+              <a:defRPr sz="1100" b="1">
+                <a:solidFill>
+                  <a:srgbClr val="D71920"/>
+                </a:solidFill>
+                <a:latin typeface="Arial"/>
+              </a:defRPr>
+            </a:pPr>
+            <a:r>
+              <a:t>06</a:t>
+            </a:r>
+          </a:p>
+        </p:txBody>
+      </p:sp>
+      <p:sp>
+        <p:nvSpPr>
+          <p:cNvPr id="7" name="TextBox 6"/>
+          <p:cNvSpPr txBox="1"/>
+          <p:nvPr/>
+        </p:nvSpPr>
+        <p:spPr>
+          <a:xfrm>
+            <a:off x="508000" y="584200"/>
+            <a:ext cx="8128000" cy="444500"/>
+          </a:xfrm>
+          <a:prstGeom prst="rect">
+            <a:avLst/>
+          </a:prstGeom>
+          <a:noFill/>
+        </p:spPr>
+        <p:txBody>
+          <a:bodyPr wrap="none" lIns="0" rIns="0" tIns="0" bIns="0" anchor="t">
+            <a:spAutoFit/>
+          </a:bodyPr>
+          <a:lstStyle/>
+          <a:p>
+            <a:pPr>
+              <a:defRPr sz="2500" b="1">
+                <a:solidFill>
+                  <a:srgbClr val="F4F4F5"/>
+                </a:solidFill>
+                <a:latin typeface="Arial"/>
+              </a:defRPr>
+            </a:pPr>
+            <a:r>
+              <a:t>Las pérdidas dependen de la forma del pitch</a:t>
+            </a:r>
+          </a:p>
+        </p:txBody>
+      </p:sp>
+      <p:sp>
+        <p:nvSpPr>
+          <p:cNvPr id="8" name="Rectangle 7"/>
+          <p:cNvSpPr/>
+          <p:nvPr/>
+        </p:nvSpPr>
+        <p:spPr>
+          <a:xfrm>
+            <a:off x="508000" y="4572000"/>
+            <a:ext cx="8128000" cy="10160"/>
+          </a:xfrm>
+          <a:prstGeom prst="rect">
+            <a:avLst/>
+          </a:prstGeom>
+          <a:solidFill>
+            <a:srgbClr val="1F2125"/>
+          </a:solidFill>
+          <a:ln>
+            <a:noFill/>
+          </a:ln>
+        </p:spPr>
+        <p:txBody>
+          <a:bodyPr rtlCol="0" anchor="ctr"/>
+          <a:lstStyle/>
+          <a:p>
+            <a:pPr algn="ctr"/>
+          </a:p>
+        </p:txBody>
+      </p:sp>
+      <p:sp>
+        <p:nvSpPr>
+          <p:cNvPr id="9" name="TextBox 8"/>
+          <p:cNvSpPr txBox="1"/>
+          <p:nvPr/>
+        </p:nvSpPr>
+        <p:spPr>
+          <a:xfrm>
+            <a:off x="508000" y="4660900"/>
+            <a:ext cx="7747000" cy="190500"/>
+          </a:xfrm>
+          <a:prstGeom prst="rect">
+            <a:avLst/>
+          </a:prstGeom>
+          <a:noFill/>
+        </p:spPr>
+        <p:txBody>
+          <a:bodyPr wrap="none" lIns="0" rIns="0" tIns="0" bIns="0" anchor="t">
+            <a:spAutoFit/>
+          </a:bodyPr>
+          <a:lstStyle/>
+          <a:p>
+            <a:pPr>
+              <a:defRPr sz="750" b="0">
+                <a:solidFill>
+                  <a:srgbClr val="9EA1A7"/>
+                </a:solidFill>
+                <a:latin typeface="Arial"/>
+              </a:defRPr>
+            </a:pPr>
+            <a:r>
+              <a:t>reports/altitude_delta/delta_by_shape.csv · delta_stuff; misma forma, CDMX menos nivel del mar.</a:t>
+            </a:r>
+          </a:p>
+        </p:txBody>
+      </p:sp>
+      <p:sp>
+        <p:nvSpPr>
+          <p:cNvPr id="10" name="TextBox 9"/>
+          <p:cNvSpPr txBox="1"/>
+          <p:nvPr/>
+        </p:nvSpPr>
+        <p:spPr>
+          <a:xfrm>
+            <a:off x="508000" y="1524000"/>
+            <a:ext cx="2095500" cy="283972"/>
+          </a:xfrm>
+          <a:prstGeom prst="rect">
+            <a:avLst/>
+          </a:prstGeom>
+          <a:noFill/>
+        </p:spPr>
+        <p:txBody>
+          <a:bodyPr wrap="none" lIns="0" rIns="0" tIns="0" bIns="0" anchor="t">
+            <a:spAutoFit/>
+          </a:bodyPr>
+          <a:lstStyle/>
+          <a:p>
+            <a:pPr>
+              <a:defRPr sz="1400" b="0">
+                <a:solidFill>
+                  <a:srgbClr val="F4F4F5"/>
+                </a:solidFill>
+                <a:latin typeface="Arial"/>
+              </a:defRPr>
+            </a:pPr>
+            <a:r>
+              <a:t>Curva 12-6</a:t>
+            </a:r>
+          </a:p>
+        </p:txBody>
+      </p:sp>
+      <p:sp>
+        <p:nvSpPr>
+          <p:cNvPr id="11" name="Rounded Rectangle 10"/>
+          <p:cNvSpPr/>
+          <p:nvPr/>
+        </p:nvSpPr>
+        <p:spPr>
+          <a:xfrm>
+            <a:off x="2730500" y="1549400"/>
+            <a:ext cx="4254500" cy="228600"/>
+          </a:xfrm>
+          <a:prstGeom prst="roundRect">
+            <a:avLst>
+              <a:gd name="adj" fmla="val 16666"/>
+            </a:avLst>
+          </a:prstGeom>
+          <a:solidFill>
+            <a:srgbClr val="1F2125"/>
+          </a:solidFill>
+          <a:ln>
+            <a:noFill/>
+          </a:ln>
+        </p:spPr>
+        <p:txBody>
+          <a:bodyPr rtlCol="0" anchor="ctr"/>
+          <a:lstStyle/>
+          <a:p>
+            <a:pPr algn="ctr"/>
+          </a:p>
+        </p:txBody>
+      </p:sp>
+      <p:sp>
+        <p:nvSpPr>
+          <p:cNvPr id="12" name="Rounded Rectangle 11"/>
+          <p:cNvSpPr/>
+          <p:nvPr/>
+        </p:nvSpPr>
+        <p:spPr>
+          <a:xfrm>
+            <a:off x="2730500" y="1549400"/>
+            <a:ext cx="2127250" cy="228600"/>
+          </a:xfrm>
+          <a:prstGeom prst="roundRect">
+            <a:avLst>
+              <a:gd name="adj" fmla="val 16666"/>
+            </a:avLst>
+          </a:prstGeom>
+          <a:solidFill>
+            <a:srgbClr val="9EA1A7"/>
+          </a:solidFill>
+          <a:ln>
+            <a:noFill/>
+          </a:ln>
+        </p:spPr>
+        <p:txBody>
+          <a:bodyPr rtlCol="0" anchor="ctr"/>
+          <a:lstStyle/>
+          <a:p>
+            <a:pPr algn="ctr"/>
+          </a:p>
+        </p:txBody>
+      </p:sp>
+      <p:sp>
+        <p:nvSpPr>
+          <p:cNvPr id="13" name="TextBox 12"/>
+          <p:cNvSpPr txBox="1"/>
+          <p:nvPr/>
+        </p:nvSpPr>
+        <p:spPr>
+          <a:xfrm>
+            <a:off x="7162800" y="1524000"/>
+            <a:ext cx="1473200" cy="315468"/>
+          </a:xfrm>
+          <a:prstGeom prst="rect">
+            <a:avLst/>
+          </a:prstGeom>
+          <a:noFill/>
+        </p:spPr>
+        <p:txBody>
+          <a:bodyPr wrap="none" lIns="0" rIns="0" tIns="0" bIns="0" anchor="t">
+            <a:spAutoFit/>
+          </a:bodyPr>
+          <a:lstStyle/>
+          <a:p>
+            <a:pPr>
+              <a:defRPr sz="1600" b="1">
+                <a:solidFill>
+                  <a:srgbClr val="F4F4F5"/>
                 </a:solidFill>
                 <a:latin typeface="Arial"/>
               </a:defRPr>
@@ -7950,30 +9046,30 @@
       </p:sp>
       <p:sp>
         <p:nvSpPr>
-          <p:cNvPr id="12" name="TextBox 11"/>
-          <p:cNvSpPr txBox="1"/>
-          <p:nvPr/>
-        </p:nvSpPr>
-        <p:spPr>
-          <a:xfrm>
-            <a:off x="508000" y="2260600"/>
-            <a:ext cx="2095500" cy="299720"/>
-          </a:xfrm>
-          <a:prstGeom prst="rect">
-            <a:avLst/>
-          </a:prstGeom>
-          <a:noFill/>
-        </p:spPr>
-        <p:txBody>
-          <a:bodyPr wrap="none" lIns="0" rIns="0" tIns="0" bIns="0" anchor="t">
-            <a:spAutoFit/>
-          </a:bodyPr>
-          <a:lstStyle/>
-          <a:p>
-            <a:pPr>
-              <a:defRPr sz="1500" b="0">
-                <a:solidFill>
-                  <a:srgbClr val="202124"/>
+          <p:cNvPr id="14" name="TextBox 13"/>
+          <p:cNvSpPr txBox="1"/>
+          <p:nvPr/>
+        </p:nvSpPr>
+        <p:spPr>
+          <a:xfrm>
+            <a:off x="508000" y="2006600"/>
+            <a:ext cx="2095500" cy="283972"/>
+          </a:xfrm>
+          <a:prstGeom prst="rect">
+            <a:avLst/>
+          </a:prstGeom>
+          <a:noFill/>
+        </p:spPr>
+        <p:txBody>
+          <a:bodyPr wrap="none" lIns="0" rIns="0" tIns="0" bIns="0" anchor="t">
+            <a:spAutoFit/>
+          </a:bodyPr>
+          <a:lstStyle/>
+          <a:p>
+            <a:pPr>
+              <a:defRPr sz="1400" b="0">
+                <a:solidFill>
+                  <a:srgbClr val="F4F4F5"/>
                 </a:solidFill>
                 <a:latin typeface="Arial"/>
               </a:defRPr>
@@ -7986,17 +9082,318 @@
       </p:sp>
       <p:sp>
         <p:nvSpPr>
-          <p:cNvPr id="13" name="Rectangle 12"/>
+          <p:cNvPr id="15" name="Rounded Rectangle 14"/>
           <p:cNvSpPr/>
           <p:nvPr/>
         </p:nvSpPr>
         <p:spPr>
           <a:xfrm>
-            <a:off x="2730500" y="2311400"/>
+            <a:off x="2730500" y="2032000"/>
+            <a:ext cx="4254500" cy="228600"/>
+          </a:xfrm>
+          <a:prstGeom prst="roundRect">
+            <a:avLst>
+              <a:gd name="adj" fmla="val 16666"/>
+            </a:avLst>
+          </a:prstGeom>
+          <a:solidFill>
+            <a:srgbClr val="1F2125"/>
+          </a:solidFill>
+          <a:ln>
+            <a:noFill/>
+          </a:ln>
+        </p:spPr>
+        <p:txBody>
+          <a:bodyPr rtlCol="0" anchor="ctr"/>
+          <a:lstStyle/>
+          <a:p>
+            <a:pPr algn="ctr"/>
+          </a:p>
+        </p:txBody>
+      </p:sp>
+      <p:sp>
+        <p:nvSpPr>
+          <p:cNvPr id="16" name="Rounded Rectangle 15"/>
+          <p:cNvSpPr/>
+          <p:nvPr/>
+        </p:nvSpPr>
+        <p:spPr>
+          <a:xfrm>
+            <a:off x="2730500" y="2032000"/>
             <a:ext cx="2149642" cy="228600"/>
           </a:xfrm>
-          <a:prstGeom prst="rect">
-            <a:avLst/>
+          <a:prstGeom prst="roundRect">
+            <a:avLst>
+              <a:gd name="adj" fmla="val 16666"/>
+            </a:avLst>
+          </a:prstGeom>
+          <a:solidFill>
+            <a:srgbClr val="9EA1A7"/>
+          </a:solidFill>
+          <a:ln>
+            <a:noFill/>
+          </a:ln>
+        </p:spPr>
+        <p:txBody>
+          <a:bodyPr rtlCol="0" anchor="ctr"/>
+          <a:lstStyle/>
+          <a:p>
+            <a:pPr algn="ctr"/>
+          </a:p>
+        </p:txBody>
+      </p:sp>
+      <p:sp>
+        <p:nvSpPr>
+          <p:cNvPr id="17" name="TextBox 16"/>
+          <p:cNvSpPr txBox="1"/>
+          <p:nvPr/>
+        </p:nvSpPr>
+        <p:spPr>
+          <a:xfrm>
+            <a:off x="7162800" y="2006600"/>
+            <a:ext cx="1473200" cy="315468"/>
+          </a:xfrm>
+          <a:prstGeom prst="rect">
+            <a:avLst/>
+          </a:prstGeom>
+          <a:noFill/>
+        </p:spPr>
+        <p:txBody>
+          <a:bodyPr wrap="none" lIns="0" rIns="0" tIns="0" bIns="0" anchor="t">
+            <a:spAutoFit/>
+          </a:bodyPr>
+          <a:lstStyle/>
+          <a:p>
+            <a:pPr>
+              <a:defRPr sz="1600" b="1">
+                <a:solidFill>
+                  <a:srgbClr val="F4F4F5"/>
+                </a:solidFill>
+                <a:latin typeface="Arial"/>
+              </a:defRPr>
+            </a:pPr>
+            <a:r>
+              <a:t>−9.6</a:t>
+            </a:r>
+          </a:p>
+        </p:txBody>
+      </p:sp>
+      <p:sp>
+        <p:nvSpPr>
+          <p:cNvPr id="18" name="TextBox 17"/>
+          <p:cNvSpPr txBox="1"/>
+          <p:nvPr/>
+        </p:nvSpPr>
+        <p:spPr>
+          <a:xfrm>
+            <a:off x="508000" y="2489200"/>
+            <a:ext cx="2095500" cy="283972"/>
+          </a:xfrm>
+          <a:prstGeom prst="rect">
+            <a:avLst/>
+          </a:prstGeom>
+          <a:noFill/>
+        </p:spPr>
+        <p:txBody>
+          <a:bodyPr wrap="none" lIns="0" rIns="0" tIns="0" bIns="0" anchor="t">
+            <a:spAutoFit/>
+          </a:bodyPr>
+          <a:lstStyle/>
+          <a:p>
+            <a:pPr>
+              <a:defRPr sz="1400" b="0">
+                <a:solidFill>
+                  <a:srgbClr val="F4F4F5"/>
+                </a:solidFill>
+                <a:latin typeface="Arial"/>
+              </a:defRPr>
+            </a:pPr>
+            <a:r>
+              <a:t>Recta 4S</a:t>
+            </a:r>
+          </a:p>
+        </p:txBody>
+      </p:sp>
+      <p:sp>
+        <p:nvSpPr>
+          <p:cNvPr id="19" name="Rounded Rectangle 18"/>
+          <p:cNvSpPr/>
+          <p:nvPr/>
+        </p:nvSpPr>
+        <p:spPr>
+          <a:xfrm>
+            <a:off x="2730500" y="2514600"/>
+            <a:ext cx="4254500" cy="228600"/>
+          </a:xfrm>
+          <a:prstGeom prst="roundRect">
+            <a:avLst>
+              <a:gd name="adj" fmla="val 16666"/>
+            </a:avLst>
+          </a:prstGeom>
+          <a:solidFill>
+            <a:srgbClr val="1F2125"/>
+          </a:solidFill>
+          <a:ln>
+            <a:noFill/>
+          </a:ln>
+        </p:spPr>
+        <p:txBody>
+          <a:bodyPr rtlCol="0" anchor="ctr"/>
+          <a:lstStyle/>
+          <a:p>
+            <a:pPr algn="ctr"/>
+          </a:p>
+        </p:txBody>
+      </p:sp>
+      <p:sp>
+        <p:nvSpPr>
+          <p:cNvPr id="20" name="Rounded Rectangle 19"/>
+          <p:cNvSpPr/>
+          <p:nvPr/>
+        </p:nvSpPr>
+        <p:spPr>
+          <a:xfrm>
+            <a:off x="2730500" y="2514600"/>
+            <a:ext cx="2552700" cy="228600"/>
+          </a:xfrm>
+          <a:prstGeom prst="roundRect">
+            <a:avLst>
+              <a:gd name="adj" fmla="val 16666"/>
+            </a:avLst>
+          </a:prstGeom>
+          <a:solidFill>
+            <a:srgbClr val="9EA1A7"/>
+          </a:solidFill>
+          <a:ln>
+            <a:noFill/>
+          </a:ln>
+        </p:spPr>
+        <p:txBody>
+          <a:bodyPr rtlCol="0" anchor="ctr"/>
+          <a:lstStyle/>
+          <a:p>
+            <a:pPr algn="ctr"/>
+          </a:p>
+        </p:txBody>
+      </p:sp>
+      <p:sp>
+        <p:nvSpPr>
+          <p:cNvPr id="21" name="TextBox 20"/>
+          <p:cNvSpPr txBox="1"/>
+          <p:nvPr/>
+        </p:nvSpPr>
+        <p:spPr>
+          <a:xfrm>
+            <a:off x="7162800" y="2489200"/>
+            <a:ext cx="1473200" cy="315468"/>
+          </a:xfrm>
+          <a:prstGeom prst="rect">
+            <a:avLst/>
+          </a:prstGeom>
+          <a:noFill/>
+        </p:spPr>
+        <p:txBody>
+          <a:bodyPr wrap="none" lIns="0" rIns="0" tIns="0" bIns="0" anchor="t">
+            <a:spAutoFit/>
+          </a:bodyPr>
+          <a:lstStyle/>
+          <a:p>
+            <a:pPr>
+              <a:defRPr sz="1600" b="1">
+                <a:solidFill>
+                  <a:srgbClr val="F4F4F5"/>
+                </a:solidFill>
+                <a:latin typeface="Arial"/>
+              </a:defRPr>
+            </a:pPr>
+            <a:r>
+              <a:t>−11.4</a:t>
+            </a:r>
+          </a:p>
+        </p:txBody>
+      </p:sp>
+      <p:sp>
+        <p:nvSpPr>
+          <p:cNvPr id="22" name="TextBox 21"/>
+          <p:cNvSpPr txBox="1"/>
+          <p:nvPr/>
+        </p:nvSpPr>
+        <p:spPr>
+          <a:xfrm>
+            <a:off x="508000" y="2971800"/>
+            <a:ext cx="2095500" cy="283972"/>
+          </a:xfrm>
+          <a:prstGeom prst="rect">
+            <a:avLst/>
+          </a:prstGeom>
+          <a:noFill/>
+        </p:spPr>
+        <p:txBody>
+          <a:bodyPr wrap="none" lIns="0" rIns="0" tIns="0" bIns="0" anchor="t">
+            <a:spAutoFit/>
+          </a:bodyPr>
+          <a:lstStyle/>
+          <a:p>
+            <a:pPr>
+              <a:defRPr sz="1400" b="0">
+                <a:solidFill>
+                  <a:srgbClr val="F4F4F5"/>
+                </a:solidFill>
+                <a:latin typeface="Arial"/>
+              </a:defRPr>
+            </a:pPr>
+            <a:r>
+              <a:t>Recta de ride</a:t>
+            </a:r>
+          </a:p>
+        </p:txBody>
+      </p:sp>
+      <p:sp>
+        <p:nvSpPr>
+          <p:cNvPr id="23" name="Rounded Rectangle 22"/>
+          <p:cNvSpPr/>
+          <p:nvPr/>
+        </p:nvSpPr>
+        <p:spPr>
+          <a:xfrm>
+            <a:off x="2730500" y="2997200"/>
+            <a:ext cx="4254500" cy="228600"/>
+          </a:xfrm>
+          <a:prstGeom prst="roundRect">
+            <a:avLst>
+              <a:gd name="adj" fmla="val 16666"/>
+            </a:avLst>
+          </a:prstGeom>
+          <a:solidFill>
+            <a:srgbClr val="1F2125"/>
+          </a:solidFill>
+          <a:ln>
+            <a:noFill/>
+          </a:ln>
+        </p:spPr>
+        <p:txBody>
+          <a:bodyPr rtlCol="0" anchor="ctr"/>
+          <a:lstStyle/>
+          <a:p>
+            <a:pPr algn="ctr"/>
+          </a:p>
+        </p:txBody>
+      </p:sp>
+      <p:sp>
+        <p:nvSpPr>
+          <p:cNvPr id="24" name="Rounded Rectangle 23"/>
+          <p:cNvSpPr/>
+          <p:nvPr/>
+        </p:nvSpPr>
+        <p:spPr>
+          <a:xfrm>
+            <a:off x="2730500" y="2997200"/>
+            <a:ext cx="4008186" cy="228600"/>
+          </a:xfrm>
+          <a:prstGeom prst="roundRect">
+            <a:avLst>
+              <a:gd name="adj" fmla="val 16666"/>
+            </a:avLst>
           </a:prstGeom>
           <a:solidFill>
             <a:srgbClr val="D71920"/>
@@ -8015,232 +9412,30 @@
       </p:sp>
       <p:sp>
         <p:nvSpPr>
-          <p:cNvPr id="14" name="TextBox 13"/>
-          <p:cNvSpPr txBox="1"/>
-          <p:nvPr/>
-        </p:nvSpPr>
-        <p:spPr>
-          <a:xfrm>
-            <a:off x="7137400" y="2247900"/>
-            <a:ext cx="1498600" cy="331216"/>
-          </a:xfrm>
-          <a:prstGeom prst="rect">
-            <a:avLst/>
-          </a:prstGeom>
-          <a:noFill/>
-        </p:spPr>
-        <p:txBody>
-          <a:bodyPr wrap="none" lIns="0" rIns="0" tIns="0" bIns="0" anchor="t">
-            <a:spAutoFit/>
-          </a:bodyPr>
-          <a:lstStyle/>
-          <a:p>
-            <a:pPr>
-              <a:defRPr sz="1700" b="1">
-                <a:solidFill>
-                  <a:srgbClr val="202124"/>
-                </a:solidFill>
-                <a:latin typeface="Arial"/>
-              </a:defRPr>
-            </a:pPr>
-            <a:r>
-              <a:t>−9.6</a:t>
-            </a:r>
-          </a:p>
-        </p:txBody>
-      </p:sp>
-      <p:sp>
-        <p:nvSpPr>
-          <p:cNvPr id="15" name="TextBox 14"/>
-          <p:cNvSpPr txBox="1"/>
-          <p:nvPr/>
-        </p:nvSpPr>
-        <p:spPr>
-          <a:xfrm>
-            <a:off x="508000" y="2768600"/>
-            <a:ext cx="2095500" cy="299720"/>
-          </a:xfrm>
-          <a:prstGeom prst="rect">
-            <a:avLst/>
-          </a:prstGeom>
-          <a:noFill/>
-        </p:spPr>
-        <p:txBody>
-          <a:bodyPr wrap="none" lIns="0" rIns="0" tIns="0" bIns="0" anchor="t">
-            <a:spAutoFit/>
-          </a:bodyPr>
-          <a:lstStyle/>
-          <a:p>
-            <a:pPr>
-              <a:defRPr sz="1500" b="0">
-                <a:solidFill>
-                  <a:srgbClr val="202124"/>
-                </a:solidFill>
-                <a:latin typeface="Arial"/>
-              </a:defRPr>
-            </a:pPr>
-            <a:r>
-              <a:t>Recta 4S</a:t>
-            </a:r>
-          </a:p>
-        </p:txBody>
-      </p:sp>
-      <p:sp>
-        <p:nvSpPr>
-          <p:cNvPr id="16" name="Rectangle 15"/>
-          <p:cNvSpPr/>
-          <p:nvPr/>
-        </p:nvSpPr>
-        <p:spPr>
-          <a:xfrm>
-            <a:off x="2730500" y="2819400"/>
-            <a:ext cx="2552700" cy="228600"/>
-          </a:xfrm>
-          <a:prstGeom prst="rect">
-            <a:avLst/>
-          </a:prstGeom>
-          <a:solidFill>
-            <a:srgbClr val="D71920"/>
-          </a:solidFill>
-          <a:ln>
-            <a:noFill/>
-          </a:ln>
-        </p:spPr>
-        <p:txBody>
-          <a:bodyPr rtlCol="0" anchor="ctr"/>
-          <a:lstStyle/>
-          <a:p>
-            <a:pPr algn="ctr"/>
-          </a:p>
-        </p:txBody>
-      </p:sp>
-      <p:sp>
-        <p:nvSpPr>
-          <p:cNvPr id="17" name="TextBox 16"/>
-          <p:cNvSpPr txBox="1"/>
-          <p:nvPr/>
-        </p:nvSpPr>
-        <p:spPr>
-          <a:xfrm>
-            <a:off x="7137400" y="2755900"/>
-            <a:ext cx="1498600" cy="331216"/>
-          </a:xfrm>
-          <a:prstGeom prst="rect">
-            <a:avLst/>
-          </a:prstGeom>
-          <a:noFill/>
-        </p:spPr>
-        <p:txBody>
-          <a:bodyPr wrap="none" lIns="0" rIns="0" tIns="0" bIns="0" anchor="t">
-            <a:spAutoFit/>
-          </a:bodyPr>
-          <a:lstStyle/>
-          <a:p>
-            <a:pPr>
-              <a:defRPr sz="1700" b="1">
-                <a:solidFill>
-                  <a:srgbClr val="202124"/>
-                </a:solidFill>
-                <a:latin typeface="Arial"/>
-              </a:defRPr>
-            </a:pPr>
-            <a:r>
-              <a:t>−11.4</a:t>
-            </a:r>
-          </a:p>
-        </p:txBody>
-      </p:sp>
-      <p:sp>
-        <p:nvSpPr>
-          <p:cNvPr id="18" name="TextBox 17"/>
-          <p:cNvSpPr txBox="1"/>
-          <p:nvPr/>
-        </p:nvSpPr>
-        <p:spPr>
-          <a:xfrm>
-            <a:off x="508000" y="3276600"/>
-            <a:ext cx="2095500" cy="299720"/>
-          </a:xfrm>
-          <a:prstGeom prst="rect">
-            <a:avLst/>
-          </a:prstGeom>
-          <a:noFill/>
-        </p:spPr>
-        <p:txBody>
-          <a:bodyPr wrap="none" lIns="0" rIns="0" tIns="0" bIns="0" anchor="t">
-            <a:spAutoFit/>
-          </a:bodyPr>
-          <a:lstStyle/>
-          <a:p>
-            <a:pPr>
-              <a:defRPr sz="1500" b="0">
-                <a:solidFill>
-                  <a:srgbClr val="202124"/>
-                </a:solidFill>
-                <a:latin typeface="Arial"/>
-              </a:defRPr>
-            </a:pPr>
-            <a:r>
-              <a:t>Recta de ride</a:t>
-            </a:r>
-          </a:p>
-        </p:txBody>
-      </p:sp>
-      <p:sp>
-        <p:nvSpPr>
-          <p:cNvPr id="19" name="Rectangle 18"/>
-          <p:cNvSpPr/>
-          <p:nvPr/>
-        </p:nvSpPr>
-        <p:spPr>
-          <a:xfrm>
-            <a:off x="2730500" y="3327400"/>
-            <a:ext cx="4008186" cy="228600"/>
-          </a:xfrm>
-          <a:prstGeom prst="rect">
-            <a:avLst/>
-          </a:prstGeom>
-          <a:solidFill>
-            <a:srgbClr val="D71920"/>
-          </a:solidFill>
-          <a:ln>
-            <a:noFill/>
-          </a:ln>
-        </p:spPr>
-        <p:txBody>
-          <a:bodyPr rtlCol="0" anchor="ctr"/>
-          <a:lstStyle/>
-          <a:p>
-            <a:pPr algn="ctr"/>
-          </a:p>
-        </p:txBody>
-      </p:sp>
-      <p:sp>
-        <p:nvSpPr>
-          <p:cNvPr id="20" name="TextBox 19"/>
-          <p:cNvSpPr txBox="1"/>
-          <p:nvPr/>
-        </p:nvSpPr>
-        <p:spPr>
-          <a:xfrm>
-            <a:off x="7137400" y="3263900"/>
-            <a:ext cx="1498600" cy="331216"/>
-          </a:xfrm>
-          <a:prstGeom prst="rect">
-            <a:avLst/>
-          </a:prstGeom>
-          <a:noFill/>
-        </p:spPr>
-        <p:txBody>
-          <a:bodyPr wrap="none" lIns="0" rIns="0" tIns="0" bIns="0" anchor="t">
-            <a:spAutoFit/>
-          </a:bodyPr>
-          <a:lstStyle/>
-          <a:p>
-            <a:pPr>
-              <a:defRPr sz="1700" b="1">
-                <a:solidFill>
-                  <a:srgbClr val="202124"/>
+          <p:cNvPr id="25" name="TextBox 24"/>
+          <p:cNvSpPr txBox="1"/>
+          <p:nvPr/>
+        </p:nvSpPr>
+        <p:spPr>
+          <a:xfrm>
+            <a:off x="7162800" y="2971800"/>
+            <a:ext cx="1473200" cy="315468"/>
+          </a:xfrm>
+          <a:prstGeom prst="rect">
+            <a:avLst/>
+          </a:prstGeom>
+          <a:noFill/>
+        </p:spPr>
+        <p:txBody>
+          <a:bodyPr wrap="none" lIns="0" rIns="0" tIns="0" bIns="0" anchor="t">
+            <a:spAutoFit/>
+          </a:bodyPr>
+          <a:lstStyle/>
+          <a:p>
+            <a:pPr>
+              <a:defRPr sz="1600" b="1">
+                <a:solidFill>
+                  <a:srgbClr val="F4F4F5"/>
                 </a:solidFill>
                 <a:latin typeface="Arial"/>
               </a:defRPr>
@@ -8253,30 +9448,30 @@
       </p:sp>
       <p:sp>
         <p:nvSpPr>
-          <p:cNvPr id="21" name="TextBox 20"/>
-          <p:cNvSpPr txBox="1"/>
-          <p:nvPr/>
-        </p:nvSpPr>
-        <p:spPr>
-          <a:xfrm>
-            <a:off x="508000" y="4025900"/>
-            <a:ext cx="8128000" cy="283972"/>
-          </a:xfrm>
-          <a:prstGeom prst="rect">
-            <a:avLst/>
-          </a:prstGeom>
-          <a:noFill/>
-        </p:spPr>
-        <p:txBody>
-          <a:bodyPr wrap="none" lIns="0" rIns="0" tIns="0" bIns="0" anchor="t">
-            <a:spAutoFit/>
-          </a:bodyPr>
-          <a:lstStyle/>
-          <a:p>
-            <a:pPr>
-              <a:defRPr sz="1400" b="0">
-                <a:solidFill>
-                  <a:srgbClr val="585B60"/>
+          <p:cNvPr id="26" name="TextBox 25"/>
+          <p:cNvSpPr txBox="1"/>
+          <p:nvPr/>
+        </p:nvSpPr>
+        <p:spPr>
+          <a:xfrm>
+            <a:off x="508000" y="3860800"/>
+            <a:ext cx="8128000" cy="252476"/>
+          </a:xfrm>
+          <a:prstGeom prst="rect">
+            <a:avLst/>
+          </a:prstGeom>
+          <a:noFill/>
+        </p:spPr>
+        <p:txBody>
+          <a:bodyPr wrap="none" lIns="0" rIns="0" tIns="0" bIns="0" anchor="t">
+            <a:spAutoFit/>
+          </a:bodyPr>
+          <a:lstStyle/>
+          <a:p>
+            <a:pPr>
+              <a:defRPr sz="1200" b="0">
+                <a:solidFill>
+                  <a:srgbClr val="9EA1A7"/>
                 </a:solidFill>
                 <a:latin typeface="Arial"/>
               </a:defRPr>
@@ -8320,7 +9515,7 @@
             <a:avLst/>
           </a:prstGeom>
           <a:solidFill>
-            <a:srgbClr val="FFFFFF"/>
+            <a:srgbClr val="121316"/>
           </a:solidFill>
           <a:ln>
             <a:noFill/>
@@ -8342,8 +9537,8 @@
         </p:nvSpPr>
         <p:spPr>
           <a:xfrm>
-            <a:off x="508000" y="292100"/>
-            <a:ext cx="533400" cy="50800"/>
+            <a:off x="0" y="0"/>
+            <a:ext cx="76200" cy="5143500"/>
           </a:xfrm>
           <a:prstGeom prst="rect">
             <a:avLst/>
@@ -8365,30 +9560,59 @@
       </p:sp>
       <p:sp>
         <p:nvSpPr>
-          <p:cNvPr id="4" name="TextBox 3"/>
-          <p:cNvSpPr txBox="1"/>
-          <p:nvPr/>
-        </p:nvSpPr>
-        <p:spPr>
-          <a:xfrm>
-            <a:off x="1206500" y="203200"/>
-            <a:ext cx="7239000" cy="220979"/>
-          </a:xfrm>
-          <a:prstGeom prst="rect">
-            <a:avLst/>
-          </a:prstGeom>
-          <a:noFill/>
-        </p:spPr>
-        <p:txBody>
-          <a:bodyPr wrap="none" lIns="0" rIns="0" tIns="0" bIns="0" anchor="t">
-            <a:spAutoFit/>
-          </a:bodyPr>
-          <a:lstStyle/>
-          <a:p>
-            <a:pPr>
-              <a:defRPr sz="1000" b="0">
-                <a:solidFill>
-                  <a:srgbClr val="585B60"/>
+          <p:cNvPr id="4" name="Rectangle 3"/>
+          <p:cNvSpPr/>
+          <p:nvPr/>
+        </p:nvSpPr>
+        <p:spPr>
+          <a:xfrm>
+            <a:off x="508000" y="304800"/>
+            <a:ext cx="101600" cy="101600"/>
+          </a:xfrm>
+          <a:prstGeom prst="rect">
+            <a:avLst/>
+          </a:prstGeom>
+          <a:solidFill>
+            <a:srgbClr val="D71920"/>
+          </a:solidFill>
+          <a:ln>
+            <a:noFill/>
+          </a:ln>
+        </p:spPr>
+        <p:txBody>
+          <a:bodyPr rtlCol="0" anchor="ctr"/>
+          <a:lstStyle/>
+          <a:p>
+            <a:pPr algn="ctr"/>
+          </a:p>
+        </p:txBody>
+      </p:sp>
+      <p:sp>
+        <p:nvSpPr>
+          <p:cNvPr id="5" name="TextBox 4"/>
+          <p:cNvSpPr txBox="1"/>
+          <p:nvPr/>
+        </p:nvSpPr>
+        <p:spPr>
+          <a:xfrm>
+            <a:off x="711200" y="241300"/>
+            <a:ext cx="6096000" cy="205232"/>
+          </a:xfrm>
+          <a:prstGeom prst="rect">
+            <a:avLst/>
+          </a:prstGeom>
+          <a:noFill/>
+        </p:spPr>
+        <p:txBody>
+          <a:bodyPr wrap="none" lIns="0" rIns="0" tIns="0" bIns="0" anchor="t">
+            <a:spAutoFit/>
+          </a:bodyPr>
+          <a:lstStyle/>
+          <a:p>
+            <a:pPr>
+              <a:defRPr sz="900" b="1">
+                <a:solidFill>
+                  <a:srgbClr val="9EA1A7"/>
                 </a:solidFill>
                 <a:latin typeface="Arial"/>
               </a:defRPr>
@@ -8401,30 +9625,66 @@
       </p:sp>
       <p:sp>
         <p:nvSpPr>
-          <p:cNvPr id="5" name="TextBox 4"/>
-          <p:cNvSpPr txBox="1"/>
-          <p:nvPr/>
-        </p:nvSpPr>
-        <p:spPr>
-          <a:xfrm>
-            <a:off x="508000" y="647700"/>
-            <a:ext cx="8128000" cy="457200"/>
-          </a:xfrm>
-          <a:prstGeom prst="rect">
-            <a:avLst/>
-          </a:prstGeom>
-          <a:noFill/>
-        </p:spPr>
-        <p:txBody>
-          <a:bodyPr wrap="none" lIns="0" rIns="0" tIns="0" bIns="0" anchor="t">
-            <a:spAutoFit/>
-          </a:bodyPr>
-          <a:lstStyle/>
-          <a:p>
-            <a:pPr>
-              <a:defRPr sz="2600" b="1">
-                <a:solidFill>
-                  <a:srgbClr val="202124"/>
+          <p:cNvPr id="6" name="TextBox 5"/>
+          <p:cNvSpPr txBox="1"/>
+          <p:nvPr/>
+        </p:nvSpPr>
+        <p:spPr>
+          <a:xfrm>
+            <a:off x="8331200" y="241300"/>
+            <a:ext cx="381000" cy="236728"/>
+          </a:xfrm>
+          <a:prstGeom prst="rect">
+            <a:avLst/>
+          </a:prstGeom>
+          <a:noFill/>
+        </p:spPr>
+        <p:txBody>
+          <a:bodyPr wrap="none" lIns="0" rIns="0" tIns="0" bIns="0" anchor="t">
+            <a:spAutoFit/>
+          </a:bodyPr>
+          <a:lstStyle/>
+          <a:p>
+            <a:pPr>
+              <a:defRPr sz="1100" b="1">
+                <a:solidFill>
+                  <a:srgbClr val="D71920"/>
+                </a:solidFill>
+                <a:latin typeface="Arial"/>
+              </a:defRPr>
+            </a:pPr>
+            <a:r>
+              <a:t>07</a:t>
+            </a:r>
+          </a:p>
+        </p:txBody>
+      </p:sp>
+      <p:sp>
+        <p:nvSpPr>
+          <p:cNvPr id="7" name="TextBox 6"/>
+          <p:cNvSpPr txBox="1"/>
+          <p:nvPr/>
+        </p:nvSpPr>
+        <p:spPr>
+          <a:xfrm>
+            <a:off x="508000" y="584200"/>
+            <a:ext cx="8128000" cy="444500"/>
+          </a:xfrm>
+          <a:prstGeom prst="rect">
+            <a:avLst/>
+          </a:prstGeom>
+          <a:noFill/>
+        </p:spPr>
+        <p:txBody>
+          <a:bodyPr wrap="none" lIns="0" rIns="0" tIns="0" bIns="0" anchor="t">
+            <a:spAutoFit/>
+          </a:bodyPr>
+          <a:lstStyle/>
+          <a:p>
+            <a:pPr>
+              <a:defRPr sz="2500" b="1">
+                <a:solidFill>
+                  <a:srgbClr val="F4F4F5"/>
                 </a:solidFill>
                 <a:latin typeface="Arial"/>
               </a:defRPr>
@@ -8437,30 +9697,30 @@
       </p:sp>
       <p:sp>
         <p:nvSpPr>
-          <p:cNvPr id="6" name="TextBox 5"/>
-          <p:cNvSpPr txBox="1"/>
-          <p:nvPr/>
-        </p:nvSpPr>
-        <p:spPr>
-          <a:xfrm>
-            <a:off x="508000" y="1041400"/>
-            <a:ext cx="8128000" cy="457200"/>
-          </a:xfrm>
-          <a:prstGeom prst="rect">
-            <a:avLst/>
-          </a:prstGeom>
-          <a:noFill/>
-        </p:spPr>
-        <p:txBody>
-          <a:bodyPr wrap="none" lIns="0" rIns="0" tIns="0" bIns="0" anchor="t">
-            <a:spAutoFit/>
-          </a:bodyPr>
-          <a:lstStyle/>
-          <a:p>
-            <a:pPr>
-              <a:defRPr sz="2600" b="1">
-                <a:solidFill>
-                  <a:srgbClr val="202124"/>
+          <p:cNvPr id="8" name="TextBox 7"/>
+          <p:cNvSpPr txBox="1"/>
+          <p:nvPr/>
+        </p:nvSpPr>
+        <p:spPr>
+          <a:xfrm>
+            <a:off x="508000" y="965200"/>
+            <a:ext cx="8128000" cy="444500"/>
+          </a:xfrm>
+          <a:prstGeom prst="rect">
+            <a:avLst/>
+          </a:prstGeom>
+          <a:noFill/>
+        </p:spPr>
+        <p:txBody>
+          <a:bodyPr wrap="none" lIns="0" rIns="0" tIns="0" bIns="0" anchor="t">
+            <a:spAutoFit/>
+          </a:bodyPr>
+          <a:lstStyle/>
+          <a:p>
+            <a:pPr>
+              <a:defRPr sz="2500" b="1">
+                <a:solidFill>
+                  <a:srgbClr val="F4F4F5"/>
                 </a:solidFill>
                 <a:latin typeface="Arial"/>
               </a:defRPr>
@@ -8473,30 +9733,59 @@
       </p:sp>
       <p:sp>
         <p:nvSpPr>
-          <p:cNvPr id="7" name="TextBox 6"/>
-          <p:cNvSpPr txBox="1"/>
-          <p:nvPr/>
-        </p:nvSpPr>
-        <p:spPr>
-          <a:xfrm>
-            <a:off x="508000" y="4495800"/>
-            <a:ext cx="7620000" cy="196850"/>
-          </a:xfrm>
-          <a:prstGeom prst="rect">
-            <a:avLst/>
-          </a:prstGeom>
-          <a:noFill/>
-        </p:spPr>
-        <p:txBody>
-          <a:bodyPr wrap="none" lIns="0" rIns="0" tIns="0" bIns="0" anchor="t">
-            <a:spAutoFit/>
-          </a:bodyPr>
-          <a:lstStyle/>
-          <a:p>
-            <a:pPr>
-              <a:defRPr sz="800" b="0">
-                <a:solidFill>
-                  <a:srgbClr val="585B60"/>
+          <p:cNvPr id="9" name="Rectangle 8"/>
+          <p:cNvSpPr/>
+          <p:nvPr/>
+        </p:nvSpPr>
+        <p:spPr>
+          <a:xfrm>
+            <a:off x="508000" y="4572000"/>
+            <a:ext cx="8128000" cy="10160"/>
+          </a:xfrm>
+          <a:prstGeom prst="rect">
+            <a:avLst/>
+          </a:prstGeom>
+          <a:solidFill>
+            <a:srgbClr val="1F2125"/>
+          </a:solidFill>
+          <a:ln>
+            <a:noFill/>
+          </a:ln>
+        </p:spPr>
+        <p:txBody>
+          <a:bodyPr rtlCol="0" anchor="ctr"/>
+          <a:lstStyle/>
+          <a:p>
+            <a:pPr algn="ctr"/>
+          </a:p>
+        </p:txBody>
+      </p:sp>
+      <p:sp>
+        <p:nvSpPr>
+          <p:cNvPr id="10" name="TextBox 9"/>
+          <p:cNvSpPr txBox="1"/>
+          <p:nvPr/>
+        </p:nvSpPr>
+        <p:spPr>
+          <a:xfrm>
+            <a:off x="508000" y="4660900"/>
+            <a:ext cx="7747000" cy="190500"/>
+          </a:xfrm>
+          <a:prstGeom prst="rect">
+            <a:avLst/>
+          </a:prstGeom>
+          <a:noFill/>
+        </p:spPr>
+        <p:txBody>
+          <a:bodyPr wrap="none" lIns="0" rIns="0" tIns="0" bIns="0" anchor="t">
+            <a:spAutoFit/>
+          </a:bodyPr>
+          <a:lstStyle/>
+          <a:p>
+            <a:pPr>
+              <a:defRPr sz="750" b="0">
+                <a:solidFill>
+                  <a:srgbClr val="9EA1A7"/>
                 </a:solidFill>
                 <a:latin typeface="Arial"/>
               </a:defRPr>
@@ -8509,64 +9798,95 @@
       </p:sp>
       <p:sp>
         <p:nvSpPr>
-          <p:cNvPr id="8" name="TextBox 7"/>
-          <p:cNvSpPr txBox="1"/>
-          <p:nvPr/>
-        </p:nvSpPr>
-        <p:spPr>
-          <a:xfrm>
-            <a:off x="8255000" y="4813300"/>
-            <a:ext cx="381000" cy="220979"/>
-          </a:xfrm>
-          <a:prstGeom prst="rect">
-            <a:avLst/>
-          </a:prstGeom>
-          <a:noFill/>
-        </p:spPr>
-        <p:txBody>
-          <a:bodyPr wrap="none" lIns="0" rIns="0" tIns="0" bIns="0" anchor="t">
-            <a:spAutoFit/>
-          </a:bodyPr>
-          <a:lstStyle/>
-          <a:p>
-            <a:pPr>
-              <a:defRPr sz="1000" b="0">
-                <a:solidFill>
-                  <a:srgbClr val="585B60"/>
-                </a:solidFill>
-                <a:latin typeface="Arial"/>
-              </a:defRPr>
-            </a:pPr>
-            <a:r>
-              <a:t>07</a:t>
-            </a:r>
-          </a:p>
-        </p:txBody>
-      </p:sp>
-      <p:sp>
-        <p:nvSpPr>
-          <p:cNvPr id="9" name="TextBox 8"/>
-          <p:cNvSpPr txBox="1"/>
-          <p:nvPr/>
-        </p:nvSpPr>
-        <p:spPr>
-          <a:xfrm>
-            <a:off x="508000" y="1701800"/>
-            <a:ext cx="3810000" cy="331216"/>
-          </a:xfrm>
-          <a:prstGeom prst="rect">
-            <a:avLst/>
-          </a:prstGeom>
-          <a:noFill/>
-        </p:spPr>
-        <p:txBody>
-          <a:bodyPr wrap="none" lIns="0" rIns="0" tIns="0" bIns="0" anchor="t">
-            <a:spAutoFit/>
-          </a:bodyPr>
-          <a:lstStyle/>
-          <a:p>
-            <a:pPr>
-              <a:defRPr sz="1700" b="1">
+          <p:cNvPr id="11" name="Rounded Rectangle 10"/>
+          <p:cNvSpPr/>
+          <p:nvPr/>
+        </p:nvSpPr>
+        <p:spPr>
+          <a:xfrm>
+            <a:off x="508000" y="1498600"/>
+            <a:ext cx="4013200" cy="2006600"/>
+          </a:xfrm>
+          <a:prstGeom prst="roundRect">
+            <a:avLst>
+              <a:gd name="adj" fmla="val 3797"/>
+            </a:avLst>
+          </a:prstGeom>
+          <a:solidFill>
+            <a:srgbClr val="1F2125"/>
+          </a:solidFill>
+          <a:ln>
+            <a:noFill/>
+          </a:ln>
+        </p:spPr>
+        <p:txBody>
+          <a:bodyPr rtlCol="0" anchor="ctr"/>
+          <a:lstStyle/>
+          <a:p>
+            <a:pPr algn="ctr"/>
+          </a:p>
+        </p:txBody>
+      </p:sp>
+      <p:sp>
+        <p:nvSpPr>
+          <p:cNvPr id="12" name="TextBox 11"/>
+          <p:cNvSpPr txBox="1"/>
+          <p:nvPr/>
+        </p:nvSpPr>
+        <p:spPr>
+          <a:xfrm>
+            <a:off x="736600" y="1651000"/>
+            <a:ext cx="3556000" cy="283972"/>
+          </a:xfrm>
+          <a:prstGeom prst="rect">
+            <a:avLst/>
+          </a:prstGeom>
+          <a:noFill/>
+        </p:spPr>
+        <p:txBody>
+          <a:bodyPr wrap="none" lIns="0" rIns="0" tIns="0" bIns="0" anchor="t">
+            <a:spAutoFit/>
+          </a:bodyPr>
+          <a:lstStyle/>
+          <a:p>
+            <a:pPr>
+              <a:defRPr sz="1400" b="1">
+                <a:solidFill>
+                  <a:srgbClr val="9EA1A7"/>
+                </a:solidFill>
+                <a:latin typeface="Arial"/>
+              </a:defRPr>
+            </a:pPr>
+            <a:r>
+              <a:t>Franquicia 5</a:t>
+            </a:r>
+          </a:p>
+        </p:txBody>
+      </p:sp>
+      <p:sp>
+        <p:nvSpPr>
+          <p:cNvPr id="13" name="TextBox 12"/>
+          <p:cNvSpPr txBox="1"/>
+          <p:nvPr/>
+        </p:nvSpPr>
+        <p:spPr>
+          <a:xfrm>
+            <a:off x="736600" y="1955800"/>
+            <a:ext cx="3556000" cy="567436"/>
+          </a:xfrm>
+          <a:prstGeom prst="rect">
+            <a:avLst/>
+          </a:prstGeom>
+          <a:noFill/>
+        </p:spPr>
+        <p:txBody>
+          <a:bodyPr wrap="none" lIns="0" rIns="0" tIns="0" bIns="0" anchor="t">
+            <a:spAutoFit/>
+          </a:bodyPr>
+          <a:lstStyle/>
+          <a:p>
+            <a:pPr>
+              <a:defRPr sz="3200" b="1">
                 <a:solidFill>
                   <a:srgbClr val="D71920"/>
                 </a:solidFill>
@@ -8574,35 +9894,174 @@
               </a:defRPr>
             </a:pPr>
             <a:r>
-              <a:t>Franquicia 5</a:t>
-            </a:r>
-          </a:p>
-        </p:txBody>
-      </p:sp>
-      <p:sp>
-        <p:nvSpPr>
-          <p:cNvPr id="10" name="TextBox 9"/>
-          <p:cNvSpPr txBox="1"/>
-          <p:nvPr/>
-        </p:nvSpPr>
-        <p:spPr>
-          <a:xfrm>
-            <a:off x="508000" y="2032000"/>
-            <a:ext cx="3810000" cy="535940"/>
-          </a:xfrm>
-          <a:prstGeom prst="rect">
-            <a:avLst/>
-          </a:prstGeom>
-          <a:noFill/>
-        </p:spPr>
-        <p:txBody>
-          <a:bodyPr wrap="none" lIns="0" rIns="0" tIns="0" bIns="0" anchor="t">
-            <a:spAutoFit/>
-          </a:bodyPr>
-          <a:lstStyle/>
-          <a:p>
-            <a:pPr>
-              <a:defRPr sz="3000" b="1">
+              <a:t>6.5 carreras</a:t>
+            </a:r>
+          </a:p>
+        </p:txBody>
+      </p:sp>
+      <p:sp>
+        <p:nvSpPr>
+          <p:cNvPr id="14" name="TextBox 13"/>
+          <p:cNvSpPr txBox="1"/>
+          <p:nvPr/>
+        </p:nvSpPr>
+        <p:spPr>
+          <a:xfrm>
+            <a:off x="736600" y="2540000"/>
+            <a:ext cx="3556000" cy="299720"/>
+          </a:xfrm>
+          <a:prstGeom prst="rect">
+            <a:avLst/>
+          </a:prstGeom>
+          <a:noFill/>
+        </p:spPr>
+        <p:txBody>
+          <a:bodyPr wrap="none" lIns="0" rIns="0" tIns="0" bIns="0" anchor="t">
+            <a:spAutoFit/>
+          </a:bodyPr>
+          <a:lstStyle/>
+          <a:p>
+            <a:pPr>
+              <a:defRPr sz="1500" b="0">
+                <a:solidFill>
+                  <a:srgbClr val="F4F4F5"/>
+                </a:solidFill>
+                <a:latin typeface="Arial"/>
+              </a:defRPr>
+            </a:pPr>
+            <a:r>
+              <a:t>0.46 victorias por temporada</a:t>
+            </a:r>
+          </a:p>
+        </p:txBody>
+      </p:sp>
+      <p:sp>
+        <p:nvSpPr>
+          <p:cNvPr id="15" name="TextBox 14"/>
+          <p:cNvSpPr txBox="1"/>
+          <p:nvPr/>
+        </p:nvSpPr>
+        <p:spPr>
+          <a:xfrm>
+            <a:off x="736600" y="2971800"/>
+            <a:ext cx="3556000" cy="268224"/>
+          </a:xfrm>
+          <a:prstGeom prst="rect">
+            <a:avLst/>
+          </a:prstGeom>
+          <a:noFill/>
+        </p:spPr>
+        <p:txBody>
+          <a:bodyPr wrap="none" lIns="0" rIns="0" tIns="0" bIns="0" anchor="t">
+            <a:spAutoFit/>
+          </a:bodyPr>
+          <a:lstStyle/>
+          <a:p>
+            <a:pPr>
+              <a:defRPr sz="1300" b="0">
+                <a:solidFill>
+                  <a:srgbClr val="9EA1A7"/>
+                </a:solidFill>
+                <a:latin typeface="Arial"/>
+              </a:defRPr>
+            </a:pPr>
+            <a:r>
+              <a:t>Mezcla 5.2 · aperturas 1.4</a:t>
+            </a:r>
+          </a:p>
+        </p:txBody>
+      </p:sp>
+      <p:sp>
+        <p:nvSpPr>
+          <p:cNvPr id="16" name="Rounded Rectangle 15"/>
+          <p:cNvSpPr/>
+          <p:nvPr/>
+        </p:nvSpPr>
+        <p:spPr>
+          <a:xfrm>
+            <a:off x="4622800" y="1498600"/>
+            <a:ext cx="4013200" cy="2006600"/>
+          </a:xfrm>
+          <a:prstGeom prst="roundRect">
+            <a:avLst>
+              <a:gd name="adj" fmla="val 3797"/>
+            </a:avLst>
+          </a:prstGeom>
+          <a:solidFill>
+            <a:srgbClr val="1F2125"/>
+          </a:solidFill>
+          <a:ln>
+            <a:noFill/>
+          </a:ln>
+        </p:spPr>
+        <p:txBody>
+          <a:bodyPr rtlCol="0" anchor="ctr"/>
+          <a:lstStyle/>
+          <a:p>
+            <a:pPr algn="ctr"/>
+          </a:p>
+        </p:txBody>
+      </p:sp>
+      <p:sp>
+        <p:nvSpPr>
+          <p:cNvPr id="17" name="TextBox 16"/>
+          <p:cNvSpPr txBox="1"/>
+          <p:nvPr/>
+        </p:nvSpPr>
+        <p:spPr>
+          <a:xfrm>
+            <a:off x="4851400" y="1651000"/>
+            <a:ext cx="3556000" cy="283972"/>
+          </a:xfrm>
+          <a:prstGeom prst="rect">
+            <a:avLst/>
+          </a:prstGeom>
+          <a:noFill/>
+        </p:spPr>
+        <p:txBody>
+          <a:bodyPr wrap="none" lIns="0" rIns="0" tIns="0" bIns="0" anchor="t">
+            <a:spAutoFit/>
+          </a:bodyPr>
+          <a:lstStyle/>
+          <a:p>
+            <a:pPr>
+              <a:defRPr sz="1400" b="1">
+                <a:solidFill>
+                  <a:srgbClr val="9EA1A7"/>
+                </a:solidFill>
+                <a:latin typeface="Arial"/>
+              </a:defRPr>
+            </a:pPr>
+            <a:r>
+              <a:t>Franquicia 11</a:t>
+            </a:r>
+          </a:p>
+        </p:txBody>
+      </p:sp>
+      <p:sp>
+        <p:nvSpPr>
+          <p:cNvPr id="18" name="TextBox 17"/>
+          <p:cNvSpPr txBox="1"/>
+          <p:nvPr/>
+        </p:nvSpPr>
+        <p:spPr>
+          <a:xfrm>
+            <a:off x="4851400" y="1955800"/>
+            <a:ext cx="3556000" cy="567436"/>
+          </a:xfrm>
+          <a:prstGeom prst="rect">
+            <a:avLst/>
+          </a:prstGeom>
+          <a:noFill/>
+        </p:spPr>
+        <p:txBody>
+          <a:bodyPr wrap="none" lIns="0" rIns="0" tIns="0" bIns="0" anchor="t">
+            <a:spAutoFit/>
+          </a:bodyPr>
+          <a:lstStyle/>
+          <a:p>
+            <a:pPr>
+              <a:defRPr sz="3200" b="1">
                 <a:solidFill>
                   <a:srgbClr val="D71920"/>
                 </a:solidFill>
@@ -8610,21 +10069,21 @@
               </a:defRPr>
             </a:pPr>
             <a:r>
-              <a:t>6.5 carreras</a:t>
-            </a:r>
-          </a:p>
-        </p:txBody>
-      </p:sp>
-      <p:sp>
-        <p:nvSpPr>
-          <p:cNvPr id="11" name="TextBox 10"/>
-          <p:cNvSpPr txBox="1"/>
-          <p:nvPr/>
-        </p:nvSpPr>
-        <p:spPr>
-          <a:xfrm>
-            <a:off x="508000" y="2514600"/>
-            <a:ext cx="3810000" cy="299720"/>
+              <a:t>4.5 carreras</a:t>
+            </a:r>
+          </a:p>
+        </p:txBody>
+      </p:sp>
+      <p:sp>
+        <p:nvSpPr>
+          <p:cNvPr id="19" name="TextBox 18"/>
+          <p:cNvSpPr txBox="1"/>
+          <p:nvPr/>
+        </p:nvSpPr>
+        <p:spPr>
+          <a:xfrm>
+            <a:off x="4851400" y="2540000"/>
+            <a:ext cx="3556000" cy="299720"/>
           </a:xfrm>
           <a:prstGeom prst="rect">
             <a:avLst/>
@@ -8640,151 +10099,7 @@
             <a:pPr>
               <a:defRPr sz="1500" b="0">
                 <a:solidFill>
-                  <a:srgbClr val="202124"/>
-                </a:solidFill>
-                <a:latin typeface="Arial"/>
-              </a:defRPr>
-            </a:pPr>
-            <a:r>
-              <a:t>0.46 victorias por temporada</a:t>
-            </a:r>
-          </a:p>
-        </p:txBody>
-      </p:sp>
-      <p:sp>
-        <p:nvSpPr>
-          <p:cNvPr id="12" name="TextBox 11"/>
-          <p:cNvSpPr txBox="1"/>
-          <p:nvPr/>
-        </p:nvSpPr>
-        <p:spPr>
-          <a:xfrm>
-            <a:off x="508000" y="2844800"/>
-            <a:ext cx="3810000" cy="283972"/>
-          </a:xfrm>
-          <a:prstGeom prst="rect">
-            <a:avLst/>
-          </a:prstGeom>
-          <a:noFill/>
-        </p:spPr>
-        <p:txBody>
-          <a:bodyPr wrap="none" lIns="0" rIns="0" tIns="0" bIns="0" anchor="t">
-            <a:spAutoFit/>
-          </a:bodyPr>
-          <a:lstStyle/>
-          <a:p>
-            <a:pPr>
-              <a:defRPr sz="1400" b="0">
-                <a:solidFill>
-                  <a:srgbClr val="585B60"/>
-                </a:solidFill>
-                <a:latin typeface="Arial"/>
-              </a:defRPr>
-            </a:pPr>
-            <a:r>
-              <a:t>Mezcla 5.2 · aperturas 1.4</a:t>
-            </a:r>
-          </a:p>
-        </p:txBody>
-      </p:sp>
-      <p:sp>
-        <p:nvSpPr>
-          <p:cNvPr id="13" name="TextBox 12"/>
-          <p:cNvSpPr txBox="1"/>
-          <p:nvPr/>
-        </p:nvSpPr>
-        <p:spPr>
-          <a:xfrm>
-            <a:off x="4826000" y="1701800"/>
-            <a:ext cx="3810000" cy="331216"/>
-          </a:xfrm>
-          <a:prstGeom prst="rect">
-            <a:avLst/>
-          </a:prstGeom>
-          <a:noFill/>
-        </p:spPr>
-        <p:txBody>
-          <a:bodyPr wrap="none" lIns="0" rIns="0" tIns="0" bIns="0" anchor="t">
-            <a:spAutoFit/>
-          </a:bodyPr>
-          <a:lstStyle/>
-          <a:p>
-            <a:pPr>
-              <a:defRPr sz="1700" b="1">
-                <a:solidFill>
-                  <a:srgbClr val="D71920"/>
-                </a:solidFill>
-                <a:latin typeface="Arial"/>
-              </a:defRPr>
-            </a:pPr>
-            <a:r>
-              <a:t>Franquicia 11</a:t>
-            </a:r>
-          </a:p>
-        </p:txBody>
-      </p:sp>
-      <p:sp>
-        <p:nvSpPr>
-          <p:cNvPr id="14" name="TextBox 13"/>
-          <p:cNvSpPr txBox="1"/>
-          <p:nvPr/>
-        </p:nvSpPr>
-        <p:spPr>
-          <a:xfrm>
-            <a:off x="4826000" y="2032000"/>
-            <a:ext cx="3810000" cy="535940"/>
-          </a:xfrm>
-          <a:prstGeom prst="rect">
-            <a:avLst/>
-          </a:prstGeom>
-          <a:noFill/>
-        </p:spPr>
-        <p:txBody>
-          <a:bodyPr wrap="none" lIns="0" rIns="0" tIns="0" bIns="0" anchor="t">
-            <a:spAutoFit/>
-          </a:bodyPr>
-          <a:lstStyle/>
-          <a:p>
-            <a:pPr>
-              <a:defRPr sz="3000" b="1">
-                <a:solidFill>
-                  <a:srgbClr val="D71920"/>
-                </a:solidFill>
-                <a:latin typeface="Arial"/>
-              </a:defRPr>
-            </a:pPr>
-            <a:r>
-              <a:t>4.5 carreras</a:t>
-            </a:r>
-          </a:p>
-        </p:txBody>
-      </p:sp>
-      <p:sp>
-        <p:nvSpPr>
-          <p:cNvPr id="15" name="TextBox 14"/>
-          <p:cNvSpPr txBox="1"/>
-          <p:nvPr/>
-        </p:nvSpPr>
-        <p:spPr>
-          <a:xfrm>
-            <a:off x="4826000" y="2514600"/>
-            <a:ext cx="3810000" cy="299720"/>
-          </a:xfrm>
-          <a:prstGeom prst="rect">
-            <a:avLst/>
-          </a:prstGeom>
-          <a:noFill/>
-        </p:spPr>
-        <p:txBody>
-          <a:bodyPr wrap="none" lIns="0" rIns="0" tIns="0" bIns="0" anchor="t">
-            <a:spAutoFit/>
-          </a:bodyPr>
-          <a:lstStyle/>
-          <a:p>
-            <a:pPr>
-              <a:defRPr sz="1500" b="0">
-                <a:solidFill>
-                  <a:srgbClr val="202124"/>
+                  <a:srgbClr val="F4F4F5"/>
                 </a:solidFill>
                 <a:latin typeface="Arial"/>
               </a:defRPr>
@@ -8797,30 +10112,30 @@
       </p:sp>
       <p:sp>
         <p:nvSpPr>
-          <p:cNvPr id="16" name="TextBox 15"/>
-          <p:cNvSpPr txBox="1"/>
-          <p:nvPr/>
-        </p:nvSpPr>
-        <p:spPr>
-          <a:xfrm>
-            <a:off x="4826000" y="2844800"/>
-            <a:ext cx="3810000" cy="283972"/>
-          </a:xfrm>
-          <a:prstGeom prst="rect">
-            <a:avLst/>
-          </a:prstGeom>
-          <a:noFill/>
-        </p:spPr>
-        <p:txBody>
-          <a:bodyPr wrap="none" lIns="0" rIns="0" tIns="0" bIns="0" anchor="t">
-            <a:spAutoFit/>
-          </a:bodyPr>
-          <a:lstStyle/>
-          <a:p>
-            <a:pPr>
-              <a:defRPr sz="1400" b="0">
-                <a:solidFill>
-                  <a:srgbClr val="585B60"/>
+          <p:cNvPr id="20" name="TextBox 19"/>
+          <p:cNvSpPr txBox="1"/>
+          <p:nvPr/>
+        </p:nvSpPr>
+        <p:spPr>
+          <a:xfrm>
+            <a:off x="4851400" y="2971800"/>
+            <a:ext cx="3556000" cy="268224"/>
+          </a:xfrm>
+          <a:prstGeom prst="rect">
+            <a:avLst/>
+          </a:prstGeom>
+          <a:noFill/>
+        </p:spPr>
+        <p:txBody>
+          <a:bodyPr wrap="none" lIns="0" rIns="0" tIns="0" bIns="0" anchor="t">
+            <a:spAutoFit/>
+          </a:bodyPr>
+          <a:lstStyle/>
+          <a:p>
+            <a:pPr>
+              <a:defRPr sz="1300" b="0">
+                <a:solidFill>
+                  <a:srgbClr val="9EA1A7"/>
                 </a:solidFill>
                 <a:latin typeface="Arial"/>
               </a:defRPr>
@@ -8833,30 +10148,30 @@
       </p:sp>
       <p:sp>
         <p:nvSpPr>
-          <p:cNvPr id="17" name="TextBox 16"/>
+          <p:cNvPr id="21" name="TextBox 20"/>
           <p:cNvSpPr txBox="1"/>
           <p:nvPr/>
         </p:nvSpPr>
         <p:spPr>
           <a:xfrm>
             <a:off x="508000" y="3657600"/>
-            <a:ext cx="8128000" cy="299720"/>
-          </a:xfrm>
-          <a:prstGeom prst="rect">
-            <a:avLst/>
-          </a:prstGeom>
-          <a:noFill/>
-        </p:spPr>
-        <p:txBody>
-          <a:bodyPr wrap="none" lIns="0" rIns="0" tIns="0" bIns="0" anchor="t">
-            <a:spAutoFit/>
-          </a:bodyPr>
-          <a:lstStyle/>
-          <a:p>
-            <a:pPr>
-              <a:defRPr sz="1500" b="0">
-                <a:solidFill>
-                  <a:srgbClr val="202124"/>
+            <a:ext cx="8128000" cy="279400"/>
+          </a:xfrm>
+          <a:prstGeom prst="rect">
+            <a:avLst/>
+          </a:prstGeom>
+          <a:noFill/>
+        </p:spPr>
+        <p:txBody>
+          <a:bodyPr wrap="none" lIns="0" rIns="0" tIns="0" bIns="0" anchor="t">
+            <a:spAutoFit/>
+          </a:bodyPr>
+          <a:lstStyle/>
+          <a:p>
+            <a:pPr>
+              <a:defRPr sz="1300" b="0">
+                <a:solidFill>
+                  <a:srgbClr val="F4F4F5"/>
                 </a:solidFill>
                 <a:latin typeface="Arial"/>
               </a:defRPr>
@@ -8869,30 +10184,30 @@
       </p:sp>
       <p:sp>
         <p:nvSpPr>
-          <p:cNvPr id="18" name="TextBox 17"/>
-          <p:cNvSpPr txBox="1"/>
-          <p:nvPr/>
-        </p:nvSpPr>
-        <p:spPr>
-          <a:xfrm>
-            <a:off x="508000" y="3893820"/>
-            <a:ext cx="8128000" cy="299720"/>
-          </a:xfrm>
-          <a:prstGeom prst="rect">
-            <a:avLst/>
-          </a:prstGeom>
-          <a:noFill/>
-        </p:spPr>
-        <p:txBody>
-          <a:bodyPr wrap="none" lIns="0" rIns="0" tIns="0" bIns="0" anchor="t">
-            <a:spAutoFit/>
-          </a:bodyPr>
-          <a:lstStyle/>
-          <a:p>
-            <a:pPr>
-              <a:defRPr sz="1500" b="0">
-                <a:solidFill>
-                  <a:srgbClr val="202124"/>
+          <p:cNvPr id="22" name="TextBox 21"/>
+          <p:cNvSpPr txBox="1"/>
+          <p:nvPr/>
+        </p:nvSpPr>
+        <p:spPr>
+          <a:xfrm>
+            <a:off x="508000" y="3873500"/>
+            <a:ext cx="8128000" cy="279400"/>
+          </a:xfrm>
+          <a:prstGeom prst="rect">
+            <a:avLst/>
+          </a:prstGeom>
+          <a:noFill/>
+        </p:spPr>
+        <p:txBody>
+          <a:bodyPr wrap="none" lIns="0" rIns="0" tIns="0" bIns="0" anchor="t">
+            <a:spAutoFit/>
+          </a:bodyPr>
+          <a:lstStyle/>
+          <a:p>
+            <a:pPr>
+              <a:defRPr sz="1300" b="0">
+                <a:solidFill>
+                  <a:srgbClr val="F4F4F5"/>
                 </a:solidFill>
                 <a:latin typeface="Arial"/>
               </a:defRPr>
@@ -8936,7 +10251,7 @@
             <a:avLst/>
           </a:prstGeom>
           <a:solidFill>
-            <a:srgbClr val="FFFFFF"/>
+            <a:srgbClr val="121316"/>
           </a:solidFill>
           <a:ln>
             <a:noFill/>
@@ -8958,8 +10273,8 @@
         </p:nvSpPr>
         <p:spPr>
           <a:xfrm>
-            <a:off x="508000" y="292100"/>
-            <a:ext cx="533400" cy="50800"/>
+            <a:off x="0" y="0"/>
+            <a:ext cx="76200" cy="5143500"/>
           </a:xfrm>
           <a:prstGeom prst="rect">
             <a:avLst/>
@@ -8981,30 +10296,59 @@
       </p:sp>
       <p:sp>
         <p:nvSpPr>
-          <p:cNvPr id="4" name="TextBox 3"/>
-          <p:cNvSpPr txBox="1"/>
-          <p:nvPr/>
-        </p:nvSpPr>
-        <p:spPr>
-          <a:xfrm>
-            <a:off x="1206500" y="203200"/>
-            <a:ext cx="7239000" cy="220979"/>
-          </a:xfrm>
-          <a:prstGeom prst="rect">
-            <a:avLst/>
-          </a:prstGeom>
-          <a:noFill/>
-        </p:spPr>
-        <p:txBody>
-          <a:bodyPr wrap="none" lIns="0" rIns="0" tIns="0" bIns="0" anchor="t">
-            <a:spAutoFit/>
-          </a:bodyPr>
-          <a:lstStyle/>
-          <a:p>
-            <a:pPr>
-              <a:defRPr sz="1000" b="0">
-                <a:solidFill>
-                  <a:srgbClr val="585B60"/>
+          <p:cNvPr id="4" name="Rectangle 3"/>
+          <p:cNvSpPr/>
+          <p:nvPr/>
+        </p:nvSpPr>
+        <p:spPr>
+          <a:xfrm>
+            <a:off x="508000" y="304800"/>
+            <a:ext cx="101600" cy="101600"/>
+          </a:xfrm>
+          <a:prstGeom prst="rect">
+            <a:avLst/>
+          </a:prstGeom>
+          <a:solidFill>
+            <a:srgbClr val="D71920"/>
+          </a:solidFill>
+          <a:ln>
+            <a:noFill/>
+          </a:ln>
+        </p:spPr>
+        <p:txBody>
+          <a:bodyPr rtlCol="0" anchor="ctr"/>
+          <a:lstStyle/>
+          <a:p>
+            <a:pPr algn="ctr"/>
+          </a:p>
+        </p:txBody>
+      </p:sp>
+      <p:sp>
+        <p:nvSpPr>
+          <p:cNvPr id="5" name="TextBox 4"/>
+          <p:cNvSpPr txBox="1"/>
+          <p:nvPr/>
+        </p:nvSpPr>
+        <p:spPr>
+          <a:xfrm>
+            <a:off x="711200" y="241300"/>
+            <a:ext cx="6096000" cy="205232"/>
+          </a:xfrm>
+          <a:prstGeom prst="rect">
+            <a:avLst/>
+          </a:prstGeom>
+          <a:noFill/>
+        </p:spPr>
+        <p:txBody>
+          <a:bodyPr wrap="none" lIns="0" rIns="0" tIns="0" bIns="0" anchor="t">
+            <a:spAutoFit/>
+          </a:bodyPr>
+          <a:lstStyle/>
+          <a:p>
+            <a:pPr>
+              <a:defRPr sz="900" b="1">
+                <a:solidFill>
+                  <a:srgbClr val="9EA1A7"/>
                 </a:solidFill>
                 <a:latin typeface="Arial"/>
               </a:defRPr>
@@ -9017,30 +10361,66 @@
       </p:sp>
       <p:sp>
         <p:nvSpPr>
-          <p:cNvPr id="5" name="TextBox 4"/>
-          <p:cNvSpPr txBox="1"/>
-          <p:nvPr/>
-        </p:nvSpPr>
-        <p:spPr>
-          <a:xfrm>
-            <a:off x="508000" y="647700"/>
-            <a:ext cx="8128000" cy="457200"/>
-          </a:xfrm>
-          <a:prstGeom prst="rect">
-            <a:avLst/>
-          </a:prstGeom>
-          <a:noFill/>
-        </p:spPr>
-        <p:txBody>
-          <a:bodyPr wrap="none" lIns="0" rIns="0" tIns="0" bIns="0" anchor="t">
-            <a:spAutoFit/>
-          </a:bodyPr>
-          <a:lstStyle/>
-          <a:p>
-            <a:pPr>
-              <a:defRPr sz="2600" b="1">
-                <a:solidFill>
-                  <a:srgbClr val="202124"/>
+          <p:cNvPr id="6" name="TextBox 5"/>
+          <p:cNvSpPr txBox="1"/>
+          <p:nvPr/>
+        </p:nvSpPr>
+        <p:spPr>
+          <a:xfrm>
+            <a:off x="8331200" y="241300"/>
+            <a:ext cx="381000" cy="236728"/>
+          </a:xfrm>
+          <a:prstGeom prst="rect">
+            <a:avLst/>
+          </a:prstGeom>
+          <a:noFill/>
+        </p:spPr>
+        <p:txBody>
+          <a:bodyPr wrap="none" lIns="0" rIns="0" tIns="0" bIns="0" anchor="t">
+            <a:spAutoFit/>
+          </a:bodyPr>
+          <a:lstStyle/>
+          <a:p>
+            <a:pPr>
+              <a:defRPr sz="1100" b="1">
+                <a:solidFill>
+                  <a:srgbClr val="D71920"/>
+                </a:solidFill>
+                <a:latin typeface="Arial"/>
+              </a:defRPr>
+            </a:pPr>
+            <a:r>
+              <a:t>08</a:t>
+            </a:r>
+          </a:p>
+        </p:txBody>
+      </p:sp>
+      <p:sp>
+        <p:nvSpPr>
+          <p:cNvPr id="7" name="TextBox 6"/>
+          <p:cNvSpPr txBox="1"/>
+          <p:nvPr/>
+        </p:nvSpPr>
+        <p:spPr>
+          <a:xfrm>
+            <a:off x="508000" y="584200"/>
+            <a:ext cx="8128000" cy="444500"/>
+          </a:xfrm>
+          <a:prstGeom prst="rect">
+            <a:avLst/>
+          </a:prstGeom>
+          <a:noFill/>
+        </p:spPr>
+        <p:txBody>
+          <a:bodyPr wrap="none" lIns="0" rIns="0" tIns="0" bIns="0" anchor="t">
+            <a:spAutoFit/>
+          </a:bodyPr>
+          <a:lstStyle/>
+          <a:p>
+            <a:pPr>
+              <a:defRPr sz="2500" b="1">
+                <a:solidFill>
+                  <a:srgbClr val="F4F4F5"/>
                 </a:solidFill>
                 <a:latin typeface="Arial"/>
               </a:defRPr>
@@ -9053,30 +10433,59 @@
       </p:sp>
       <p:sp>
         <p:nvSpPr>
-          <p:cNvPr id="6" name="TextBox 5"/>
-          <p:cNvSpPr txBox="1"/>
-          <p:nvPr/>
-        </p:nvSpPr>
-        <p:spPr>
-          <a:xfrm>
-            <a:off x="508000" y="4495800"/>
-            <a:ext cx="7620000" cy="196850"/>
-          </a:xfrm>
-          <a:prstGeom prst="rect">
-            <a:avLst/>
-          </a:prstGeom>
-          <a:noFill/>
-        </p:spPr>
-        <p:txBody>
-          <a:bodyPr wrap="none" lIns="0" rIns="0" tIns="0" bIns="0" anchor="t">
-            <a:spAutoFit/>
-          </a:bodyPr>
-          <a:lstStyle/>
-          <a:p>
-            <a:pPr>
-              <a:defRPr sz="800" b="0">
-                <a:solidFill>
-                  <a:srgbClr val="585B60"/>
+          <p:cNvPr id="8" name="Rectangle 7"/>
+          <p:cNvSpPr/>
+          <p:nvPr/>
+        </p:nvSpPr>
+        <p:spPr>
+          <a:xfrm>
+            <a:off x="508000" y="4572000"/>
+            <a:ext cx="8128000" cy="10160"/>
+          </a:xfrm>
+          <a:prstGeom prst="rect">
+            <a:avLst/>
+          </a:prstGeom>
+          <a:solidFill>
+            <a:srgbClr val="1F2125"/>
+          </a:solidFill>
+          <a:ln>
+            <a:noFill/>
+          </a:ln>
+        </p:spPr>
+        <p:txBody>
+          <a:bodyPr rtlCol="0" anchor="ctr"/>
+          <a:lstStyle/>
+          <a:p>
+            <a:pPr algn="ctr"/>
+          </a:p>
+        </p:txBody>
+      </p:sp>
+      <p:sp>
+        <p:nvSpPr>
+          <p:cNvPr id="9" name="TextBox 8"/>
+          <p:cNvSpPr txBox="1"/>
+          <p:nvPr/>
+        </p:nvSpPr>
+        <p:spPr>
+          <a:xfrm>
+            <a:off x="508000" y="4660900"/>
+            <a:ext cx="7747000" cy="190500"/>
+          </a:xfrm>
+          <a:prstGeom prst="rect">
+            <a:avLst/>
+          </a:prstGeom>
+          <a:noFill/>
+        </p:spPr>
+        <p:txBody>
+          <a:bodyPr wrap="none" lIns="0" rIns="0" tIns="0" bIns="0" anchor="t">
+            <a:spAutoFit/>
+          </a:bodyPr>
+          <a:lstStyle/>
+          <a:p>
+            <a:pPr>
+              <a:defRPr sz="750" b="0">
+                <a:solidFill>
+                  <a:srgbClr val="9EA1A7"/>
                 </a:solidFill>
                 <a:latin typeface="Arial"/>
               </a:defRPr>
@@ -9089,43 +10498,38 @@
       </p:sp>
       <p:sp>
         <p:nvSpPr>
-          <p:cNvPr id="7" name="TextBox 6"/>
-          <p:cNvSpPr txBox="1"/>
-          <p:nvPr/>
-        </p:nvSpPr>
-        <p:spPr>
-          <a:xfrm>
-            <a:off x="8255000" y="4813300"/>
-            <a:ext cx="381000" cy="220979"/>
-          </a:xfrm>
-          <a:prstGeom prst="rect">
-            <a:avLst/>
-          </a:prstGeom>
-          <a:noFill/>
-        </p:spPr>
-        <p:txBody>
-          <a:bodyPr wrap="none" lIns="0" rIns="0" tIns="0" bIns="0" anchor="t">
-            <a:spAutoFit/>
-          </a:bodyPr>
-          <a:lstStyle/>
-          <a:p>
-            <a:pPr>
-              <a:defRPr sz="1000" b="0">
-                <a:solidFill>
-                  <a:srgbClr val="585B60"/>
-                </a:solidFill>
-                <a:latin typeface="Arial"/>
-              </a:defRPr>
-            </a:pPr>
-            <a:r>
-              <a:t>08</a:t>
-            </a:r>
+          <p:cNvPr id="10" name="Rounded Rectangle 9"/>
+          <p:cNvSpPr/>
+          <p:nvPr/>
+        </p:nvSpPr>
+        <p:spPr>
+          <a:xfrm>
+            <a:off x="482600" y="1193800"/>
+            <a:ext cx="3962400" cy="2311400"/>
+          </a:xfrm>
+          <a:prstGeom prst="roundRect">
+            <a:avLst>
+              <a:gd name="adj" fmla="val 2197"/>
+            </a:avLst>
+          </a:prstGeom>
+          <a:solidFill>
+            <a:srgbClr val="1F2125"/>
+          </a:solidFill>
+          <a:ln>
+            <a:noFill/>
+          </a:ln>
+        </p:spPr>
+        <p:txBody>
+          <a:bodyPr rtlCol="0" anchor="ctr"/>
+          <a:lstStyle/>
+          <a:p>
+            <a:pPr algn="ctr"/>
           </a:p>
         </p:txBody>
       </p:sp>
       <p:pic>
         <p:nvPicPr>
-          <p:cNvPr id="8" name="Picture 7" descr="simulador_transmision.jpg"/>
+          <p:cNvPr id="11" name="Picture 10" descr="simulador_transmision.jpg"/>
           <p:cNvPicPr>
             <a:picLocks noChangeAspect="1"/>
           </p:cNvPicPr>
@@ -9139,7 +10543,7 @@
         </p:blipFill>
         <p:spPr>
           <a:xfrm>
-            <a:off x="508000" y="1244600"/>
+            <a:off x="508000" y="1219200"/>
             <a:ext cx="3911600" cy="2260600"/>
           </a:xfrm>
           <a:prstGeom prst="rect">
@@ -9147,9 +10551,40 @@
           </a:prstGeom>
         </p:spPr>
       </p:pic>
+      <p:sp>
+        <p:nvSpPr>
+          <p:cNvPr id="12" name="Rounded Rectangle 11"/>
+          <p:cNvSpPr/>
+          <p:nvPr/>
+        </p:nvSpPr>
+        <p:spPr>
+          <a:xfrm>
+            <a:off x="4699000" y="1193800"/>
+            <a:ext cx="3962400" cy="2565400"/>
+          </a:xfrm>
+          <a:prstGeom prst="roundRect">
+            <a:avLst>
+              <a:gd name="adj" fmla="val 1980"/>
+            </a:avLst>
+          </a:prstGeom>
+          <a:solidFill>
+            <a:srgbClr val="1F2125"/>
+          </a:solidFill>
+          <a:ln>
+            <a:noFill/>
+          </a:ln>
+        </p:spPr>
+        <p:txBody>
+          <a:bodyPr rtlCol="0" anchor="ctr"/>
+          <a:lstStyle/>
+          <a:p>
+            <a:pPr algn="ctr"/>
+          </a:p>
+        </p:txBody>
+      </p:sp>
       <p:pic>
         <p:nvPicPr>
-          <p:cNvPr id="9" name="Picture 8" descr="fisica.jpg"/>
+          <p:cNvPr id="13" name="Picture 12" descr="fisica.jpg"/>
           <p:cNvPicPr>
             <a:picLocks noChangeAspect="1"/>
           </p:cNvPicPr>
@@ -9163,7 +10598,7 @@
         </p:blipFill>
         <p:spPr>
           <a:xfrm>
-            <a:off x="4724400" y="1244600"/>
+            <a:off x="4724400" y="1219200"/>
             <a:ext cx="3911600" cy="2514600"/>
           </a:xfrm>
           <a:prstGeom prst="rect">
@@ -9173,30 +10608,30 @@
       </p:pic>
       <p:sp>
         <p:nvSpPr>
-          <p:cNvPr id="10" name="TextBox 9"/>
-          <p:cNvSpPr txBox="1"/>
-          <p:nvPr/>
-        </p:nvSpPr>
-        <p:spPr>
-          <a:xfrm>
-            <a:off x="508000" y="3581400"/>
-            <a:ext cx="3911600" cy="252476"/>
-          </a:xfrm>
-          <a:prstGeom prst="rect">
-            <a:avLst/>
-          </a:prstGeom>
-          <a:noFill/>
-        </p:spPr>
-        <p:txBody>
-          <a:bodyPr wrap="none" lIns="0" rIns="0" tIns="0" bIns="0" anchor="t">
-            <a:spAutoFit/>
-          </a:bodyPr>
-          <a:lstStyle/>
-          <a:p>
-            <a:pPr>
-              <a:defRPr sz="1200" b="0">
-                <a:solidFill>
-                  <a:srgbClr val="585B60"/>
+          <p:cNvPr id="14" name="TextBox 13"/>
+          <p:cNvSpPr txBox="1"/>
+          <p:nvPr/>
+        </p:nvSpPr>
+        <p:spPr>
+          <a:xfrm>
+            <a:off x="508000" y="3606800"/>
+            <a:ext cx="3911600" cy="236728"/>
+          </a:xfrm>
+          <a:prstGeom prst="rect">
+            <a:avLst/>
+          </a:prstGeom>
+          <a:noFill/>
+        </p:spPr>
+        <p:txBody>
+          <a:bodyPr wrap="none" lIns="0" rIns="0" tIns="0" bIns="0" anchor="t">
+            <a:spAutoFit/>
+          </a:bodyPr>
+          <a:lstStyle/>
+          <a:p>
+            <a:pPr>
+              <a:defRPr sz="1100" b="0">
+                <a:solidFill>
+                  <a:srgbClr val="9EA1A7"/>
                 </a:solidFill>
                 <a:latin typeface="Arial"/>
               </a:defRPr>
@@ -9209,30 +10644,30 @@
       </p:sp>
       <p:sp>
         <p:nvSpPr>
-          <p:cNvPr id="11" name="TextBox 10"/>
-          <p:cNvSpPr txBox="1"/>
-          <p:nvPr/>
-        </p:nvSpPr>
-        <p:spPr>
-          <a:xfrm>
-            <a:off x="4724400" y="3810000"/>
-            <a:ext cx="3911600" cy="252476"/>
-          </a:xfrm>
-          <a:prstGeom prst="rect">
-            <a:avLst/>
-          </a:prstGeom>
-          <a:noFill/>
-        </p:spPr>
-        <p:txBody>
-          <a:bodyPr wrap="none" lIns="0" rIns="0" tIns="0" bIns="0" anchor="t">
-            <a:spAutoFit/>
-          </a:bodyPr>
-          <a:lstStyle/>
-          <a:p>
-            <a:pPr>
-              <a:defRPr sz="1200" b="0">
-                <a:solidFill>
-                  <a:srgbClr val="585B60"/>
+          <p:cNvPr id="15" name="TextBox 14"/>
+          <p:cNvSpPr txBox="1"/>
+          <p:nvPr/>
+        </p:nvSpPr>
+        <p:spPr>
+          <a:xfrm>
+            <a:off x="4724400" y="3860800"/>
+            <a:ext cx="3911600" cy="236728"/>
+          </a:xfrm>
+          <a:prstGeom prst="rect">
+            <a:avLst/>
+          </a:prstGeom>
+          <a:noFill/>
+        </p:spPr>
+        <p:txBody>
+          <a:bodyPr wrap="none" lIns="0" rIns="0" tIns="0" bIns="0" anchor="t">
+            <a:spAutoFit/>
+          </a:bodyPr>
+          <a:lstStyle/>
+          <a:p>
+            <a:pPr>
+              <a:defRPr sz="1100" b="0">
+                <a:solidFill>
+                  <a:srgbClr val="9EA1A7"/>
                 </a:solidFill>
                 <a:latin typeface="Arial"/>
               </a:defRPr>
@@ -9276,7 +10711,7 @@
             <a:avLst/>
           </a:prstGeom>
           <a:solidFill>
-            <a:srgbClr val="FFFFFF"/>
+            <a:srgbClr val="121316"/>
           </a:solidFill>
           <a:ln>
             <a:noFill/>
@@ -9298,8 +10733,8 @@
         </p:nvSpPr>
         <p:spPr>
           <a:xfrm>
-            <a:off x="508000" y="292100"/>
-            <a:ext cx="533400" cy="50800"/>
+            <a:off x="0" y="0"/>
+            <a:ext cx="76200" cy="5143500"/>
           </a:xfrm>
           <a:prstGeom prst="rect">
             <a:avLst/>
@@ -9321,30 +10756,59 @@
       </p:sp>
       <p:sp>
         <p:nvSpPr>
-          <p:cNvPr id="4" name="TextBox 3"/>
-          <p:cNvSpPr txBox="1"/>
-          <p:nvPr/>
-        </p:nvSpPr>
-        <p:spPr>
-          <a:xfrm>
-            <a:off x="1206500" y="203200"/>
-            <a:ext cx="7239000" cy="220979"/>
-          </a:xfrm>
-          <a:prstGeom prst="rect">
-            <a:avLst/>
-          </a:prstGeom>
-          <a:noFill/>
-        </p:spPr>
-        <p:txBody>
-          <a:bodyPr wrap="none" lIns="0" rIns="0" tIns="0" bIns="0" anchor="t">
-            <a:spAutoFit/>
-          </a:bodyPr>
-          <a:lstStyle/>
-          <a:p>
-            <a:pPr>
-              <a:defRPr sz="1000" b="0">
-                <a:solidFill>
-                  <a:srgbClr val="585B60"/>
+          <p:cNvPr id="4" name="Rectangle 3"/>
+          <p:cNvSpPr/>
+          <p:nvPr/>
+        </p:nvSpPr>
+        <p:spPr>
+          <a:xfrm>
+            <a:off x="508000" y="304800"/>
+            <a:ext cx="101600" cy="101600"/>
+          </a:xfrm>
+          <a:prstGeom prst="rect">
+            <a:avLst/>
+          </a:prstGeom>
+          <a:solidFill>
+            <a:srgbClr val="D71920"/>
+          </a:solidFill>
+          <a:ln>
+            <a:noFill/>
+          </a:ln>
+        </p:spPr>
+        <p:txBody>
+          <a:bodyPr rtlCol="0" anchor="ctr"/>
+          <a:lstStyle/>
+          <a:p>
+            <a:pPr algn="ctr"/>
+          </a:p>
+        </p:txBody>
+      </p:sp>
+      <p:sp>
+        <p:nvSpPr>
+          <p:cNvPr id="5" name="TextBox 4"/>
+          <p:cNvSpPr txBox="1"/>
+          <p:nvPr/>
+        </p:nvSpPr>
+        <p:spPr>
+          <a:xfrm>
+            <a:off x="711200" y="241300"/>
+            <a:ext cx="6096000" cy="205232"/>
+          </a:xfrm>
+          <a:prstGeom prst="rect">
+            <a:avLst/>
+          </a:prstGeom>
+          <a:noFill/>
+        </p:spPr>
+        <p:txBody>
+          <a:bodyPr wrap="none" lIns="0" rIns="0" tIns="0" bIns="0" anchor="t">
+            <a:spAutoFit/>
+          </a:bodyPr>
+          <a:lstStyle/>
+          <a:p>
+            <a:pPr>
+              <a:defRPr sz="900" b="1">
+                <a:solidFill>
+                  <a:srgbClr val="9EA1A7"/>
                 </a:solidFill>
                 <a:latin typeface="Arial"/>
               </a:defRPr>
@@ -9357,30 +10821,66 @@
       </p:sp>
       <p:sp>
         <p:nvSpPr>
-          <p:cNvPr id="5" name="TextBox 4"/>
-          <p:cNvSpPr txBox="1"/>
-          <p:nvPr/>
-        </p:nvSpPr>
-        <p:spPr>
-          <a:xfrm>
-            <a:off x="508000" y="647700"/>
-            <a:ext cx="8128000" cy="457200"/>
-          </a:xfrm>
-          <a:prstGeom prst="rect">
-            <a:avLst/>
-          </a:prstGeom>
-          <a:noFill/>
-        </p:spPr>
-        <p:txBody>
-          <a:bodyPr wrap="none" lIns="0" rIns="0" tIns="0" bIns="0" anchor="t">
-            <a:spAutoFit/>
-          </a:bodyPr>
-          <a:lstStyle/>
-          <a:p>
-            <a:pPr>
-              <a:defRPr sz="2600" b="1">
-                <a:solidFill>
-                  <a:srgbClr val="202124"/>
+          <p:cNvPr id="6" name="TextBox 5"/>
+          <p:cNvSpPr txBox="1"/>
+          <p:nvPr/>
+        </p:nvSpPr>
+        <p:spPr>
+          <a:xfrm>
+            <a:off x="8331200" y="241300"/>
+            <a:ext cx="381000" cy="236728"/>
+          </a:xfrm>
+          <a:prstGeom prst="rect">
+            <a:avLst/>
+          </a:prstGeom>
+          <a:noFill/>
+        </p:spPr>
+        <p:txBody>
+          <a:bodyPr wrap="none" lIns="0" rIns="0" tIns="0" bIns="0" anchor="t">
+            <a:spAutoFit/>
+          </a:bodyPr>
+          <a:lstStyle/>
+          <a:p>
+            <a:pPr>
+              <a:defRPr sz="1100" b="1">
+                <a:solidFill>
+                  <a:srgbClr val="D71920"/>
+                </a:solidFill>
+                <a:latin typeface="Arial"/>
+              </a:defRPr>
+            </a:pPr>
+            <a:r>
+              <a:t>09</a:t>
+            </a:r>
+          </a:p>
+        </p:txBody>
+      </p:sp>
+      <p:sp>
+        <p:nvSpPr>
+          <p:cNvPr id="7" name="TextBox 6"/>
+          <p:cNvSpPr txBox="1"/>
+          <p:nvPr/>
+        </p:nvSpPr>
+        <p:spPr>
+          <a:xfrm>
+            <a:off x="508000" y="584200"/>
+            <a:ext cx="8128000" cy="444500"/>
+          </a:xfrm>
+          <a:prstGeom prst="rect">
+            <a:avLst/>
+          </a:prstGeom>
+          <a:noFill/>
+        </p:spPr>
+        <p:txBody>
+          <a:bodyPr wrap="none" lIns="0" rIns="0" tIns="0" bIns="0" anchor="t">
+            <a:spAutoFit/>
+          </a:bodyPr>
+          <a:lstStyle/>
+          <a:p>
+            <a:pPr>
+              <a:defRPr sz="2500" b="1">
+                <a:solidFill>
+                  <a:srgbClr val="F4F4F5"/>
                 </a:solidFill>
                 <a:latin typeface="Arial"/>
               </a:defRPr>
@@ -9393,30 +10893,59 @@
       </p:sp>
       <p:sp>
         <p:nvSpPr>
-          <p:cNvPr id="6" name="TextBox 5"/>
-          <p:cNvSpPr txBox="1"/>
-          <p:nvPr/>
-        </p:nvSpPr>
-        <p:spPr>
-          <a:xfrm>
-            <a:off x="508000" y="4495800"/>
-            <a:ext cx="7620000" cy="196850"/>
-          </a:xfrm>
-          <a:prstGeom prst="rect">
-            <a:avLst/>
-          </a:prstGeom>
-          <a:noFill/>
-        </p:spPr>
-        <p:txBody>
-          <a:bodyPr wrap="none" lIns="0" rIns="0" tIns="0" bIns="0" anchor="t">
-            <a:spAutoFit/>
-          </a:bodyPr>
-          <a:lstStyle/>
-          <a:p>
-            <a:pPr>
-              <a:defRPr sz="800" b="0">
-                <a:solidFill>
-                  <a:srgbClr val="585B60"/>
+          <p:cNvPr id="8" name="Rectangle 7"/>
+          <p:cNvSpPr/>
+          <p:nvPr/>
+        </p:nvSpPr>
+        <p:spPr>
+          <a:xfrm>
+            <a:off x="508000" y="4572000"/>
+            <a:ext cx="8128000" cy="10160"/>
+          </a:xfrm>
+          <a:prstGeom prst="rect">
+            <a:avLst/>
+          </a:prstGeom>
+          <a:solidFill>
+            <a:srgbClr val="1F2125"/>
+          </a:solidFill>
+          <a:ln>
+            <a:noFill/>
+          </a:ln>
+        </p:spPr>
+        <p:txBody>
+          <a:bodyPr rtlCol="0" anchor="ctr"/>
+          <a:lstStyle/>
+          <a:p>
+            <a:pPr algn="ctr"/>
+          </a:p>
+        </p:txBody>
+      </p:sp>
+      <p:sp>
+        <p:nvSpPr>
+          <p:cNvPr id="9" name="TextBox 8"/>
+          <p:cNvSpPr txBox="1"/>
+          <p:nvPr/>
+        </p:nvSpPr>
+        <p:spPr>
+          <a:xfrm>
+            <a:off x="508000" y="4660900"/>
+            <a:ext cx="7747000" cy="190500"/>
+          </a:xfrm>
+          <a:prstGeom prst="rect">
+            <a:avLst/>
+          </a:prstGeom>
+          <a:noFill/>
+        </p:spPr>
+        <p:txBody>
+          <a:bodyPr wrap="none" lIns="0" rIns="0" tIns="0" bIns="0" anchor="t">
+            <a:spAutoFit/>
+          </a:bodyPr>
+          <a:lstStyle/>
+          <a:p>
+            <a:pPr>
+              <a:defRPr sz="750" b="0">
+                <a:solidFill>
+                  <a:srgbClr val="9EA1A7"/>
                 </a:solidFill>
                 <a:latin typeface="Arial"/>
               </a:defRPr>
@@ -9429,64 +10958,198 @@
       </p:sp>
       <p:sp>
         <p:nvSpPr>
-          <p:cNvPr id="7" name="TextBox 6"/>
-          <p:cNvSpPr txBox="1"/>
-          <p:nvPr/>
-        </p:nvSpPr>
-        <p:spPr>
-          <a:xfrm>
-            <a:off x="8255000" y="4813300"/>
-            <a:ext cx="381000" cy="220979"/>
-          </a:xfrm>
-          <a:prstGeom prst="rect">
-            <a:avLst/>
-          </a:prstGeom>
-          <a:noFill/>
-        </p:spPr>
-        <p:txBody>
-          <a:bodyPr wrap="none" lIns="0" rIns="0" tIns="0" bIns="0" anchor="t">
-            <a:spAutoFit/>
-          </a:bodyPr>
-          <a:lstStyle/>
-          <a:p>
-            <a:pPr>
-              <a:defRPr sz="1000" b="0">
-                <a:solidFill>
-                  <a:srgbClr val="585B60"/>
-                </a:solidFill>
-                <a:latin typeface="Arial"/>
-              </a:defRPr>
-            </a:pPr>
-            <a:r>
-              <a:t>09</a:t>
-            </a:r>
-          </a:p>
-        </p:txBody>
-      </p:sp>
-      <p:sp>
-        <p:nvSpPr>
-          <p:cNvPr id="8" name="TextBox 7"/>
-          <p:cNvSpPr txBox="1"/>
-          <p:nvPr/>
-        </p:nvSpPr>
-        <p:spPr>
-          <a:xfrm>
-            <a:off x="508000" y="1727200"/>
-            <a:ext cx="2540000" cy="724916"/>
-          </a:xfrm>
-          <a:prstGeom prst="rect">
-            <a:avLst/>
-          </a:prstGeom>
-          <a:noFill/>
-        </p:spPr>
-        <p:txBody>
-          <a:bodyPr wrap="none" lIns="0" rIns="0" tIns="0" bIns="0" anchor="t">
-            <a:spAutoFit/>
-          </a:bodyPr>
-          <a:lstStyle/>
-          <a:p>
-            <a:pPr>
-              <a:defRPr sz="4200" b="1">
+          <p:cNvPr id="10" name="Rounded Rectangle 9"/>
+          <p:cNvSpPr/>
+          <p:nvPr/>
+        </p:nvSpPr>
+        <p:spPr>
+          <a:xfrm>
+            <a:off x="508000" y="1498600"/>
+            <a:ext cx="2489200" cy="1854200"/>
+          </a:xfrm>
+          <a:prstGeom prst="roundRect">
+            <a:avLst>
+              <a:gd name="adj" fmla="val 4109"/>
+            </a:avLst>
+          </a:prstGeom>
+          <a:solidFill>
+            <a:srgbClr val="1F2125"/>
+          </a:solidFill>
+          <a:ln>
+            <a:noFill/>
+          </a:ln>
+        </p:spPr>
+        <p:txBody>
+          <a:bodyPr rtlCol="0" anchor="ctr"/>
+          <a:lstStyle/>
+          <a:p>
+            <a:pPr algn="ctr"/>
+          </a:p>
+        </p:txBody>
+      </p:sp>
+      <p:sp>
+        <p:nvSpPr>
+          <p:cNvPr id="11" name="TextBox 10"/>
+          <p:cNvSpPr txBox="1"/>
+          <p:nvPr/>
+        </p:nvSpPr>
+        <p:spPr>
+          <a:xfrm>
+            <a:off x="711200" y="1676400"/>
+            <a:ext cx="2082800" cy="661924"/>
+          </a:xfrm>
+          <a:prstGeom prst="rect">
+            <a:avLst/>
+          </a:prstGeom>
+          <a:noFill/>
+        </p:spPr>
+        <p:txBody>
+          <a:bodyPr wrap="none" lIns="0" rIns="0" tIns="0" bIns="0" anchor="t">
+            <a:spAutoFit/>
+          </a:bodyPr>
+          <a:lstStyle/>
+          <a:p>
+            <a:pPr>
+              <a:defRPr sz="3800" b="1">
+                <a:solidFill>
+                  <a:srgbClr val="9EA1A7"/>
+                </a:solidFill>
+                <a:latin typeface="Arial"/>
+              </a:defRPr>
+            </a:pPr>
+            <a:r>
+              <a:t>11.8</a:t>
+            </a:r>
+          </a:p>
+        </p:txBody>
+      </p:sp>
+      <p:sp>
+        <p:nvSpPr>
+          <p:cNvPr id="12" name="TextBox 11"/>
+          <p:cNvSpPr txBox="1"/>
+          <p:nvPr/>
+        </p:nvSpPr>
+        <p:spPr>
+          <a:xfrm>
+            <a:off x="711200" y="2332990"/>
+            <a:ext cx="2082800" cy="278130"/>
+          </a:xfrm>
+          <a:prstGeom prst="rect">
+            <a:avLst/>
+          </a:prstGeom>
+          <a:noFill/>
+        </p:spPr>
+        <p:txBody>
+          <a:bodyPr wrap="none" lIns="0" rIns="0" tIns="0" bIns="0" anchor="t">
+            <a:spAutoFit/>
+          </a:bodyPr>
+          <a:lstStyle/>
+          <a:p>
+            <a:pPr>
+              <a:defRPr sz="1300" b="0">
+                <a:solidFill>
+                  <a:srgbClr val="F4F4F5"/>
+                </a:solidFill>
+                <a:latin typeface="Arial"/>
+              </a:defRPr>
+            </a:pPr>
+            <a:r>
+              <a:t>Carreras por victoria</a:t>
+            </a:r>
+          </a:p>
+        </p:txBody>
+      </p:sp>
+      <p:sp>
+        <p:nvSpPr>
+          <p:cNvPr id="13" name="TextBox 12"/>
+          <p:cNvSpPr txBox="1"/>
+          <p:nvPr/>
+        </p:nvSpPr>
+        <p:spPr>
+          <a:xfrm>
+            <a:off x="711200" y="2547620"/>
+            <a:ext cx="2082800" cy="278130"/>
+          </a:xfrm>
+          <a:prstGeom prst="rect">
+            <a:avLst/>
+          </a:prstGeom>
+          <a:noFill/>
+        </p:spPr>
+        <p:txBody>
+          <a:bodyPr wrap="none" lIns="0" rIns="0" tIns="0" bIns="0" anchor="t">
+            <a:spAutoFit/>
+          </a:bodyPr>
+          <a:lstStyle/>
+          <a:p>
+            <a:pPr>
+              <a:defRPr sz="1300" b="0">
+                <a:solidFill>
+                  <a:srgbClr val="F4F4F5"/>
+                </a:solidFill>
+                <a:latin typeface="Arial"/>
+              </a:defRPr>
+            </a:pPr>
+            <a:r>
+              <a:t>liga</a:t>
+            </a:r>
+          </a:p>
+        </p:txBody>
+      </p:sp>
+      <p:sp>
+        <p:nvSpPr>
+          <p:cNvPr id="14" name="Rounded Rectangle 13"/>
+          <p:cNvSpPr/>
+          <p:nvPr/>
+        </p:nvSpPr>
+        <p:spPr>
+          <a:xfrm>
+            <a:off x="3327400" y="1498600"/>
+            <a:ext cx="2489200" cy="1854200"/>
+          </a:xfrm>
+          <a:prstGeom prst="roundRect">
+            <a:avLst>
+              <a:gd name="adj" fmla="val 4109"/>
+            </a:avLst>
+          </a:prstGeom>
+          <a:solidFill>
+            <a:srgbClr val="1F2125"/>
+          </a:solidFill>
+          <a:ln>
+            <a:noFill/>
+          </a:ln>
+        </p:spPr>
+        <p:txBody>
+          <a:bodyPr rtlCol="0" anchor="ctr"/>
+          <a:lstStyle/>
+          <a:p>
+            <a:pPr algn="ctr"/>
+          </a:p>
+        </p:txBody>
+      </p:sp>
+      <p:sp>
+        <p:nvSpPr>
+          <p:cNvPr id="15" name="TextBox 14"/>
+          <p:cNvSpPr txBox="1"/>
+          <p:nvPr/>
+        </p:nvSpPr>
+        <p:spPr>
+          <a:xfrm>
+            <a:off x="3530600" y="1676400"/>
+            <a:ext cx="2082800" cy="661924"/>
+          </a:xfrm>
+          <a:prstGeom prst="rect">
+            <a:avLst/>
+          </a:prstGeom>
+          <a:noFill/>
+        </p:spPr>
+        <p:txBody>
+          <a:bodyPr wrap="none" lIns="0" rIns="0" tIns="0" bIns="0" anchor="t">
+            <a:spAutoFit/>
+          </a:bodyPr>
+          <a:lstStyle/>
+          <a:p>
+            <a:pPr>
+              <a:defRPr sz="3800" b="1">
                 <a:solidFill>
                   <a:srgbClr val="D71920"/>
                 </a:solidFill>
@@ -9494,37 +11157,37 @@
               </a:defRPr>
             </a:pPr>
             <a:r>
-              <a:t>11.8</a:t>
-            </a:r>
-          </a:p>
-        </p:txBody>
-      </p:sp>
-      <p:sp>
-        <p:nvSpPr>
-          <p:cNvPr id="9" name="TextBox 8"/>
-          <p:cNvSpPr txBox="1"/>
-          <p:nvPr/>
-        </p:nvSpPr>
-        <p:spPr>
-          <a:xfrm>
-            <a:off x="508000" y="2387600"/>
-            <a:ext cx="2540000" cy="299720"/>
-          </a:xfrm>
-          <a:prstGeom prst="rect">
-            <a:avLst/>
-          </a:prstGeom>
-          <a:noFill/>
-        </p:spPr>
-        <p:txBody>
-          <a:bodyPr wrap="none" lIns="0" rIns="0" tIns="0" bIns="0" anchor="t">
-            <a:spAutoFit/>
-          </a:bodyPr>
-          <a:lstStyle/>
-          <a:p>
-            <a:pPr>
-              <a:defRPr sz="1500" b="0">
-                <a:solidFill>
-                  <a:srgbClr val="202124"/>
+              <a:t>14.3</a:t>
+            </a:r>
+          </a:p>
+        </p:txBody>
+      </p:sp>
+      <p:sp>
+        <p:nvSpPr>
+          <p:cNvPr id="16" name="TextBox 15"/>
+          <p:cNvSpPr txBox="1"/>
+          <p:nvPr/>
+        </p:nvSpPr>
+        <p:spPr>
+          <a:xfrm>
+            <a:off x="3530600" y="2332990"/>
+            <a:ext cx="2082800" cy="278130"/>
+          </a:xfrm>
+          <a:prstGeom prst="rect">
+            <a:avLst/>
+          </a:prstGeom>
+          <a:noFill/>
+        </p:spPr>
+        <p:txBody>
+          <a:bodyPr wrap="none" lIns="0" rIns="0" tIns="0" bIns="0" anchor="t">
+            <a:spAutoFit/>
+          </a:bodyPr>
+          <a:lstStyle/>
+          <a:p>
+            <a:pPr>
+              <a:defRPr sz="1300" b="0">
+                <a:solidFill>
+                  <a:srgbClr val="F4F4F5"/>
                 </a:solidFill>
                 <a:latin typeface="Arial"/>
               </a:defRPr>
@@ -9537,64 +11200,95 @@
       </p:sp>
       <p:sp>
         <p:nvSpPr>
-          <p:cNvPr id="10" name="TextBox 9"/>
-          <p:cNvSpPr txBox="1"/>
-          <p:nvPr/>
-        </p:nvSpPr>
-        <p:spPr>
-          <a:xfrm>
-            <a:off x="508000" y="2623820"/>
-            <a:ext cx="2540000" cy="299720"/>
-          </a:xfrm>
-          <a:prstGeom prst="rect">
-            <a:avLst/>
-          </a:prstGeom>
-          <a:noFill/>
-        </p:spPr>
-        <p:txBody>
-          <a:bodyPr wrap="none" lIns="0" rIns="0" tIns="0" bIns="0" anchor="t">
-            <a:spAutoFit/>
-          </a:bodyPr>
-          <a:lstStyle/>
-          <a:p>
-            <a:pPr>
-              <a:defRPr sz="1500" b="0">
-                <a:solidFill>
-                  <a:srgbClr val="202124"/>
-                </a:solidFill>
-                <a:latin typeface="Arial"/>
-              </a:defRPr>
-            </a:pPr>
-            <a:r>
-              <a:t>liga</a:t>
-            </a:r>
-          </a:p>
-        </p:txBody>
-      </p:sp>
-      <p:sp>
-        <p:nvSpPr>
-          <p:cNvPr id="11" name="TextBox 10"/>
-          <p:cNvSpPr txBox="1"/>
-          <p:nvPr/>
-        </p:nvSpPr>
-        <p:spPr>
-          <a:xfrm>
-            <a:off x="3175000" y="1727200"/>
-            <a:ext cx="2540000" cy="724916"/>
-          </a:xfrm>
-          <a:prstGeom prst="rect">
-            <a:avLst/>
-          </a:prstGeom>
-          <a:noFill/>
-        </p:spPr>
-        <p:txBody>
-          <a:bodyPr wrap="none" lIns="0" rIns="0" tIns="0" bIns="0" anchor="t">
-            <a:spAutoFit/>
-          </a:bodyPr>
-          <a:lstStyle/>
-          <a:p>
-            <a:pPr>
-              <a:defRPr sz="4200" b="1">
+          <p:cNvPr id="17" name="TextBox 16"/>
+          <p:cNvSpPr txBox="1"/>
+          <p:nvPr/>
+        </p:nvSpPr>
+        <p:spPr>
+          <a:xfrm>
+            <a:off x="3530600" y="2547620"/>
+            <a:ext cx="2082800" cy="278130"/>
+          </a:xfrm>
+          <a:prstGeom prst="rect">
+            <a:avLst/>
+          </a:prstGeom>
+          <a:noFill/>
+        </p:spPr>
+        <p:txBody>
+          <a:bodyPr wrap="none" lIns="0" rIns="0" tIns="0" bIns="0" anchor="t">
+            <a:spAutoFit/>
+          </a:bodyPr>
+          <a:lstStyle/>
+          <a:p>
+            <a:pPr>
+              <a:defRPr sz="1300" b="0">
+                <a:solidFill>
+                  <a:srgbClr val="F4F4F5"/>
+                </a:solidFill>
+                <a:latin typeface="Arial"/>
+              </a:defRPr>
+            </a:pPr>
+            <a:r>
+              <a:t>altitud extrema</a:t>
+            </a:r>
+          </a:p>
+        </p:txBody>
+      </p:sp>
+      <p:sp>
+        <p:nvSpPr>
+          <p:cNvPr id="18" name="Rounded Rectangle 17"/>
+          <p:cNvSpPr/>
+          <p:nvPr/>
+        </p:nvSpPr>
+        <p:spPr>
+          <a:xfrm>
+            <a:off x="6146800" y="1498600"/>
+            <a:ext cx="2489200" cy="1854200"/>
+          </a:xfrm>
+          <a:prstGeom prst="roundRect">
+            <a:avLst>
+              <a:gd name="adj" fmla="val 4109"/>
+            </a:avLst>
+          </a:prstGeom>
+          <a:solidFill>
+            <a:srgbClr val="1F2125"/>
+          </a:solidFill>
+          <a:ln>
+            <a:noFill/>
+          </a:ln>
+        </p:spPr>
+        <p:txBody>
+          <a:bodyPr rtlCol="0" anchor="ctr"/>
+          <a:lstStyle/>
+          <a:p>
+            <a:pPr algn="ctr"/>
+          </a:p>
+        </p:txBody>
+      </p:sp>
+      <p:sp>
+        <p:nvSpPr>
+          <p:cNvPr id="19" name="TextBox 18"/>
+          <p:cNvSpPr txBox="1"/>
+          <p:nvPr/>
+        </p:nvSpPr>
+        <p:spPr>
+          <a:xfrm>
+            <a:off x="6350000" y="1676400"/>
+            <a:ext cx="2082800" cy="661924"/>
+          </a:xfrm>
+          <a:prstGeom prst="rect">
+            <a:avLst/>
+          </a:prstGeom>
+          <a:noFill/>
+        </p:spPr>
+        <p:txBody>
+          <a:bodyPr wrap="none" lIns="0" rIns="0" tIns="0" bIns="0" anchor="t">
+            <a:spAutoFit/>
+          </a:bodyPr>
+          <a:lstStyle/>
+          <a:p>
+            <a:pPr>
+              <a:defRPr sz="3800" b="1">
                 <a:solidFill>
                   <a:srgbClr val="D71920"/>
                 </a:solidFill>
@@ -9602,114 +11296,6 @@
               </a:defRPr>
             </a:pPr>
             <a:r>
-              <a:t>14.3</a:t>
-            </a:r>
-          </a:p>
-        </p:txBody>
-      </p:sp>
-      <p:sp>
-        <p:nvSpPr>
-          <p:cNvPr id="12" name="TextBox 11"/>
-          <p:cNvSpPr txBox="1"/>
-          <p:nvPr/>
-        </p:nvSpPr>
-        <p:spPr>
-          <a:xfrm>
-            <a:off x="3175000" y="2387600"/>
-            <a:ext cx="2667000" cy="299720"/>
-          </a:xfrm>
-          <a:prstGeom prst="rect">
-            <a:avLst/>
-          </a:prstGeom>
-          <a:noFill/>
-        </p:spPr>
-        <p:txBody>
-          <a:bodyPr wrap="none" lIns="0" rIns="0" tIns="0" bIns="0" anchor="t">
-            <a:spAutoFit/>
-          </a:bodyPr>
-          <a:lstStyle/>
-          <a:p>
-            <a:pPr>
-              <a:defRPr sz="1500" b="0">
-                <a:solidFill>
-                  <a:srgbClr val="202124"/>
-                </a:solidFill>
-                <a:latin typeface="Arial"/>
-              </a:defRPr>
-            </a:pPr>
-            <a:r>
-              <a:t>Carreras por victoria</a:t>
-            </a:r>
-          </a:p>
-        </p:txBody>
-      </p:sp>
-      <p:sp>
-        <p:nvSpPr>
-          <p:cNvPr id="13" name="TextBox 12"/>
-          <p:cNvSpPr txBox="1"/>
-          <p:nvPr/>
-        </p:nvSpPr>
-        <p:spPr>
-          <a:xfrm>
-            <a:off x="3175000" y="2623820"/>
-            <a:ext cx="2667000" cy="299720"/>
-          </a:xfrm>
-          <a:prstGeom prst="rect">
-            <a:avLst/>
-          </a:prstGeom>
-          <a:noFill/>
-        </p:spPr>
-        <p:txBody>
-          <a:bodyPr wrap="none" lIns="0" rIns="0" tIns="0" bIns="0" anchor="t">
-            <a:spAutoFit/>
-          </a:bodyPr>
-          <a:lstStyle/>
-          <a:p>
-            <a:pPr>
-              <a:defRPr sz="1500" b="0">
-                <a:solidFill>
-                  <a:srgbClr val="202124"/>
-                </a:solidFill>
-                <a:latin typeface="Arial"/>
-              </a:defRPr>
-            </a:pPr>
-            <a:r>
-              <a:t>altitud extrema</a:t>
-            </a:r>
-          </a:p>
-        </p:txBody>
-      </p:sp>
-      <p:sp>
-        <p:nvSpPr>
-          <p:cNvPr id="14" name="TextBox 13"/>
-          <p:cNvSpPr txBox="1"/>
-          <p:nvPr/>
-        </p:nvSpPr>
-        <p:spPr>
-          <a:xfrm>
-            <a:off x="6223000" y="1727200"/>
-            <a:ext cx="2413000" cy="724916"/>
-          </a:xfrm>
-          <a:prstGeom prst="rect">
-            <a:avLst/>
-          </a:prstGeom>
-          <a:noFill/>
-        </p:spPr>
-        <p:txBody>
-          <a:bodyPr wrap="none" lIns="0" rIns="0" tIns="0" bIns="0" anchor="t">
-            <a:spAutoFit/>
-          </a:bodyPr>
-          <a:lstStyle/>
-          <a:p>
-            <a:pPr>
-              <a:defRPr sz="4200" b="1">
-                <a:solidFill>
-                  <a:srgbClr val="D71920"/>
-                </a:solidFill>
-                <a:latin typeface="Arial"/>
-              </a:defRPr>
-            </a:pPr>
-            <a:r>
               <a:t>1.51</a:t>
             </a:r>
           </a:p>
@@ -9717,30 +11303,30 @@
       </p:sp>
       <p:sp>
         <p:nvSpPr>
-          <p:cNvPr id="15" name="TextBox 14"/>
-          <p:cNvSpPr txBox="1"/>
-          <p:nvPr/>
-        </p:nvSpPr>
-        <p:spPr>
-          <a:xfrm>
-            <a:off x="6223000" y="2387600"/>
-            <a:ext cx="2413000" cy="299720"/>
-          </a:xfrm>
-          <a:prstGeom prst="rect">
-            <a:avLst/>
-          </a:prstGeom>
-          <a:noFill/>
-        </p:spPr>
-        <p:txBody>
-          <a:bodyPr wrap="none" lIns="0" rIns="0" tIns="0" bIns="0" anchor="t">
-            <a:spAutoFit/>
-          </a:bodyPr>
-          <a:lstStyle/>
-          <a:p>
-            <a:pPr>
-              <a:defRPr sz="1500" b="0">
-                <a:solidFill>
-                  <a:srgbClr val="202124"/>
+          <p:cNvPr id="20" name="TextBox 19"/>
+          <p:cNvSpPr txBox="1"/>
+          <p:nvPr/>
+        </p:nvSpPr>
+        <p:spPr>
+          <a:xfrm>
+            <a:off x="6350000" y="2332990"/>
+            <a:ext cx="2082800" cy="278130"/>
+          </a:xfrm>
+          <a:prstGeom prst="rect">
+            <a:avLst/>
+          </a:prstGeom>
+          <a:noFill/>
+        </p:spPr>
+        <p:txBody>
+          <a:bodyPr wrap="none" lIns="0" rIns="0" tIns="0" bIns="0" anchor="t">
+            <a:spAutoFit/>
+          </a:bodyPr>
+          <a:lstStyle/>
+          <a:p>
+            <a:pPr>
+              <a:defRPr sz="1300" b="0">
+                <a:solidFill>
+                  <a:srgbClr val="F4F4F5"/>
                 </a:solidFill>
                 <a:latin typeface="Arial"/>
               </a:defRPr>
@@ -9753,30 +11339,30 @@
       </p:sp>
       <p:sp>
         <p:nvSpPr>
-          <p:cNvPr id="16" name="TextBox 15"/>
-          <p:cNvSpPr txBox="1"/>
-          <p:nvPr/>
-        </p:nvSpPr>
-        <p:spPr>
-          <a:xfrm>
-            <a:off x="6223000" y="2623820"/>
-            <a:ext cx="2413000" cy="299720"/>
-          </a:xfrm>
-          <a:prstGeom prst="rect">
-            <a:avLst/>
-          </a:prstGeom>
-          <a:noFill/>
-        </p:spPr>
-        <p:txBody>
-          <a:bodyPr wrap="none" lIns="0" rIns="0" tIns="0" bIns="0" anchor="t">
-            <a:spAutoFit/>
-          </a:bodyPr>
-          <a:lstStyle/>
-          <a:p>
-            <a:pPr>
-              <a:defRPr sz="1500" b="0">
-                <a:solidFill>
-                  <a:srgbClr val="202124"/>
+          <p:cNvPr id="21" name="TextBox 20"/>
+          <p:cNvSpPr txBox="1"/>
+          <p:nvPr/>
+        </p:nvSpPr>
+        <p:spPr>
+          <a:xfrm>
+            <a:off x="6350000" y="2547620"/>
+            <a:ext cx="2082800" cy="278130"/>
+          </a:xfrm>
+          <a:prstGeom prst="rect">
+            <a:avLst/>
+          </a:prstGeom>
+          <a:noFill/>
+        </p:spPr>
+        <p:txBody>
+          <a:bodyPr wrap="none" lIns="0" rIns="0" tIns="0" bIns="0" anchor="t">
+            <a:spAutoFit/>
+          </a:bodyPr>
+          <a:lstStyle/>
+          <a:p>
+            <a:pPr>
+              <a:defRPr sz="1300" b="0">
+                <a:solidFill>
+                  <a:srgbClr val="F4F4F5"/>
                 </a:solidFill>
                 <a:latin typeface="Arial"/>
               </a:defRPr>
@@ -9789,13 +11375,13 @@
       </p:sp>
       <p:sp>
         <p:nvSpPr>
-          <p:cNvPr id="17" name="TextBox 16"/>
-          <p:cNvSpPr txBox="1"/>
-          <p:nvPr/>
-        </p:nvSpPr>
-        <p:spPr>
-          <a:xfrm>
-            <a:off x="508000" y="3606800"/>
+          <p:cNvPr id="22" name="TextBox 21"/>
+          <p:cNvSpPr txBox="1"/>
+          <p:nvPr/>
+        </p:nvSpPr>
+        <p:spPr>
+          <a:xfrm>
+            <a:off x="508000" y="3530600"/>
             <a:ext cx="8128000" cy="299720"/>
           </a:xfrm>
           <a:prstGeom prst="rect">
@@ -9812,7 +11398,7 @@
             <a:pPr>
               <a:defRPr sz="1500" b="1">
                 <a:solidFill>
-                  <a:srgbClr val="202124"/>
+                  <a:srgbClr val="F4F4F5"/>
                 </a:solidFill>
                 <a:latin typeface="Arial"/>
               </a:defRPr>
@@ -9825,30 +11411,30 @@
       </p:sp>
       <p:sp>
         <p:nvSpPr>
-          <p:cNvPr id="18" name="TextBox 17"/>
-          <p:cNvSpPr txBox="1"/>
-          <p:nvPr/>
-        </p:nvSpPr>
-        <p:spPr>
-          <a:xfrm>
-            <a:off x="508000" y="4013200"/>
-            <a:ext cx="8128000" cy="268224"/>
-          </a:xfrm>
-          <a:prstGeom prst="rect">
-            <a:avLst/>
-          </a:prstGeom>
-          <a:noFill/>
-        </p:spPr>
-        <p:txBody>
-          <a:bodyPr wrap="none" lIns="0" rIns="0" tIns="0" bIns="0" anchor="t">
-            <a:spAutoFit/>
-          </a:bodyPr>
-          <a:lstStyle/>
-          <a:p>
-            <a:pPr>
-              <a:defRPr sz="1300" b="0">
-                <a:solidFill>
-                  <a:srgbClr val="585B60"/>
+          <p:cNvPr id="23" name="TextBox 22"/>
+          <p:cNvSpPr txBox="1"/>
+          <p:nvPr/>
+        </p:nvSpPr>
+        <p:spPr>
+          <a:xfrm>
+            <a:off x="508000" y="3860800"/>
+            <a:ext cx="8128000" cy="252476"/>
+          </a:xfrm>
+          <a:prstGeom prst="rect">
+            <a:avLst/>
+          </a:prstGeom>
+          <a:noFill/>
+        </p:spPr>
+        <p:txBody>
+          <a:bodyPr wrap="none" lIns="0" rIns="0" tIns="0" bIns="0" anchor="t">
+            <a:spAutoFit/>
+          </a:bodyPr>
+          <a:lstStyle/>
+          <a:p>
+            <a:pPr>
+              <a:defRPr sz="1200" b="0">
+                <a:solidFill>
+                  <a:srgbClr val="9EA1A7"/>
                 </a:solidFill>
                 <a:latin typeface="Arial"/>
               </a:defRPr>
